--- a/kmp/KMP 알고리즘 세미나.pptx
+++ b/kmp/KMP 알고리즘 세미나.pptx
@@ -61,7 +61,7 @@
     <p:sldId id="306" r:id="rId52"/>
     <p:sldId id="307" r:id="rId53"/>
     <p:sldId id="308" r:id="rId54"/>
-    <p:sldId id="309" r:id="rId55"/>
+    <p:sldId id="362" r:id="rId55"/>
     <p:sldId id="311" r:id="rId56"/>
     <p:sldId id="312" r:id="rId57"/>
     <p:sldId id="319" r:id="rId58"/>
@@ -72,31 +72,31 @@
     <p:sldId id="317" r:id="rId63"/>
     <p:sldId id="322" r:id="rId64"/>
     <p:sldId id="323" r:id="rId65"/>
-    <p:sldId id="321" r:id="rId66"/>
-    <p:sldId id="325" r:id="rId67"/>
-    <p:sldId id="326" r:id="rId68"/>
-    <p:sldId id="329" r:id="rId69"/>
-    <p:sldId id="331" r:id="rId70"/>
-    <p:sldId id="330" r:id="rId71"/>
-    <p:sldId id="332" r:id="rId72"/>
-    <p:sldId id="333" r:id="rId73"/>
-    <p:sldId id="335" r:id="rId74"/>
-    <p:sldId id="334" r:id="rId75"/>
-    <p:sldId id="338" r:id="rId76"/>
-    <p:sldId id="337" r:id="rId77"/>
-    <p:sldId id="339" r:id="rId78"/>
-    <p:sldId id="340" r:id="rId79"/>
-    <p:sldId id="341" r:id="rId80"/>
-    <p:sldId id="342" r:id="rId81"/>
-    <p:sldId id="343" r:id="rId82"/>
-    <p:sldId id="344" r:id="rId83"/>
-    <p:sldId id="345" r:id="rId84"/>
-    <p:sldId id="346" r:id="rId85"/>
-    <p:sldId id="347" r:id="rId86"/>
-    <p:sldId id="348" r:id="rId87"/>
-    <p:sldId id="349" r:id="rId88"/>
-    <p:sldId id="350" r:id="rId89"/>
-    <p:sldId id="351" r:id="rId90"/>
+    <p:sldId id="363" r:id="rId66"/>
+    <p:sldId id="364" r:id="rId67"/>
+    <p:sldId id="365" r:id="rId68"/>
+    <p:sldId id="326" r:id="rId69"/>
+    <p:sldId id="329" r:id="rId70"/>
+    <p:sldId id="331" r:id="rId71"/>
+    <p:sldId id="330" r:id="rId72"/>
+    <p:sldId id="332" r:id="rId73"/>
+    <p:sldId id="333" r:id="rId74"/>
+    <p:sldId id="335" r:id="rId75"/>
+    <p:sldId id="334" r:id="rId76"/>
+    <p:sldId id="338" r:id="rId77"/>
+    <p:sldId id="337" r:id="rId78"/>
+    <p:sldId id="339" r:id="rId79"/>
+    <p:sldId id="340" r:id="rId80"/>
+    <p:sldId id="341" r:id="rId81"/>
+    <p:sldId id="342" r:id="rId82"/>
+    <p:sldId id="343" r:id="rId83"/>
+    <p:sldId id="344" r:id="rId84"/>
+    <p:sldId id="345" r:id="rId85"/>
+    <p:sldId id="346" r:id="rId86"/>
+    <p:sldId id="347" r:id="rId87"/>
+    <p:sldId id="348" r:id="rId88"/>
+    <p:sldId id="349" r:id="rId89"/>
+    <p:sldId id="350" r:id="rId90"/>
     <p:sldId id="352" r:id="rId91"/>
     <p:sldId id="354" r:id="rId92"/>
     <p:sldId id="355" r:id="rId93"/>
@@ -1627,7 +1627,7 @@
         <p:cNvPr id="1" name="">
           <a:extLst>
             <a:ext uri="{FF2B5EF4-FFF2-40B4-BE49-F238E27FC236}">
-              <a16:creationId xmlns:a16="http://schemas.microsoft.com/office/drawing/2014/main" id="{83D8C02D-BD50-D9E2-F930-60E64D5ADA67}"/>
+              <a16:creationId xmlns:a16="http://schemas.microsoft.com/office/drawing/2014/main" id="{47CA60AA-F253-1A02-B761-F80796D0AB44}"/>
             </a:ext>
           </a:extLst>
         </p:cNvPr>
@@ -1647,7 +1647,7 @@
           <p:cNvPr id="2" name="슬라이드 이미지 개체 틀 1">
             <a:extLst>
               <a:ext uri="{FF2B5EF4-FFF2-40B4-BE49-F238E27FC236}">
-                <a16:creationId xmlns:a16="http://schemas.microsoft.com/office/drawing/2014/main" id="{61AC578A-D5C0-F148-B0D0-3C5D7C83AFC9}"/>
+                <a16:creationId xmlns:a16="http://schemas.microsoft.com/office/drawing/2014/main" id="{A964C5B8-8018-EE18-E346-DF112933CB11}"/>
               </a:ext>
             </a:extLst>
           </p:cNvPr>
@@ -1665,7 +1665,7 @@
           <p:cNvPr id="3" name="슬라이드 노트 개체 틀 2">
             <a:extLst>
               <a:ext uri="{FF2B5EF4-FFF2-40B4-BE49-F238E27FC236}">
-                <a16:creationId xmlns:a16="http://schemas.microsoft.com/office/drawing/2014/main" id="{7C139870-50FE-7EE2-3260-435477EA0F81}"/>
+                <a16:creationId xmlns:a16="http://schemas.microsoft.com/office/drawing/2014/main" id="{3127F6D8-EE86-59D7-529E-7229FC32BD8A}"/>
               </a:ext>
             </a:extLst>
           </p:cNvPr>
@@ -1690,7 +1690,7 @@
           <p:cNvPr id="4" name="슬라이드 번호 개체 틀 3">
             <a:extLst>
               <a:ext uri="{FF2B5EF4-FFF2-40B4-BE49-F238E27FC236}">
-                <a16:creationId xmlns:a16="http://schemas.microsoft.com/office/drawing/2014/main" id="{64DAEF07-6218-C5A7-F3B6-5834B4F41EF7}"/>
+                <a16:creationId xmlns:a16="http://schemas.microsoft.com/office/drawing/2014/main" id="{A7B8AD46-56B7-F03C-079A-605589815A18}"/>
               </a:ext>
             </a:extLst>
           </p:cNvPr>
@@ -1717,7 +1717,7 @@
     </p:spTree>
     <p:extLst>
       <p:ext uri="{BB962C8B-B14F-4D97-AF65-F5344CB8AC3E}">
-        <p14:creationId xmlns:p14="http://schemas.microsoft.com/office/powerpoint/2010/main" val="350819778"/>
+        <p14:creationId xmlns:p14="http://schemas.microsoft.com/office/powerpoint/2010/main" val="350338461"/>
       </p:ext>
     </p:extLst>
   </p:cSld>
@@ -2767,7 +2767,7 @@
         <p:cNvPr id="1" name="">
           <a:extLst>
             <a:ext uri="{FF2B5EF4-FFF2-40B4-BE49-F238E27FC236}">
-              <a16:creationId xmlns:a16="http://schemas.microsoft.com/office/drawing/2014/main" id="{7566132E-121D-2627-EF43-6519730D87F9}"/>
+              <a16:creationId xmlns:a16="http://schemas.microsoft.com/office/drawing/2014/main" id="{6A7DDC06-80A2-A33F-7E20-CC9F9CB600A7}"/>
             </a:ext>
           </a:extLst>
         </p:cNvPr>
@@ -2787,7 +2787,7 @@
           <p:cNvPr id="2" name="슬라이드 이미지 개체 틀 1">
             <a:extLst>
               <a:ext uri="{FF2B5EF4-FFF2-40B4-BE49-F238E27FC236}">
-                <a16:creationId xmlns:a16="http://schemas.microsoft.com/office/drawing/2014/main" id="{E536F396-F33C-F745-C0E2-218A273BF3DB}"/>
+                <a16:creationId xmlns:a16="http://schemas.microsoft.com/office/drawing/2014/main" id="{97F24F89-56A3-29D9-7D0A-B4EB41ABC70A}"/>
               </a:ext>
             </a:extLst>
           </p:cNvPr>
@@ -2805,7 +2805,7 @@
           <p:cNvPr id="3" name="슬라이드 노트 개체 틀 2">
             <a:extLst>
               <a:ext uri="{FF2B5EF4-FFF2-40B4-BE49-F238E27FC236}">
-                <a16:creationId xmlns:a16="http://schemas.microsoft.com/office/drawing/2014/main" id="{BFF8463C-CAE1-05F1-0E8B-71BD8FC683E0}"/>
+                <a16:creationId xmlns:a16="http://schemas.microsoft.com/office/drawing/2014/main" id="{5F607656-AD9F-0E27-9B42-6B495E35DB38}"/>
               </a:ext>
             </a:extLst>
           </p:cNvPr>
@@ -2830,7 +2830,7 @@
           <p:cNvPr id="4" name="슬라이드 번호 개체 틀 3">
             <a:extLst>
               <a:ext uri="{FF2B5EF4-FFF2-40B4-BE49-F238E27FC236}">
-                <a16:creationId xmlns:a16="http://schemas.microsoft.com/office/drawing/2014/main" id="{074691ED-8D73-F5D0-3117-8E28FC274F43}"/>
+                <a16:creationId xmlns:a16="http://schemas.microsoft.com/office/drawing/2014/main" id="{D101624A-0EC9-025E-1375-4F580568276B}"/>
               </a:ext>
             </a:extLst>
           </p:cNvPr>
@@ -2857,7 +2857,7 @@
     </p:spTree>
     <p:extLst>
       <p:ext uri="{BB962C8B-B14F-4D97-AF65-F5344CB8AC3E}">
-        <p14:creationId xmlns:p14="http://schemas.microsoft.com/office/powerpoint/2010/main" val="3489950172"/>
+        <p14:creationId xmlns:p14="http://schemas.microsoft.com/office/powerpoint/2010/main" val="2748178814"/>
       </p:ext>
     </p:extLst>
   </p:cSld>
@@ -2983,7 +2983,7 @@
         <p:cNvPr id="1" name="">
           <a:extLst>
             <a:ext uri="{FF2B5EF4-FFF2-40B4-BE49-F238E27FC236}">
-              <a16:creationId xmlns:a16="http://schemas.microsoft.com/office/drawing/2014/main" id="{819E1E30-2E9B-8BEC-5A2D-25D1E7FA431A}"/>
+              <a16:creationId xmlns:a16="http://schemas.microsoft.com/office/drawing/2014/main" id="{DCA103DF-9C24-69B8-7394-B0DD743B215D}"/>
             </a:ext>
           </a:extLst>
         </p:cNvPr>
@@ -3003,7 +3003,7 @@
           <p:cNvPr id="2" name="슬라이드 이미지 개체 틀 1">
             <a:extLst>
               <a:ext uri="{FF2B5EF4-FFF2-40B4-BE49-F238E27FC236}">
-                <a16:creationId xmlns:a16="http://schemas.microsoft.com/office/drawing/2014/main" id="{99A39421-CCFC-A742-1041-E4055BD43953}"/>
+                <a16:creationId xmlns:a16="http://schemas.microsoft.com/office/drawing/2014/main" id="{083C360E-B5B0-9E44-17B9-FB3B0276380F}"/>
               </a:ext>
             </a:extLst>
           </p:cNvPr>
@@ -3021,7 +3021,7 @@
           <p:cNvPr id="3" name="슬라이드 노트 개체 틀 2">
             <a:extLst>
               <a:ext uri="{FF2B5EF4-FFF2-40B4-BE49-F238E27FC236}">
-                <a16:creationId xmlns:a16="http://schemas.microsoft.com/office/drawing/2014/main" id="{0984CDE2-06B4-EC29-E229-7ABC7731C7B4}"/>
+                <a16:creationId xmlns:a16="http://schemas.microsoft.com/office/drawing/2014/main" id="{5913E4AC-2F16-4843-07DF-2BBFA7CF5619}"/>
               </a:ext>
             </a:extLst>
           </p:cNvPr>
@@ -3046,7 +3046,7 @@
           <p:cNvPr id="4" name="슬라이드 번호 개체 틀 3">
             <a:extLst>
               <a:ext uri="{FF2B5EF4-FFF2-40B4-BE49-F238E27FC236}">
-                <a16:creationId xmlns:a16="http://schemas.microsoft.com/office/drawing/2014/main" id="{F85F7C5F-CCF8-5E01-DC16-6768C866F8F2}"/>
+                <a16:creationId xmlns:a16="http://schemas.microsoft.com/office/drawing/2014/main" id="{0F330A9E-2389-79C3-D769-3A1F36CD66D2}"/>
               </a:ext>
             </a:extLst>
           </p:cNvPr>
@@ -3073,7 +3073,7 @@
     </p:spTree>
     <p:extLst>
       <p:ext uri="{BB962C8B-B14F-4D97-AF65-F5344CB8AC3E}">
-        <p14:creationId xmlns:p14="http://schemas.microsoft.com/office/powerpoint/2010/main" val="860711793"/>
+        <p14:creationId xmlns:p14="http://schemas.microsoft.com/office/powerpoint/2010/main" val="2296319409"/>
       </p:ext>
     </p:extLst>
   </p:cSld>
@@ -3084,6 +3084,114 @@
 </file>
 
 <file path=ppt/notesSlides/notesSlide31.xml><?xml version="1.0" encoding="utf-8"?>
+<p:notes xmlns:a="http://schemas.openxmlformats.org/drawingml/2006/main" xmlns:r="http://schemas.openxmlformats.org/officeDocument/2006/relationships" xmlns:p="http://schemas.openxmlformats.org/presentationml/2006/main">
+  <p:cSld>
+    <p:spTree>
+      <p:nvGrpSpPr>
+        <p:cNvPr id="1" name="">
+          <a:extLst>
+            <a:ext uri="{FF2B5EF4-FFF2-40B4-BE49-F238E27FC236}">
+              <a16:creationId xmlns:a16="http://schemas.microsoft.com/office/drawing/2014/main" id="{413E8612-038B-06DD-C885-1C9F11C7ACB0}"/>
+            </a:ext>
+          </a:extLst>
+        </p:cNvPr>
+        <p:cNvGrpSpPr/>
+        <p:nvPr/>
+      </p:nvGrpSpPr>
+      <p:grpSpPr>
+        <a:xfrm>
+          <a:off x="0" y="0"/>
+          <a:ext cx="0" cy="0"/>
+          <a:chOff x="0" y="0"/>
+          <a:chExt cx="0" cy="0"/>
+        </a:xfrm>
+      </p:grpSpPr>
+      <p:sp>
+        <p:nvSpPr>
+          <p:cNvPr id="2" name="슬라이드 이미지 개체 틀 1">
+            <a:extLst>
+              <a:ext uri="{FF2B5EF4-FFF2-40B4-BE49-F238E27FC236}">
+                <a16:creationId xmlns:a16="http://schemas.microsoft.com/office/drawing/2014/main" id="{56769825-AE29-3E71-751E-EE59096AD4C3}"/>
+              </a:ext>
+            </a:extLst>
+          </p:cNvPr>
+          <p:cNvSpPr>
+            <a:spLocks noGrp="1" noRot="1" noChangeAspect="1"/>
+          </p:cNvSpPr>
+          <p:nvPr>
+            <p:ph type="sldImg"/>
+          </p:nvPr>
+        </p:nvSpPr>
+        <p:spPr/>
+      </p:sp>
+      <p:sp>
+        <p:nvSpPr>
+          <p:cNvPr id="3" name="슬라이드 노트 개체 틀 2">
+            <a:extLst>
+              <a:ext uri="{FF2B5EF4-FFF2-40B4-BE49-F238E27FC236}">
+                <a16:creationId xmlns:a16="http://schemas.microsoft.com/office/drawing/2014/main" id="{029022DD-BCDE-42FE-8137-BBEE44A8DAE3}"/>
+              </a:ext>
+            </a:extLst>
+          </p:cNvPr>
+          <p:cNvSpPr>
+            <a:spLocks noGrp="1"/>
+          </p:cNvSpPr>
+          <p:nvPr>
+            <p:ph type="body" idx="1"/>
+          </p:nvPr>
+        </p:nvSpPr>
+        <p:spPr/>
+        <p:txBody>
+          <a:bodyPr/>
+          <a:lstStyle/>
+          <a:p>
+            <a:endParaRPr lang="ko-KR" altLang="en-US" dirty="0"/>
+          </a:p>
+        </p:txBody>
+      </p:sp>
+      <p:sp>
+        <p:nvSpPr>
+          <p:cNvPr id="4" name="슬라이드 번호 개체 틀 3">
+            <a:extLst>
+              <a:ext uri="{FF2B5EF4-FFF2-40B4-BE49-F238E27FC236}">
+                <a16:creationId xmlns:a16="http://schemas.microsoft.com/office/drawing/2014/main" id="{55CB9C75-8F58-670A-7AD6-CABFF573649F}"/>
+              </a:ext>
+            </a:extLst>
+          </p:cNvPr>
+          <p:cNvSpPr>
+            <a:spLocks noGrp="1"/>
+          </p:cNvSpPr>
+          <p:nvPr>
+            <p:ph type="sldNum" sz="quarter" idx="5"/>
+          </p:nvPr>
+        </p:nvSpPr>
+        <p:spPr/>
+        <p:txBody>
+          <a:bodyPr/>
+          <a:lstStyle/>
+          <a:p>
+            <a:fld id="{767573A8-D025-446C-8C67-05AAB470FAB2}" type="slidenum">
+              <a:rPr lang="ko-KR" altLang="en-US" smtClean="0"/>
+              <a:t>67</a:t>
+            </a:fld>
+            <a:endParaRPr lang="ko-KR" altLang="en-US"/>
+          </a:p>
+        </p:txBody>
+      </p:sp>
+    </p:spTree>
+    <p:extLst>
+      <p:ext uri="{BB962C8B-B14F-4D97-AF65-F5344CB8AC3E}">
+        <p14:creationId xmlns:p14="http://schemas.microsoft.com/office/powerpoint/2010/main" val="1756020711"/>
+      </p:ext>
+    </p:extLst>
+  </p:cSld>
+  <p:clrMapOvr>
+    <a:masterClrMapping/>
+  </p:clrMapOvr>
+</p:notes>
+</file>
+
+<file path=ppt/notesSlides/notesSlide32.xml><?xml version="1.0" encoding="utf-8"?>
 <p:notes xmlns:a="http://schemas.openxmlformats.org/drawingml/2006/main" xmlns:r="http://schemas.openxmlformats.org/officeDocument/2006/relationships" xmlns:p="http://schemas.openxmlformats.org/presentationml/2006/main">
   <p:cSld>
     <p:spTree>
@@ -3172,7 +3280,7 @@
           <a:p>
             <a:fld id="{767573A8-D025-446C-8C67-05AAB470FAB2}" type="slidenum">
               <a:rPr lang="ko-KR" altLang="en-US" smtClean="0"/>
-              <a:t>67</a:t>
+              <a:t>68</a:t>
             </a:fld>
             <a:endParaRPr lang="ko-KR" altLang="en-US"/>
           </a:p>
@@ -3191,7 +3299,7 @@
 </p:notes>
 </file>
 
-<file path=ppt/notesSlides/notesSlide32.xml><?xml version="1.0" encoding="utf-8"?>
+<file path=ppt/notesSlides/notesSlide33.xml><?xml version="1.0" encoding="utf-8"?>
 <p:notes xmlns:a="http://schemas.openxmlformats.org/drawingml/2006/main" xmlns:r="http://schemas.openxmlformats.org/officeDocument/2006/relationships" xmlns:p="http://schemas.openxmlformats.org/presentationml/2006/main">
   <p:cSld>
     <p:spTree>
@@ -3280,7 +3388,7 @@
           <a:p>
             <a:fld id="{767573A8-D025-446C-8C67-05AAB470FAB2}" type="slidenum">
               <a:rPr lang="ko-KR" altLang="en-US" smtClean="0"/>
-              <a:t>68</a:t>
+              <a:t>69</a:t>
             </a:fld>
             <a:endParaRPr lang="ko-KR" altLang="en-US"/>
           </a:p>
@@ -3299,7 +3407,7 @@
 </p:notes>
 </file>
 
-<file path=ppt/notesSlides/notesSlide33.xml><?xml version="1.0" encoding="utf-8"?>
+<file path=ppt/notesSlides/notesSlide34.xml><?xml version="1.0" encoding="utf-8"?>
 <p:notes xmlns:a="http://schemas.openxmlformats.org/drawingml/2006/main" xmlns:r="http://schemas.openxmlformats.org/officeDocument/2006/relationships" xmlns:p="http://schemas.openxmlformats.org/presentationml/2006/main">
   <p:cSld>
     <p:spTree>
@@ -3388,7 +3496,7 @@
           <a:p>
             <a:fld id="{767573A8-D025-446C-8C67-05AAB470FAB2}" type="slidenum">
               <a:rPr lang="ko-KR" altLang="en-US" smtClean="0"/>
-              <a:t>69</a:t>
+              <a:t>70</a:t>
             </a:fld>
             <a:endParaRPr lang="ko-KR" altLang="en-US"/>
           </a:p>
@@ -3407,7 +3515,7 @@
 </p:notes>
 </file>
 
-<file path=ppt/notesSlides/notesSlide34.xml><?xml version="1.0" encoding="utf-8"?>
+<file path=ppt/notesSlides/notesSlide35.xml><?xml version="1.0" encoding="utf-8"?>
 <p:notes xmlns:a="http://schemas.openxmlformats.org/drawingml/2006/main" xmlns:r="http://schemas.openxmlformats.org/officeDocument/2006/relationships" xmlns:p="http://schemas.openxmlformats.org/presentationml/2006/main">
   <p:cSld>
     <p:spTree>
@@ -3496,7 +3604,7 @@
           <a:p>
             <a:fld id="{767573A8-D025-446C-8C67-05AAB470FAB2}" type="slidenum">
               <a:rPr lang="ko-KR" altLang="en-US" smtClean="0"/>
-              <a:t>70</a:t>
+              <a:t>71</a:t>
             </a:fld>
             <a:endParaRPr lang="ko-KR" altLang="en-US"/>
           </a:p>
@@ -3515,7 +3623,7 @@
 </p:notes>
 </file>
 
-<file path=ppt/notesSlides/notesSlide35.xml><?xml version="1.0" encoding="utf-8"?>
+<file path=ppt/notesSlides/notesSlide36.xml><?xml version="1.0" encoding="utf-8"?>
 <p:notes xmlns:a="http://schemas.openxmlformats.org/drawingml/2006/main" xmlns:r="http://schemas.openxmlformats.org/officeDocument/2006/relationships" xmlns:p="http://schemas.openxmlformats.org/presentationml/2006/main">
   <p:cSld>
     <p:spTree>
@@ -3604,7 +3712,7 @@
           <a:p>
             <a:fld id="{767573A8-D025-446C-8C67-05AAB470FAB2}" type="slidenum">
               <a:rPr lang="ko-KR" altLang="en-US" smtClean="0"/>
-              <a:t>71</a:t>
+              <a:t>72</a:t>
             </a:fld>
             <a:endParaRPr lang="ko-KR" altLang="en-US"/>
           </a:p>
@@ -3623,7 +3731,7 @@
 </p:notes>
 </file>
 
-<file path=ppt/notesSlides/notesSlide36.xml><?xml version="1.0" encoding="utf-8"?>
+<file path=ppt/notesSlides/notesSlide37.xml><?xml version="1.0" encoding="utf-8"?>
 <p:notes xmlns:a="http://schemas.openxmlformats.org/drawingml/2006/main" xmlns:r="http://schemas.openxmlformats.org/officeDocument/2006/relationships" xmlns:p="http://schemas.openxmlformats.org/presentationml/2006/main">
   <p:cSld>
     <p:spTree>
@@ -3712,7 +3820,7 @@
           <a:p>
             <a:fld id="{767573A8-D025-446C-8C67-05AAB470FAB2}" type="slidenum">
               <a:rPr lang="ko-KR" altLang="en-US" smtClean="0"/>
-              <a:t>72</a:t>
+              <a:t>73</a:t>
             </a:fld>
             <a:endParaRPr lang="ko-KR" altLang="en-US"/>
           </a:p>
@@ -3731,7 +3839,7 @@
 </p:notes>
 </file>
 
-<file path=ppt/notesSlides/notesSlide37.xml><?xml version="1.0" encoding="utf-8"?>
+<file path=ppt/notesSlides/notesSlide38.xml><?xml version="1.0" encoding="utf-8"?>
 <p:notes xmlns:a="http://schemas.openxmlformats.org/drawingml/2006/main" xmlns:r="http://schemas.openxmlformats.org/officeDocument/2006/relationships" xmlns:p="http://schemas.openxmlformats.org/presentationml/2006/main">
   <p:cSld>
     <p:spTree>
@@ -3820,7 +3928,7 @@
           <a:p>
             <a:fld id="{767573A8-D025-446C-8C67-05AAB470FAB2}" type="slidenum">
               <a:rPr lang="ko-KR" altLang="en-US" smtClean="0"/>
-              <a:t>73</a:t>
+              <a:t>74</a:t>
             </a:fld>
             <a:endParaRPr lang="ko-KR" altLang="en-US"/>
           </a:p>
@@ -3839,7 +3947,7 @@
 </p:notes>
 </file>
 
-<file path=ppt/notesSlides/notesSlide38.xml><?xml version="1.0" encoding="utf-8"?>
+<file path=ppt/notesSlides/notesSlide39.xml><?xml version="1.0" encoding="utf-8"?>
 <p:notes xmlns:a="http://schemas.openxmlformats.org/drawingml/2006/main" xmlns:r="http://schemas.openxmlformats.org/officeDocument/2006/relationships" xmlns:p="http://schemas.openxmlformats.org/presentationml/2006/main">
   <p:cSld>
     <p:spTree>
@@ -3928,7 +4036,7 @@
           <a:p>
             <a:fld id="{767573A8-D025-446C-8C67-05AAB470FAB2}" type="slidenum">
               <a:rPr lang="ko-KR" altLang="en-US" smtClean="0"/>
-              <a:t>74</a:t>
+              <a:t>75</a:t>
             </a:fld>
             <a:endParaRPr lang="ko-KR" altLang="en-US"/>
           </a:p>
@@ -3938,114 +4046,6 @@
     <p:extLst>
       <p:ext uri="{BB962C8B-B14F-4D97-AF65-F5344CB8AC3E}">
         <p14:creationId xmlns:p14="http://schemas.microsoft.com/office/powerpoint/2010/main" val="762730290"/>
-      </p:ext>
-    </p:extLst>
-  </p:cSld>
-  <p:clrMapOvr>
-    <a:masterClrMapping/>
-  </p:clrMapOvr>
-</p:notes>
-</file>
-
-<file path=ppt/notesSlides/notesSlide39.xml><?xml version="1.0" encoding="utf-8"?>
-<p:notes xmlns:a="http://schemas.openxmlformats.org/drawingml/2006/main" xmlns:r="http://schemas.openxmlformats.org/officeDocument/2006/relationships" xmlns:p="http://schemas.openxmlformats.org/presentationml/2006/main">
-  <p:cSld>
-    <p:spTree>
-      <p:nvGrpSpPr>
-        <p:cNvPr id="1" name="">
-          <a:extLst>
-            <a:ext uri="{FF2B5EF4-FFF2-40B4-BE49-F238E27FC236}">
-              <a16:creationId xmlns:a16="http://schemas.microsoft.com/office/drawing/2014/main" id="{AF48754E-B8CE-6138-6F1B-CBA7A2CA5155}"/>
-            </a:ext>
-          </a:extLst>
-        </p:cNvPr>
-        <p:cNvGrpSpPr/>
-        <p:nvPr/>
-      </p:nvGrpSpPr>
-      <p:grpSpPr>
-        <a:xfrm>
-          <a:off x="0" y="0"/>
-          <a:ext cx="0" cy="0"/>
-          <a:chOff x="0" y="0"/>
-          <a:chExt cx="0" cy="0"/>
-        </a:xfrm>
-      </p:grpSpPr>
-      <p:sp>
-        <p:nvSpPr>
-          <p:cNvPr id="2" name="슬라이드 이미지 개체 틀 1">
-            <a:extLst>
-              <a:ext uri="{FF2B5EF4-FFF2-40B4-BE49-F238E27FC236}">
-                <a16:creationId xmlns:a16="http://schemas.microsoft.com/office/drawing/2014/main" id="{4CC04E2B-6C9A-6E3D-C39A-4CC3AB658A2A}"/>
-              </a:ext>
-            </a:extLst>
-          </p:cNvPr>
-          <p:cNvSpPr>
-            <a:spLocks noGrp="1" noRot="1" noChangeAspect="1"/>
-          </p:cNvSpPr>
-          <p:nvPr>
-            <p:ph type="sldImg"/>
-          </p:nvPr>
-        </p:nvSpPr>
-        <p:spPr/>
-      </p:sp>
-      <p:sp>
-        <p:nvSpPr>
-          <p:cNvPr id="3" name="슬라이드 노트 개체 틀 2">
-            <a:extLst>
-              <a:ext uri="{FF2B5EF4-FFF2-40B4-BE49-F238E27FC236}">
-                <a16:creationId xmlns:a16="http://schemas.microsoft.com/office/drawing/2014/main" id="{DF7D75E2-52E2-B8F7-06BF-E81EE851BEC9}"/>
-              </a:ext>
-            </a:extLst>
-          </p:cNvPr>
-          <p:cNvSpPr>
-            <a:spLocks noGrp="1"/>
-          </p:cNvSpPr>
-          <p:nvPr>
-            <p:ph type="body" idx="1"/>
-          </p:nvPr>
-        </p:nvSpPr>
-        <p:spPr/>
-        <p:txBody>
-          <a:bodyPr/>
-          <a:lstStyle/>
-          <a:p>
-            <a:endParaRPr lang="ko-KR" altLang="en-US" dirty="0"/>
-          </a:p>
-        </p:txBody>
-      </p:sp>
-      <p:sp>
-        <p:nvSpPr>
-          <p:cNvPr id="4" name="슬라이드 번호 개체 틀 3">
-            <a:extLst>
-              <a:ext uri="{FF2B5EF4-FFF2-40B4-BE49-F238E27FC236}">
-                <a16:creationId xmlns:a16="http://schemas.microsoft.com/office/drawing/2014/main" id="{926FD54F-3BDB-B724-536F-5E0AA1F5CF9B}"/>
-              </a:ext>
-            </a:extLst>
-          </p:cNvPr>
-          <p:cNvSpPr>
-            <a:spLocks noGrp="1"/>
-          </p:cNvSpPr>
-          <p:nvPr>
-            <p:ph type="sldNum" sz="quarter" idx="5"/>
-          </p:nvPr>
-        </p:nvSpPr>
-        <p:spPr/>
-        <p:txBody>
-          <a:bodyPr/>
-          <a:lstStyle/>
-          <a:p>
-            <a:fld id="{767573A8-D025-446C-8C67-05AAB470FAB2}" type="slidenum">
-              <a:rPr lang="ko-KR" altLang="en-US" smtClean="0"/>
-              <a:t>75</a:t>
-            </a:fld>
-            <a:endParaRPr lang="ko-KR" altLang="en-US"/>
-          </a:p>
-        </p:txBody>
-      </p:sp>
-    </p:spTree>
-    <p:extLst>
-      <p:ext uri="{BB962C8B-B14F-4D97-AF65-F5344CB8AC3E}">
-        <p14:creationId xmlns:p14="http://schemas.microsoft.com/office/powerpoint/2010/main" val="2361182202"/>
       </p:ext>
     </p:extLst>
   </p:cSld>
@@ -4171,6 +4171,114 @@
         <p:cNvPr id="1" name="">
           <a:extLst>
             <a:ext uri="{FF2B5EF4-FFF2-40B4-BE49-F238E27FC236}">
+              <a16:creationId xmlns:a16="http://schemas.microsoft.com/office/drawing/2014/main" id="{AF48754E-B8CE-6138-6F1B-CBA7A2CA5155}"/>
+            </a:ext>
+          </a:extLst>
+        </p:cNvPr>
+        <p:cNvGrpSpPr/>
+        <p:nvPr/>
+      </p:nvGrpSpPr>
+      <p:grpSpPr>
+        <a:xfrm>
+          <a:off x="0" y="0"/>
+          <a:ext cx="0" cy="0"/>
+          <a:chOff x="0" y="0"/>
+          <a:chExt cx="0" cy="0"/>
+        </a:xfrm>
+      </p:grpSpPr>
+      <p:sp>
+        <p:nvSpPr>
+          <p:cNvPr id="2" name="슬라이드 이미지 개체 틀 1">
+            <a:extLst>
+              <a:ext uri="{FF2B5EF4-FFF2-40B4-BE49-F238E27FC236}">
+                <a16:creationId xmlns:a16="http://schemas.microsoft.com/office/drawing/2014/main" id="{4CC04E2B-6C9A-6E3D-C39A-4CC3AB658A2A}"/>
+              </a:ext>
+            </a:extLst>
+          </p:cNvPr>
+          <p:cNvSpPr>
+            <a:spLocks noGrp="1" noRot="1" noChangeAspect="1"/>
+          </p:cNvSpPr>
+          <p:nvPr>
+            <p:ph type="sldImg"/>
+          </p:nvPr>
+        </p:nvSpPr>
+        <p:spPr/>
+      </p:sp>
+      <p:sp>
+        <p:nvSpPr>
+          <p:cNvPr id="3" name="슬라이드 노트 개체 틀 2">
+            <a:extLst>
+              <a:ext uri="{FF2B5EF4-FFF2-40B4-BE49-F238E27FC236}">
+                <a16:creationId xmlns:a16="http://schemas.microsoft.com/office/drawing/2014/main" id="{DF7D75E2-52E2-B8F7-06BF-E81EE851BEC9}"/>
+              </a:ext>
+            </a:extLst>
+          </p:cNvPr>
+          <p:cNvSpPr>
+            <a:spLocks noGrp="1"/>
+          </p:cNvSpPr>
+          <p:nvPr>
+            <p:ph type="body" idx="1"/>
+          </p:nvPr>
+        </p:nvSpPr>
+        <p:spPr/>
+        <p:txBody>
+          <a:bodyPr/>
+          <a:lstStyle/>
+          <a:p>
+            <a:endParaRPr lang="ko-KR" altLang="en-US" dirty="0"/>
+          </a:p>
+        </p:txBody>
+      </p:sp>
+      <p:sp>
+        <p:nvSpPr>
+          <p:cNvPr id="4" name="슬라이드 번호 개체 틀 3">
+            <a:extLst>
+              <a:ext uri="{FF2B5EF4-FFF2-40B4-BE49-F238E27FC236}">
+                <a16:creationId xmlns:a16="http://schemas.microsoft.com/office/drawing/2014/main" id="{926FD54F-3BDB-B724-536F-5E0AA1F5CF9B}"/>
+              </a:ext>
+            </a:extLst>
+          </p:cNvPr>
+          <p:cNvSpPr>
+            <a:spLocks noGrp="1"/>
+          </p:cNvSpPr>
+          <p:nvPr>
+            <p:ph type="sldNum" sz="quarter" idx="5"/>
+          </p:nvPr>
+        </p:nvSpPr>
+        <p:spPr/>
+        <p:txBody>
+          <a:bodyPr/>
+          <a:lstStyle/>
+          <a:p>
+            <a:fld id="{767573A8-D025-446C-8C67-05AAB470FAB2}" type="slidenum">
+              <a:rPr lang="ko-KR" altLang="en-US" smtClean="0"/>
+              <a:t>76</a:t>
+            </a:fld>
+            <a:endParaRPr lang="ko-KR" altLang="en-US"/>
+          </a:p>
+        </p:txBody>
+      </p:sp>
+    </p:spTree>
+    <p:extLst>
+      <p:ext uri="{BB962C8B-B14F-4D97-AF65-F5344CB8AC3E}">
+        <p14:creationId xmlns:p14="http://schemas.microsoft.com/office/powerpoint/2010/main" val="2361182202"/>
+      </p:ext>
+    </p:extLst>
+  </p:cSld>
+  <p:clrMapOvr>
+    <a:masterClrMapping/>
+  </p:clrMapOvr>
+</p:notes>
+</file>
+
+<file path=ppt/notesSlides/notesSlide41.xml><?xml version="1.0" encoding="utf-8"?>
+<p:notes xmlns:a="http://schemas.openxmlformats.org/drawingml/2006/main" xmlns:r="http://schemas.openxmlformats.org/officeDocument/2006/relationships" xmlns:p="http://schemas.openxmlformats.org/presentationml/2006/main">
+  <p:cSld>
+    <p:spTree>
+      <p:nvGrpSpPr>
+        <p:cNvPr id="1" name="">
+          <a:extLst>
+            <a:ext uri="{FF2B5EF4-FFF2-40B4-BE49-F238E27FC236}">
               <a16:creationId xmlns:a16="http://schemas.microsoft.com/office/drawing/2014/main" id="{5AEBA6E8-A8FD-3B5F-EE42-C232AA319CA4}"/>
             </a:ext>
           </a:extLst>
@@ -4252,7 +4360,7 @@
           <a:p>
             <a:fld id="{767573A8-D025-446C-8C67-05AAB470FAB2}" type="slidenum">
               <a:rPr lang="ko-KR" altLang="en-US" smtClean="0"/>
-              <a:t>76</a:t>
+              <a:t>77</a:t>
             </a:fld>
             <a:endParaRPr lang="ko-KR" altLang="en-US"/>
           </a:p>
@@ -4271,7 +4379,7 @@
 </p:notes>
 </file>
 
-<file path=ppt/notesSlides/notesSlide41.xml><?xml version="1.0" encoding="utf-8"?>
+<file path=ppt/notesSlides/notesSlide42.xml><?xml version="1.0" encoding="utf-8"?>
 <p:notes xmlns:a="http://schemas.openxmlformats.org/drawingml/2006/main" xmlns:r="http://schemas.openxmlformats.org/officeDocument/2006/relationships" xmlns:p="http://schemas.openxmlformats.org/presentationml/2006/main">
   <p:cSld>
     <p:spTree>
@@ -4360,7 +4468,7 @@
           <a:p>
             <a:fld id="{767573A8-D025-446C-8C67-05AAB470FAB2}" type="slidenum">
               <a:rPr lang="ko-KR" altLang="en-US" smtClean="0"/>
-              <a:t>77</a:t>
+              <a:t>78</a:t>
             </a:fld>
             <a:endParaRPr lang="ko-KR" altLang="en-US"/>
           </a:p>
@@ -4379,7 +4487,7 @@
 </p:notes>
 </file>
 
-<file path=ppt/notesSlides/notesSlide42.xml><?xml version="1.0" encoding="utf-8"?>
+<file path=ppt/notesSlides/notesSlide43.xml><?xml version="1.0" encoding="utf-8"?>
 <p:notes xmlns:a="http://schemas.openxmlformats.org/drawingml/2006/main" xmlns:r="http://schemas.openxmlformats.org/officeDocument/2006/relationships" xmlns:p="http://schemas.openxmlformats.org/presentationml/2006/main">
   <p:cSld>
     <p:spTree>
@@ -4468,7 +4576,7 @@
           <a:p>
             <a:fld id="{767573A8-D025-446C-8C67-05AAB470FAB2}" type="slidenum">
               <a:rPr lang="ko-KR" altLang="en-US" smtClean="0"/>
-              <a:t>78</a:t>
+              <a:t>79</a:t>
             </a:fld>
             <a:endParaRPr lang="ko-KR" altLang="en-US"/>
           </a:p>
@@ -4487,7 +4595,7 @@
 </p:notes>
 </file>
 
-<file path=ppt/notesSlides/notesSlide43.xml><?xml version="1.0" encoding="utf-8"?>
+<file path=ppt/notesSlides/notesSlide44.xml><?xml version="1.0" encoding="utf-8"?>
 <p:notes xmlns:a="http://schemas.openxmlformats.org/drawingml/2006/main" xmlns:r="http://schemas.openxmlformats.org/officeDocument/2006/relationships" xmlns:p="http://schemas.openxmlformats.org/presentationml/2006/main">
   <p:cSld>
     <p:spTree>
@@ -4576,7 +4684,7 @@
           <a:p>
             <a:fld id="{767573A8-D025-446C-8C67-05AAB470FAB2}" type="slidenum">
               <a:rPr lang="ko-KR" altLang="en-US" smtClean="0"/>
-              <a:t>79</a:t>
+              <a:t>80</a:t>
             </a:fld>
             <a:endParaRPr lang="ko-KR" altLang="en-US"/>
           </a:p>
@@ -4595,7 +4703,7 @@
 </p:notes>
 </file>
 
-<file path=ppt/notesSlides/notesSlide44.xml><?xml version="1.0" encoding="utf-8"?>
+<file path=ppt/notesSlides/notesSlide45.xml><?xml version="1.0" encoding="utf-8"?>
 <p:notes xmlns:a="http://schemas.openxmlformats.org/drawingml/2006/main" xmlns:r="http://schemas.openxmlformats.org/officeDocument/2006/relationships" xmlns:p="http://schemas.openxmlformats.org/presentationml/2006/main">
   <p:cSld>
     <p:spTree>
@@ -4684,7 +4792,7 @@
           <a:p>
             <a:fld id="{767573A8-D025-446C-8C67-05AAB470FAB2}" type="slidenum">
               <a:rPr lang="ko-KR" altLang="en-US" smtClean="0"/>
-              <a:t>80</a:t>
+              <a:t>81</a:t>
             </a:fld>
             <a:endParaRPr lang="ko-KR" altLang="en-US"/>
           </a:p>
@@ -4703,7 +4811,7 @@
 </p:notes>
 </file>
 
-<file path=ppt/notesSlides/notesSlide45.xml><?xml version="1.0" encoding="utf-8"?>
+<file path=ppt/notesSlides/notesSlide46.xml><?xml version="1.0" encoding="utf-8"?>
 <p:notes xmlns:a="http://schemas.openxmlformats.org/drawingml/2006/main" xmlns:r="http://schemas.openxmlformats.org/officeDocument/2006/relationships" xmlns:p="http://schemas.openxmlformats.org/presentationml/2006/main">
   <p:cSld>
     <p:spTree>
@@ -4792,7 +4900,7 @@
           <a:p>
             <a:fld id="{767573A8-D025-446C-8C67-05AAB470FAB2}" type="slidenum">
               <a:rPr lang="ko-KR" altLang="en-US" smtClean="0"/>
-              <a:t>81</a:t>
+              <a:t>82</a:t>
             </a:fld>
             <a:endParaRPr lang="ko-KR" altLang="en-US"/>
           </a:p>
@@ -4811,7 +4919,7 @@
 </p:notes>
 </file>
 
-<file path=ppt/notesSlides/notesSlide46.xml><?xml version="1.0" encoding="utf-8"?>
+<file path=ppt/notesSlides/notesSlide47.xml><?xml version="1.0" encoding="utf-8"?>
 <p:notes xmlns:a="http://schemas.openxmlformats.org/drawingml/2006/main" xmlns:r="http://schemas.openxmlformats.org/officeDocument/2006/relationships" xmlns:p="http://schemas.openxmlformats.org/presentationml/2006/main">
   <p:cSld>
     <p:spTree>
@@ -4900,7 +5008,7 @@
           <a:p>
             <a:fld id="{767573A8-D025-446C-8C67-05AAB470FAB2}" type="slidenum">
               <a:rPr lang="ko-KR" altLang="en-US" smtClean="0"/>
-              <a:t>82</a:t>
+              <a:t>83</a:t>
             </a:fld>
             <a:endParaRPr lang="ko-KR" altLang="en-US"/>
           </a:p>
@@ -4919,7 +5027,7 @@
 </p:notes>
 </file>
 
-<file path=ppt/notesSlides/notesSlide47.xml><?xml version="1.0" encoding="utf-8"?>
+<file path=ppt/notesSlides/notesSlide48.xml><?xml version="1.0" encoding="utf-8"?>
 <p:notes xmlns:a="http://schemas.openxmlformats.org/drawingml/2006/main" xmlns:r="http://schemas.openxmlformats.org/officeDocument/2006/relationships" xmlns:p="http://schemas.openxmlformats.org/presentationml/2006/main">
   <p:cSld>
     <p:spTree>
@@ -5008,7 +5116,7 @@
           <a:p>
             <a:fld id="{767573A8-D025-446C-8C67-05AAB470FAB2}" type="slidenum">
               <a:rPr lang="ko-KR" altLang="en-US" smtClean="0"/>
-              <a:t>83</a:t>
+              <a:t>84</a:t>
             </a:fld>
             <a:endParaRPr lang="ko-KR" altLang="en-US"/>
           </a:p>
@@ -5027,7 +5135,7 @@
 </p:notes>
 </file>
 
-<file path=ppt/notesSlides/notesSlide48.xml><?xml version="1.0" encoding="utf-8"?>
+<file path=ppt/notesSlides/notesSlide49.xml><?xml version="1.0" encoding="utf-8"?>
 <p:notes xmlns:a="http://schemas.openxmlformats.org/drawingml/2006/main" xmlns:r="http://schemas.openxmlformats.org/officeDocument/2006/relationships" xmlns:p="http://schemas.openxmlformats.org/presentationml/2006/main">
   <p:cSld>
     <p:spTree>
@@ -5116,7 +5224,7 @@
           <a:p>
             <a:fld id="{767573A8-D025-446C-8C67-05AAB470FAB2}" type="slidenum">
               <a:rPr lang="ko-KR" altLang="en-US" smtClean="0"/>
-              <a:t>84</a:t>
+              <a:t>85</a:t>
             </a:fld>
             <a:endParaRPr lang="ko-KR" altLang="en-US"/>
           </a:p>
@@ -5126,114 +5234,6 @@
     <p:extLst>
       <p:ext uri="{BB962C8B-B14F-4D97-AF65-F5344CB8AC3E}">
         <p14:creationId xmlns:p14="http://schemas.microsoft.com/office/powerpoint/2010/main" val="1622617147"/>
-      </p:ext>
-    </p:extLst>
-  </p:cSld>
-  <p:clrMapOvr>
-    <a:masterClrMapping/>
-  </p:clrMapOvr>
-</p:notes>
-</file>
-
-<file path=ppt/notesSlides/notesSlide49.xml><?xml version="1.0" encoding="utf-8"?>
-<p:notes xmlns:a="http://schemas.openxmlformats.org/drawingml/2006/main" xmlns:r="http://schemas.openxmlformats.org/officeDocument/2006/relationships" xmlns:p="http://schemas.openxmlformats.org/presentationml/2006/main">
-  <p:cSld>
-    <p:spTree>
-      <p:nvGrpSpPr>
-        <p:cNvPr id="1" name="">
-          <a:extLst>
-            <a:ext uri="{FF2B5EF4-FFF2-40B4-BE49-F238E27FC236}">
-              <a16:creationId xmlns:a16="http://schemas.microsoft.com/office/drawing/2014/main" id="{3B84B3D9-AA22-AE4B-C059-21CC014BEEFA}"/>
-            </a:ext>
-          </a:extLst>
-        </p:cNvPr>
-        <p:cNvGrpSpPr/>
-        <p:nvPr/>
-      </p:nvGrpSpPr>
-      <p:grpSpPr>
-        <a:xfrm>
-          <a:off x="0" y="0"/>
-          <a:ext cx="0" cy="0"/>
-          <a:chOff x="0" y="0"/>
-          <a:chExt cx="0" cy="0"/>
-        </a:xfrm>
-      </p:grpSpPr>
-      <p:sp>
-        <p:nvSpPr>
-          <p:cNvPr id="2" name="슬라이드 이미지 개체 틀 1">
-            <a:extLst>
-              <a:ext uri="{FF2B5EF4-FFF2-40B4-BE49-F238E27FC236}">
-                <a16:creationId xmlns:a16="http://schemas.microsoft.com/office/drawing/2014/main" id="{F37DCD70-6E85-1E67-282C-A781F95F43B3}"/>
-              </a:ext>
-            </a:extLst>
-          </p:cNvPr>
-          <p:cNvSpPr>
-            <a:spLocks noGrp="1" noRot="1" noChangeAspect="1"/>
-          </p:cNvSpPr>
-          <p:nvPr>
-            <p:ph type="sldImg"/>
-          </p:nvPr>
-        </p:nvSpPr>
-        <p:spPr/>
-      </p:sp>
-      <p:sp>
-        <p:nvSpPr>
-          <p:cNvPr id="3" name="슬라이드 노트 개체 틀 2">
-            <a:extLst>
-              <a:ext uri="{FF2B5EF4-FFF2-40B4-BE49-F238E27FC236}">
-                <a16:creationId xmlns:a16="http://schemas.microsoft.com/office/drawing/2014/main" id="{F9DE176B-83FA-A63B-CC5C-FEDF03E41C51}"/>
-              </a:ext>
-            </a:extLst>
-          </p:cNvPr>
-          <p:cNvSpPr>
-            <a:spLocks noGrp="1"/>
-          </p:cNvSpPr>
-          <p:nvPr>
-            <p:ph type="body" idx="1"/>
-          </p:nvPr>
-        </p:nvSpPr>
-        <p:spPr/>
-        <p:txBody>
-          <a:bodyPr/>
-          <a:lstStyle/>
-          <a:p>
-            <a:endParaRPr lang="ko-KR" altLang="en-US" dirty="0"/>
-          </a:p>
-        </p:txBody>
-      </p:sp>
-      <p:sp>
-        <p:nvSpPr>
-          <p:cNvPr id="4" name="슬라이드 번호 개체 틀 3">
-            <a:extLst>
-              <a:ext uri="{FF2B5EF4-FFF2-40B4-BE49-F238E27FC236}">
-                <a16:creationId xmlns:a16="http://schemas.microsoft.com/office/drawing/2014/main" id="{C18D40CD-6EE9-0486-CE76-4E500EAFD0EE}"/>
-              </a:ext>
-            </a:extLst>
-          </p:cNvPr>
-          <p:cNvSpPr>
-            <a:spLocks noGrp="1"/>
-          </p:cNvSpPr>
-          <p:nvPr>
-            <p:ph type="sldNum" sz="quarter" idx="5"/>
-          </p:nvPr>
-        </p:nvSpPr>
-        <p:spPr/>
-        <p:txBody>
-          <a:bodyPr/>
-          <a:lstStyle/>
-          <a:p>
-            <a:fld id="{767573A8-D025-446C-8C67-05AAB470FAB2}" type="slidenum">
-              <a:rPr lang="ko-KR" altLang="en-US" smtClean="0"/>
-              <a:t>85</a:t>
-            </a:fld>
-            <a:endParaRPr lang="ko-KR" altLang="en-US"/>
-          </a:p>
-        </p:txBody>
-      </p:sp>
-    </p:spTree>
-    <p:extLst>
-      <p:ext uri="{BB962C8B-B14F-4D97-AF65-F5344CB8AC3E}">
-        <p14:creationId xmlns:p14="http://schemas.microsoft.com/office/powerpoint/2010/main" val="2943872755"/>
       </p:ext>
     </p:extLst>
   </p:cSld>
@@ -5359,6 +5359,114 @@
         <p:cNvPr id="1" name="">
           <a:extLst>
             <a:ext uri="{FF2B5EF4-FFF2-40B4-BE49-F238E27FC236}">
+              <a16:creationId xmlns:a16="http://schemas.microsoft.com/office/drawing/2014/main" id="{3B84B3D9-AA22-AE4B-C059-21CC014BEEFA}"/>
+            </a:ext>
+          </a:extLst>
+        </p:cNvPr>
+        <p:cNvGrpSpPr/>
+        <p:nvPr/>
+      </p:nvGrpSpPr>
+      <p:grpSpPr>
+        <a:xfrm>
+          <a:off x="0" y="0"/>
+          <a:ext cx="0" cy="0"/>
+          <a:chOff x="0" y="0"/>
+          <a:chExt cx="0" cy="0"/>
+        </a:xfrm>
+      </p:grpSpPr>
+      <p:sp>
+        <p:nvSpPr>
+          <p:cNvPr id="2" name="슬라이드 이미지 개체 틀 1">
+            <a:extLst>
+              <a:ext uri="{FF2B5EF4-FFF2-40B4-BE49-F238E27FC236}">
+                <a16:creationId xmlns:a16="http://schemas.microsoft.com/office/drawing/2014/main" id="{F37DCD70-6E85-1E67-282C-A781F95F43B3}"/>
+              </a:ext>
+            </a:extLst>
+          </p:cNvPr>
+          <p:cNvSpPr>
+            <a:spLocks noGrp="1" noRot="1" noChangeAspect="1"/>
+          </p:cNvSpPr>
+          <p:nvPr>
+            <p:ph type="sldImg"/>
+          </p:nvPr>
+        </p:nvSpPr>
+        <p:spPr/>
+      </p:sp>
+      <p:sp>
+        <p:nvSpPr>
+          <p:cNvPr id="3" name="슬라이드 노트 개체 틀 2">
+            <a:extLst>
+              <a:ext uri="{FF2B5EF4-FFF2-40B4-BE49-F238E27FC236}">
+                <a16:creationId xmlns:a16="http://schemas.microsoft.com/office/drawing/2014/main" id="{F9DE176B-83FA-A63B-CC5C-FEDF03E41C51}"/>
+              </a:ext>
+            </a:extLst>
+          </p:cNvPr>
+          <p:cNvSpPr>
+            <a:spLocks noGrp="1"/>
+          </p:cNvSpPr>
+          <p:nvPr>
+            <p:ph type="body" idx="1"/>
+          </p:nvPr>
+        </p:nvSpPr>
+        <p:spPr/>
+        <p:txBody>
+          <a:bodyPr/>
+          <a:lstStyle/>
+          <a:p>
+            <a:endParaRPr lang="ko-KR" altLang="en-US" dirty="0"/>
+          </a:p>
+        </p:txBody>
+      </p:sp>
+      <p:sp>
+        <p:nvSpPr>
+          <p:cNvPr id="4" name="슬라이드 번호 개체 틀 3">
+            <a:extLst>
+              <a:ext uri="{FF2B5EF4-FFF2-40B4-BE49-F238E27FC236}">
+                <a16:creationId xmlns:a16="http://schemas.microsoft.com/office/drawing/2014/main" id="{C18D40CD-6EE9-0486-CE76-4E500EAFD0EE}"/>
+              </a:ext>
+            </a:extLst>
+          </p:cNvPr>
+          <p:cNvSpPr>
+            <a:spLocks noGrp="1"/>
+          </p:cNvSpPr>
+          <p:nvPr>
+            <p:ph type="sldNum" sz="quarter" idx="5"/>
+          </p:nvPr>
+        </p:nvSpPr>
+        <p:spPr/>
+        <p:txBody>
+          <a:bodyPr/>
+          <a:lstStyle/>
+          <a:p>
+            <a:fld id="{767573A8-D025-446C-8C67-05AAB470FAB2}" type="slidenum">
+              <a:rPr lang="ko-KR" altLang="en-US" smtClean="0"/>
+              <a:t>86</a:t>
+            </a:fld>
+            <a:endParaRPr lang="ko-KR" altLang="en-US"/>
+          </a:p>
+        </p:txBody>
+      </p:sp>
+    </p:spTree>
+    <p:extLst>
+      <p:ext uri="{BB962C8B-B14F-4D97-AF65-F5344CB8AC3E}">
+        <p14:creationId xmlns:p14="http://schemas.microsoft.com/office/powerpoint/2010/main" val="2943872755"/>
+      </p:ext>
+    </p:extLst>
+  </p:cSld>
+  <p:clrMapOvr>
+    <a:masterClrMapping/>
+  </p:clrMapOvr>
+</p:notes>
+</file>
+
+<file path=ppt/notesSlides/notesSlide51.xml><?xml version="1.0" encoding="utf-8"?>
+<p:notes xmlns:a="http://schemas.openxmlformats.org/drawingml/2006/main" xmlns:r="http://schemas.openxmlformats.org/officeDocument/2006/relationships" xmlns:p="http://schemas.openxmlformats.org/presentationml/2006/main">
+  <p:cSld>
+    <p:spTree>
+      <p:nvGrpSpPr>
+        <p:cNvPr id="1" name="">
+          <a:extLst>
+            <a:ext uri="{FF2B5EF4-FFF2-40B4-BE49-F238E27FC236}">
               <a16:creationId xmlns:a16="http://schemas.microsoft.com/office/drawing/2014/main" id="{D7AC6BCB-519E-60AF-4303-E0049004C943}"/>
             </a:ext>
           </a:extLst>
@@ -5440,7 +5548,7 @@
           <a:p>
             <a:fld id="{767573A8-D025-446C-8C67-05AAB470FAB2}" type="slidenum">
               <a:rPr lang="ko-KR" altLang="en-US" smtClean="0"/>
-              <a:t>86</a:t>
+              <a:t>87</a:t>
             </a:fld>
             <a:endParaRPr lang="ko-KR" altLang="en-US"/>
           </a:p>
@@ -5459,7 +5567,7 @@
 </p:notes>
 </file>
 
-<file path=ppt/notesSlides/notesSlide51.xml><?xml version="1.0" encoding="utf-8"?>
+<file path=ppt/notesSlides/notesSlide52.xml><?xml version="1.0" encoding="utf-8"?>
 <p:notes xmlns:a="http://schemas.openxmlformats.org/drawingml/2006/main" xmlns:r="http://schemas.openxmlformats.org/officeDocument/2006/relationships" xmlns:p="http://schemas.openxmlformats.org/presentationml/2006/main">
   <p:cSld>
     <p:spTree>
@@ -5548,7 +5656,7 @@
           <a:p>
             <a:fld id="{767573A8-D025-446C-8C67-05AAB470FAB2}" type="slidenum">
               <a:rPr lang="ko-KR" altLang="en-US" smtClean="0"/>
-              <a:t>87</a:t>
+              <a:t>88</a:t>
             </a:fld>
             <a:endParaRPr lang="ko-KR" altLang="en-US"/>
           </a:p>
@@ -13801,7 +13909,19 @@
                   <a:srgbClr val="FF0000"/>
                 </a:solidFill>
               </a:rPr>
-              <a:t> A B C </a:t>
+              <a:t> A B </a:t>
+            </a:r>
+            <a:r>
+              <a:rPr lang="en-US" altLang="ko-KR" dirty="0"/>
+              <a:t>C</a:t>
+            </a:r>
+            <a:r>
+              <a:rPr lang="en-US" altLang="ko-KR" dirty="0">
+                <a:solidFill>
+                  <a:srgbClr val="FF0000"/>
+                </a:solidFill>
+              </a:rPr>
+              <a:t> </a:t>
             </a:r>
             <a:r>
               <a:rPr lang="en-US" altLang="ko-KR" dirty="0"/>
@@ -14548,7 +14668,7 @@
           <a:p>
             <a:r>
               <a:rPr lang="en-US" altLang="ko-KR" dirty="0"/>
-              <a:t>F(5) != 4</a:t>
+              <a:t>F(5) != 3</a:t>
             </a:r>
             <a:endParaRPr lang="ko-KR" altLang="en-US" dirty="0"/>
           </a:p>
@@ -16697,7 +16817,19 @@
             </a:r>
             <a:r>
               <a:rPr lang="en-US" altLang="ko-KR" dirty="0"/>
-              <a:t>= S[0:x]</a:t>
+              <a:t>= S[</a:t>
+            </a:r>
+            <a:r>
+              <a:rPr lang="en-US" altLang="ko-KR" dirty="0">
+                <a:highlight>
+                  <a:srgbClr val="FFFF00"/>
+                </a:highlight>
+              </a:rPr>
+              <a:t>0</a:t>
+            </a:r>
+            <a:r>
+              <a:rPr lang="en-US" altLang="ko-KR" dirty="0"/>
+              <a:t>:x]</a:t>
             </a:r>
           </a:p>
           <a:p>
@@ -16708,7 +16840,19 @@
             </a:r>
             <a:r>
               <a:rPr lang="en-US" altLang="ko-KR" dirty="0"/>
-              <a:t>= S[x:|S|]</a:t>
+              <a:t>= S[x:</a:t>
+            </a:r>
+            <a:r>
+              <a:rPr lang="en-US" altLang="ko-KR" dirty="0">
+                <a:highlight>
+                  <a:srgbClr val="FFFF00"/>
+                </a:highlight>
+              </a:rPr>
+              <a:t>|S</a:t>
+            </a:r>
+            <a:r>
+              <a:rPr lang="en-US" altLang="ko-KR" dirty="0"/>
+              <a:t>|]</a:t>
             </a:r>
             <a:endParaRPr lang="ko-KR" altLang="en-US" dirty="0"/>
           </a:p>
@@ -18043,19 +18187,11 @@
             </a:r>
             <a:r>
               <a:rPr lang="en-US" altLang="ko-KR" dirty="0"/>
-              <a:t>1 </a:t>
-            </a:r>
-            <a:r>
-              <a:rPr lang="ko-KR" altLang="en-US" dirty="0"/>
-              <a:t>또는 </a:t>
-            </a:r>
-            <a:r>
-              <a:rPr lang="en-US" altLang="ko-KR" dirty="0"/>
               <a:t>2</a:t>
             </a:r>
             <a:r>
               <a:rPr lang="ko-KR" altLang="en-US" dirty="0"/>
-              <a:t>이다</a:t>
+              <a:t>보다 클 수 없다</a:t>
             </a:r>
             <a:r>
               <a:rPr lang="en-US" altLang="ko-KR" dirty="0"/>
@@ -18073,7 +18209,7 @@
           <a:p>
             <a:r>
               <a:rPr lang="ko-KR" altLang="en-US" dirty="0"/>
-              <a:t>가정 </a:t>
+              <a:t>결론 부정 </a:t>
             </a:r>
             <a:r>
               <a:rPr lang="en-US" altLang="ko-KR" dirty="0"/>
@@ -18339,19 +18475,11 @@
             </a:r>
             <a:r>
               <a:rPr lang="en-US" altLang="ko-KR" dirty="0"/>
-              <a:t>1 </a:t>
-            </a:r>
-            <a:r>
-              <a:rPr lang="ko-KR" altLang="en-US" dirty="0"/>
-              <a:t>또는 </a:t>
-            </a:r>
-            <a:r>
-              <a:rPr lang="en-US" altLang="ko-KR" dirty="0"/>
               <a:t>2</a:t>
             </a:r>
             <a:r>
               <a:rPr lang="ko-KR" altLang="en-US" dirty="0"/>
-              <a:t>이다</a:t>
+              <a:t>보다 클 수 없다</a:t>
             </a:r>
             <a:r>
               <a:rPr lang="en-US" altLang="ko-KR" dirty="0"/>
@@ -18367,10 +18495,6 @@
             <a:endParaRPr lang="en-US" altLang="ko-KR" dirty="0"/>
           </a:p>
           <a:p>
-            <a:r>
-              <a:rPr lang="ko-KR" altLang="en-US" dirty="0"/>
-              <a:t>가정 </a:t>
-            </a:r>
             <a:r>
               <a:rPr lang="en-US" altLang="ko-KR" dirty="0"/>
               <a:t>F(6) &gt; 2 (3</a:t>
@@ -19142,7 +19266,7 @@
             </a:r>
             <a:r>
               <a:rPr lang="en-US" altLang="ko-KR" dirty="0"/>
-              <a:t>k</a:t>
+              <a:t>k-1</a:t>
             </a:r>
             <a:r>
               <a:rPr lang="ko-KR" altLang="en-US" dirty="0"/>
@@ -19150,7 +19274,19 @@
             </a:r>
             <a:r>
               <a:rPr lang="en-US" altLang="ko-KR" dirty="0"/>
-              <a:t>k(=k-1+1)</a:t>
+              <a:t>k(=k-1</a:t>
+            </a:r>
+            <a:r>
+              <a:rPr lang="en-US" altLang="ko-KR" b="1" dirty="0">
+                <a:solidFill>
+                  <a:srgbClr val="0070C0"/>
+                </a:solidFill>
+              </a:rPr>
+              <a:t>+1</a:t>
+            </a:r>
+            <a:r>
+              <a:rPr lang="en-US" altLang="ko-KR" dirty="0"/>
+              <a:t>)</a:t>
             </a:r>
             <a:r>
               <a:rPr lang="ko-KR" altLang="en-US" dirty="0"/>
@@ -19418,7 +19554,7 @@
             </a:r>
             <a:r>
               <a:rPr lang="en-US" altLang="ko-KR" dirty="0"/>
-              <a:t>k</a:t>
+              <a:t>k-1</a:t>
             </a:r>
             <a:r>
               <a:rPr lang="ko-KR" altLang="en-US" dirty="0"/>
@@ -19530,7 +19666,7 @@
         <p:spPr>
           <a:xfrm>
             <a:off x="3439479" y="4834273"/>
-            <a:ext cx="4771563" cy="369332"/>
+            <a:ext cx="4779578" cy="369332"/>
           </a:xfrm>
           <a:prstGeom prst="rect">
             <a:avLst/>
@@ -19549,12 +19685,12 @@
           <a:lstStyle/>
           <a:p>
             <a:r>
-              <a:rPr lang="en-US" altLang="ko-KR" dirty="0">
+              <a:rPr lang="en-US" altLang="ko-KR" b="1" dirty="0">
                 <a:solidFill>
                   <a:srgbClr val="00B050"/>
                 </a:solidFill>
               </a:rPr>
-              <a:t>0 1 2 3 …………….L-1</a:t>
+              <a:t>0 1 2 3 ………….L-1</a:t>
             </a:r>
             <a:r>
               <a:rPr lang="en-US" altLang="ko-KR" dirty="0"/>
@@ -19714,7 +19850,7 @@
             </a:r>
             <a:r>
               <a:rPr lang="en-US" altLang="ko-KR" dirty="0"/>
-              <a:t>k</a:t>
+              <a:t>k-1</a:t>
             </a:r>
             <a:r>
               <a:rPr lang="ko-KR" altLang="en-US" dirty="0"/>
@@ -19826,7 +19962,7 @@
         <p:spPr>
           <a:xfrm>
             <a:off x="3439479" y="4834273"/>
-            <a:ext cx="4771563" cy="369332"/>
+            <a:ext cx="4779578" cy="369332"/>
           </a:xfrm>
           <a:prstGeom prst="rect">
             <a:avLst/>
@@ -19845,12 +19981,12 @@
           <a:lstStyle/>
           <a:p>
             <a:r>
-              <a:rPr lang="en-US" altLang="ko-KR" dirty="0">
+              <a:rPr lang="en-US" altLang="ko-KR" b="1" dirty="0">
                 <a:solidFill>
                   <a:srgbClr val="00B050"/>
                 </a:solidFill>
               </a:rPr>
-              <a:t>0 1 2 3 …………….L-1</a:t>
+              <a:t>0 1 2 3 ………….L-1</a:t>
             </a:r>
             <a:r>
               <a:rPr lang="en-US" altLang="ko-KR" dirty="0"/>
@@ -20084,19 +20220,7 @@
           <a:p>
             <a:r>
               <a:rPr lang="en-US" altLang="ko-KR" dirty="0"/>
-              <a:t>O R O N D O </a:t>
-            </a:r>
-            <a:r>
-              <a:rPr lang="en-US" altLang="ko-KR" b="1" dirty="0">
-                <a:solidFill>
-                  <a:srgbClr val="FF0000"/>
-                </a:solidFill>
-              </a:rPr>
-              <a:t>N T I </a:t>
-            </a:r>
-            <a:r>
-              <a:rPr lang="en-US" altLang="ko-KR" dirty="0"/>
-              <a:t>S </a:t>
+              <a:t>O R O N D O N T I S </a:t>
             </a:r>
             <a:r>
               <a:rPr lang="en-US" altLang="ko-KR" dirty="0" err="1"/>
@@ -20297,7 +20421,7 @@
             </a:r>
             <a:r>
               <a:rPr lang="en-US" altLang="ko-KR" dirty="0"/>
-              <a:t>k</a:t>
+              <a:t>k-1</a:t>
             </a:r>
             <a:r>
               <a:rPr lang="ko-KR" altLang="en-US" dirty="0"/>
@@ -21426,7 +21550,7 @@
           <a:p>
             <a:r>
               <a:rPr lang="en-US" altLang="ko-KR" dirty="0"/>
-              <a:t>S[F(9)] == S[F(8)-1(=3)] </a:t>
+              <a:t>S[9] VS S[F(9-1)] (=S[4]) </a:t>
             </a:r>
             <a:r>
               <a:rPr lang="ko-KR" altLang="en-US" dirty="0"/>
@@ -21442,7 +21566,7 @@
             </a:r>
             <a:r>
               <a:rPr lang="en-US" altLang="ko-KR" dirty="0"/>
-              <a:t>B</a:t>
+              <a:t>C</a:t>
             </a:r>
             <a:r>
               <a:rPr lang="ko-KR" altLang="en-US" dirty="0"/>
@@ -21460,9 +21584,6 @@
               <a:rPr lang="en-US" altLang="ko-KR" dirty="0"/>
               <a:t>.</a:t>
             </a:r>
-          </a:p>
-          <a:p>
-            <a:endParaRPr lang="en-US" altLang="ko-KR" dirty="0"/>
           </a:p>
         </p:txBody>
       </p:sp>
@@ -27721,7 +27842,130 @@
         <p:spPr>
           <a:xfrm>
             <a:off x="4565717" y="4115591"/>
-            <a:ext cx="346570" cy="369332"/>
+            <a:ext cx="336952" cy="369332"/>
+          </a:xfrm>
+          <a:prstGeom prst="rect">
+            <a:avLst/>
+          </a:prstGeom>
+          <a:noFill/>
+          <a:ln>
+            <a:solidFill>
+              <a:schemeClr val="tx1"/>
+            </a:solidFill>
+          </a:ln>
+        </p:spPr>
+        <p:txBody>
+          <a:bodyPr wrap="none" rtlCol="0">
+            <a:spAutoFit/>
+          </a:bodyPr>
+          <a:lstStyle/>
+          <a:p>
+            <a:r>
+              <a:rPr lang="en-US" altLang="ko-KR" dirty="0"/>
+              <a:t>A</a:t>
+            </a:r>
+            <a:endParaRPr lang="ko-KR" altLang="en-US" dirty="0"/>
+          </a:p>
+        </p:txBody>
+      </p:sp>
+      <p:cxnSp>
+        <p:nvCxnSpPr>
+          <p:cNvPr id="11" name="직선 화살표 연결선 10">
+            <a:extLst>
+              <a:ext uri="{FF2B5EF4-FFF2-40B4-BE49-F238E27FC236}">
+                <a16:creationId xmlns:a16="http://schemas.microsoft.com/office/drawing/2014/main" id="{15B2C71E-A3B3-F0AD-A83A-14132C369862}"/>
+              </a:ext>
+            </a:extLst>
+          </p:cNvPr>
+          <p:cNvCxnSpPr>
+            <a:endCxn id="4" idx="1"/>
+          </p:cNvCxnSpPr>
+          <p:nvPr/>
+        </p:nvCxnSpPr>
+        <p:spPr>
+          <a:xfrm>
+            <a:off x="3763478" y="2255847"/>
+            <a:ext cx="856648" cy="1931142"/>
+          </a:xfrm>
+          <a:prstGeom prst="straightConnector1">
+            <a:avLst/>
+          </a:prstGeom>
+          <a:ln>
+            <a:tailEnd type="triangle"/>
+          </a:ln>
+        </p:spPr>
+        <p:style>
+          <a:lnRef idx="2">
+            <a:schemeClr val="accent1"/>
+          </a:lnRef>
+          <a:fillRef idx="0">
+            <a:schemeClr val="accent1"/>
+          </a:fillRef>
+          <a:effectRef idx="1">
+            <a:schemeClr val="accent1"/>
+          </a:effectRef>
+          <a:fontRef idx="minor">
+            <a:schemeClr val="tx1"/>
+          </a:fontRef>
+        </p:style>
+      </p:cxnSp>
+      <p:cxnSp>
+        <p:nvCxnSpPr>
+          <p:cNvPr id="13" name="연결선: 구부러짐 12">
+            <a:extLst>
+              <a:ext uri="{FF2B5EF4-FFF2-40B4-BE49-F238E27FC236}">
+                <a16:creationId xmlns:a16="http://schemas.microsoft.com/office/drawing/2014/main" id="{FB0158BF-AD6C-94DF-ABD1-E34970EF25B1}"/>
+              </a:ext>
+            </a:extLst>
+          </p:cNvPr>
+          <p:cNvCxnSpPr/>
+          <p:nvPr/>
+        </p:nvCxnSpPr>
+        <p:spPr>
+          <a:xfrm rot="16200000" flipH="1">
+            <a:off x="2047926" y="2254566"/>
+            <a:ext cx="2770612" cy="2573597"/>
+          </a:xfrm>
+          <a:prstGeom prst="curvedConnector3">
+            <a:avLst>
+              <a:gd name="adj1" fmla="val 152832"/>
+            </a:avLst>
+          </a:prstGeom>
+          <a:ln>
+            <a:tailEnd type="triangle"/>
+          </a:ln>
+        </p:spPr>
+        <p:style>
+          <a:lnRef idx="2">
+            <a:schemeClr val="accent1"/>
+          </a:lnRef>
+          <a:fillRef idx="0">
+            <a:schemeClr val="accent1"/>
+          </a:fillRef>
+          <a:effectRef idx="1">
+            <a:schemeClr val="accent1"/>
+          </a:effectRef>
+          <a:fontRef idx="minor">
+            <a:schemeClr val="tx1"/>
+          </a:fontRef>
+        </p:style>
+      </p:cxnSp>
+      <p:sp>
+        <p:nvSpPr>
+          <p:cNvPr id="16" name="TextBox 15">
+            <a:extLst>
+              <a:ext uri="{FF2B5EF4-FFF2-40B4-BE49-F238E27FC236}">
+                <a16:creationId xmlns:a16="http://schemas.microsoft.com/office/drawing/2014/main" id="{1E8E19DE-0B41-6F96-9FB1-10A96D7AAEA7}"/>
+              </a:ext>
+            </a:extLst>
+          </p:cNvPr>
+          <p:cNvSpPr txBox="1"/>
+          <p:nvPr/>
+        </p:nvSpPr>
+        <p:spPr>
+          <a:xfrm>
+            <a:off x="5011798" y="4557339"/>
+            <a:ext cx="336952" cy="369332"/>
           </a:xfrm>
           <a:prstGeom prst="rect">
             <a:avLst/>
@@ -27768,7 +28012,7 @@
         <p:cNvPr id="1" name="">
           <a:extLst>
             <a:ext uri="{FF2B5EF4-FFF2-40B4-BE49-F238E27FC236}">
-              <a16:creationId xmlns:a16="http://schemas.microsoft.com/office/drawing/2014/main" id="{3249C442-4070-94DC-AC6B-1E9147F9881E}"/>
+              <a16:creationId xmlns:a16="http://schemas.microsoft.com/office/drawing/2014/main" id="{88CC63BA-49A1-685A-EB40-26C8284F771D}"/>
             </a:ext>
           </a:extLst>
         </p:cNvPr>
@@ -27788,7 +28032,7 @@
           <p:cNvPr id="2" name="제목 1">
             <a:extLst>
               <a:ext uri="{FF2B5EF4-FFF2-40B4-BE49-F238E27FC236}">
-                <a16:creationId xmlns:a16="http://schemas.microsoft.com/office/drawing/2014/main" id="{1F7DB86D-7CA8-AA46-9816-49F9CBCDD2DF}"/>
+                <a16:creationId xmlns:a16="http://schemas.microsoft.com/office/drawing/2014/main" id="{074A4C81-767B-7372-603E-BB0FDD40B5DB}"/>
               </a:ext>
             </a:extLst>
           </p:cNvPr>
@@ -27820,7 +28064,7 @@
           <p:cNvPr id="3" name="내용 개체 틀 2">
             <a:extLst>
               <a:ext uri="{FF2B5EF4-FFF2-40B4-BE49-F238E27FC236}">
-                <a16:creationId xmlns:a16="http://schemas.microsoft.com/office/drawing/2014/main" id="{5B41A08D-2305-AA38-C593-5AEFB4983F92}"/>
+                <a16:creationId xmlns:a16="http://schemas.microsoft.com/office/drawing/2014/main" id="{E1968B8D-BF11-7E1D-5896-DBB0A9652AD3}"/>
               </a:ext>
             </a:extLst>
           </p:cNvPr>
@@ -27874,7 +28118,7 @@
           <p:cNvPr id="7" name="TextBox 6">
             <a:extLst>
               <a:ext uri="{FF2B5EF4-FFF2-40B4-BE49-F238E27FC236}">
-                <a16:creationId xmlns:a16="http://schemas.microsoft.com/office/drawing/2014/main" id="{2BD56EF5-C9A7-E6CD-086E-31C5EF0BBAC1}"/>
+                <a16:creationId xmlns:a16="http://schemas.microsoft.com/office/drawing/2014/main" id="{6C560CA3-6DC0-7D36-C896-9D0EE0C6BA0E}"/>
               </a:ext>
             </a:extLst>
           </p:cNvPr>
@@ -27923,7 +28167,7 @@
           <p:cNvPr id="5" name="TextBox 4">
             <a:extLst>
               <a:ext uri="{FF2B5EF4-FFF2-40B4-BE49-F238E27FC236}">
-                <a16:creationId xmlns:a16="http://schemas.microsoft.com/office/drawing/2014/main" id="{1649C894-0788-CF97-3D7D-C7CFF971A5C5}"/>
+                <a16:creationId xmlns:a16="http://schemas.microsoft.com/office/drawing/2014/main" id="{5A3FDD7A-E535-9A77-7681-8269852FDD70}"/>
               </a:ext>
             </a:extLst>
           </p:cNvPr>
@@ -27964,7 +28208,7 @@
           <p:cNvPr id="8" name="TextBox 7">
             <a:extLst>
               <a:ext uri="{FF2B5EF4-FFF2-40B4-BE49-F238E27FC236}">
-                <a16:creationId xmlns:a16="http://schemas.microsoft.com/office/drawing/2014/main" id="{418FADB3-087A-5199-7B3C-EFE5C22F6C3D}"/>
+                <a16:creationId xmlns:a16="http://schemas.microsoft.com/office/drawing/2014/main" id="{3289BFCB-41A4-B386-84CA-3140B7BFE4E0}"/>
               </a:ext>
             </a:extLst>
           </p:cNvPr>
@@ -28017,7 +28261,7 @@
           <p:cNvPr id="9" name="TextBox 8">
             <a:extLst>
               <a:ext uri="{FF2B5EF4-FFF2-40B4-BE49-F238E27FC236}">
-                <a16:creationId xmlns:a16="http://schemas.microsoft.com/office/drawing/2014/main" id="{EB4AB3EF-497D-7087-0B3E-AEE9998D3D27}"/>
+                <a16:creationId xmlns:a16="http://schemas.microsoft.com/office/drawing/2014/main" id="{39DBA543-A25F-FBFE-CDDA-4921769A09C4}"/>
               </a:ext>
             </a:extLst>
           </p:cNvPr>
@@ -28051,23 +28295,30 @@
                   <a:srgbClr val="00B050"/>
                 </a:solidFill>
               </a:rPr>
-              <a:t>A B</a:t>
-            </a:r>
-            <a:r>
-              <a:rPr lang="en-US" altLang="ko-KR" dirty="0"/>
-              <a:t> </a:t>
+              <a:t>A B </a:t>
             </a:r>
             <a:r>
               <a:rPr lang="en-US" altLang="ko-KR" b="1" dirty="0">
                 <a:solidFill>
-                  <a:srgbClr val="7030A0"/>
-                </a:solidFill>
+                  <a:srgbClr val="00B050"/>
+                </a:solidFill>
+                <a:highlight>
+                  <a:srgbClr val="FFFF00"/>
+                </a:highlight>
               </a:rPr>
               <a:t>A</a:t>
             </a:r>
             <a:r>
-              <a:rPr lang="en-US" altLang="ko-KR" dirty="0"/>
-              <a:t> B </a:t>
+              <a:rPr lang="en-US" altLang="ko-KR" b="1" dirty="0">
+                <a:solidFill>
+                  <a:srgbClr val="00B050"/>
+                </a:solidFill>
+              </a:rPr>
+              <a:t> </a:t>
+            </a:r>
+            <a:r>
+              <a:rPr lang="en-US" altLang="ko-KR" dirty="0"/>
+              <a:t>B </a:t>
             </a:r>
             <a:endParaRPr lang="ko-KR" altLang="en-US" dirty="0"/>
           </a:p>
@@ -28078,7 +28329,7 @@
           <p:cNvPr id="6" name="내용 개체 틀 2">
             <a:extLst>
               <a:ext uri="{FF2B5EF4-FFF2-40B4-BE49-F238E27FC236}">
-                <a16:creationId xmlns:a16="http://schemas.microsoft.com/office/drawing/2014/main" id="{57F67518-B5F0-A584-39CF-990DE273786E}"/>
+                <a16:creationId xmlns:a16="http://schemas.microsoft.com/office/drawing/2014/main" id="{80EE1097-3CB5-71A7-1E2E-D8142F9D46D2}"/>
               </a:ext>
             </a:extLst>
           </p:cNvPr>
@@ -28090,7 +28341,7 @@
         <p:spPr>
           <a:xfrm>
             <a:off x="5297865" y="4079223"/>
-            <a:ext cx="6443762" cy="1953932"/>
+            <a:ext cx="6443762" cy="1801813"/>
           </a:xfrm>
           <a:prstGeom prst="rect">
             <a:avLst/>
@@ -28269,16 +28520,20 @@
               <a:buNone/>
             </a:pPr>
             <a:r>
-              <a:rPr lang="ko-KR" altLang="en-US" dirty="0"/>
-              <a:t>그 다음 인덱스의</a:t>
-            </a:r>
-            <a:r>
-              <a:rPr lang="en-US" altLang="ko-KR" dirty="0"/>
-              <a:t> </a:t>
-            </a:r>
-            <a:r>
-              <a:rPr lang="ko-KR" altLang="en-US" dirty="0"/>
-              <a:t>값이</a:t>
+              <a:rPr lang="en-US" altLang="ko-KR" dirty="0"/>
+              <a:t>4</a:t>
+            </a:r>
+            <a:r>
+              <a:rPr lang="ko-KR" altLang="en-US" dirty="0"/>
+              <a:t>글자라는 것은 </a:t>
+            </a:r>
+            <a:r>
+              <a:rPr lang="en-US" altLang="ko-KR" dirty="0"/>
+              <a:t>3+1</a:t>
+            </a:r>
+            <a:r>
+              <a:rPr lang="ko-KR" altLang="en-US" dirty="0" err="1"/>
+              <a:t>글자니까</a:t>
             </a:r>
             <a:endParaRPr lang="en-US" altLang="ko-KR" dirty="0"/>
           </a:p>
@@ -28287,24 +28542,12 @@
               <a:buNone/>
             </a:pPr>
             <a:r>
-              <a:rPr lang="en-US" altLang="ko-KR" b="1" dirty="0">
-                <a:solidFill>
-                  <a:srgbClr val="7030A0"/>
-                </a:solidFill>
-              </a:rPr>
-              <a:t>A</a:t>
-            </a:r>
-            <a:r>
-              <a:rPr lang="ko-KR" altLang="en-US" dirty="0"/>
-              <a:t>로 일치 </a:t>
-            </a:r>
-            <a:r>
-              <a:rPr lang="en-US" altLang="ko-KR" dirty="0"/>
-              <a:t>-&gt; +1 </a:t>
-            </a:r>
-            <a:r>
-              <a:rPr lang="ko-KR" altLang="en-US" dirty="0"/>
-              <a:t>처리</a:t>
+              <a:rPr lang="en-US" altLang="ko-KR" dirty="0"/>
+              <a:t>F(3) = 2 </a:t>
+            </a:r>
+            <a:r>
+              <a:rPr lang="ko-KR" altLang="en-US" dirty="0"/>
+              <a:t>인 것을 활용</a:t>
             </a:r>
             <a:endParaRPr lang="en-US" altLang="ko-KR" dirty="0"/>
           </a:p>
@@ -28314,19 +28557,11 @@
             </a:pPr>
             <a:r>
               <a:rPr lang="ko-KR" altLang="en-US" dirty="0"/>
-              <a:t>따라서</a:t>
-            </a:r>
-            <a:r>
-              <a:rPr lang="en-US" altLang="ko-KR" dirty="0"/>
-              <a:t>, F(9) = </a:t>
-            </a:r>
-            <a:r>
-              <a:rPr lang="en-US" altLang="ko-KR" b="1" dirty="0">
-                <a:solidFill>
-                  <a:srgbClr val="7030A0"/>
-                </a:solidFill>
-              </a:rPr>
-              <a:t>3</a:t>
+              <a:t>같으니까 </a:t>
+            </a:r>
+            <a:r>
+              <a:rPr lang="en-US" altLang="ko-KR" dirty="0"/>
+              <a:t>+1</a:t>
             </a:r>
           </a:p>
         </p:txBody>
@@ -28336,7 +28571,7 @@
           <p:cNvPr id="4" name="TextBox 3">
             <a:extLst>
               <a:ext uri="{FF2B5EF4-FFF2-40B4-BE49-F238E27FC236}">
-                <a16:creationId xmlns:a16="http://schemas.microsoft.com/office/drawing/2014/main" id="{79BB2978-053A-D1DE-771A-37D2EAA6F4EE}"/>
+                <a16:creationId xmlns:a16="http://schemas.microsoft.com/office/drawing/2014/main" id="{FDB65C58-E4B2-D2C4-6FB4-F6A16B75448D}"/>
               </a:ext>
             </a:extLst>
           </p:cNvPr>
@@ -28345,7 +28580,7 @@
         </p:nvSpPr>
         <p:spPr>
           <a:xfrm>
-            <a:off x="4546863" y="4106164"/>
+            <a:off x="4565717" y="4115591"/>
             <a:ext cx="346570" cy="369332"/>
           </a:xfrm>
           <a:prstGeom prst="rect">
@@ -28367,23 +28602,152 @@
             <a:r>
               <a:rPr lang="en-US" altLang="ko-KR" b="1" dirty="0">
                 <a:solidFill>
-                  <a:srgbClr val="7030A0"/>
-                </a:solidFill>
+                  <a:srgbClr val="00B050"/>
+                </a:solidFill>
+                <a:highlight>
+                  <a:srgbClr val="FFFF00"/>
+                </a:highlight>
               </a:rPr>
               <a:t>A</a:t>
             </a:r>
             <a:endParaRPr lang="ko-KR" altLang="en-US" b="1" dirty="0">
               <a:solidFill>
-                <a:srgbClr val="7030A0"/>
+                <a:srgbClr val="00B050"/>
               </a:solidFill>
+              <a:highlight>
+                <a:srgbClr val="FFFF00"/>
+              </a:highlight>
             </a:endParaRPr>
+          </a:p>
+        </p:txBody>
+      </p:sp>
+      <p:cxnSp>
+        <p:nvCxnSpPr>
+          <p:cNvPr id="11" name="직선 화살표 연결선 10">
+            <a:extLst>
+              <a:ext uri="{FF2B5EF4-FFF2-40B4-BE49-F238E27FC236}">
+                <a16:creationId xmlns:a16="http://schemas.microsoft.com/office/drawing/2014/main" id="{9C7EFA86-A908-53CF-231D-87C70A6516ED}"/>
+              </a:ext>
+            </a:extLst>
+          </p:cNvPr>
+          <p:cNvCxnSpPr>
+            <a:endCxn id="4" idx="1"/>
+          </p:cNvCxnSpPr>
+          <p:nvPr/>
+        </p:nvCxnSpPr>
+        <p:spPr>
+          <a:xfrm>
+            <a:off x="3763478" y="2255847"/>
+            <a:ext cx="802239" cy="2044410"/>
+          </a:xfrm>
+          <a:prstGeom prst="straightConnector1">
+            <a:avLst/>
+          </a:prstGeom>
+          <a:ln>
+            <a:tailEnd type="triangle"/>
+          </a:ln>
+        </p:spPr>
+        <p:style>
+          <a:lnRef idx="2">
+            <a:schemeClr val="accent1"/>
+          </a:lnRef>
+          <a:fillRef idx="0">
+            <a:schemeClr val="accent1"/>
+          </a:fillRef>
+          <a:effectRef idx="1">
+            <a:schemeClr val="accent1"/>
+          </a:effectRef>
+          <a:fontRef idx="minor">
+            <a:schemeClr val="tx1"/>
+          </a:fontRef>
+        </p:style>
+      </p:cxnSp>
+      <p:cxnSp>
+        <p:nvCxnSpPr>
+          <p:cNvPr id="13" name="연결선: 구부러짐 12">
+            <a:extLst>
+              <a:ext uri="{FF2B5EF4-FFF2-40B4-BE49-F238E27FC236}">
+                <a16:creationId xmlns:a16="http://schemas.microsoft.com/office/drawing/2014/main" id="{7F8C6C24-B9EE-EFEC-122A-0A03090A238F}"/>
+              </a:ext>
+            </a:extLst>
+          </p:cNvPr>
+          <p:cNvCxnSpPr/>
+          <p:nvPr/>
+        </p:nvCxnSpPr>
+        <p:spPr>
+          <a:xfrm rot="16200000" flipH="1">
+            <a:off x="2047926" y="2254566"/>
+            <a:ext cx="2770612" cy="2573597"/>
+          </a:xfrm>
+          <a:prstGeom prst="curvedConnector3">
+            <a:avLst>
+              <a:gd name="adj1" fmla="val 152832"/>
+            </a:avLst>
+          </a:prstGeom>
+          <a:ln>
+            <a:tailEnd type="triangle"/>
+          </a:ln>
+        </p:spPr>
+        <p:style>
+          <a:lnRef idx="2">
+            <a:schemeClr val="accent1"/>
+          </a:lnRef>
+          <a:fillRef idx="0">
+            <a:schemeClr val="accent1"/>
+          </a:fillRef>
+          <a:effectRef idx="1">
+            <a:schemeClr val="accent1"/>
+          </a:effectRef>
+          <a:fontRef idx="minor">
+            <a:schemeClr val="tx1"/>
+          </a:fontRef>
+        </p:style>
+      </p:cxnSp>
+      <p:sp>
+        <p:nvSpPr>
+          <p:cNvPr id="16" name="TextBox 15">
+            <a:extLst>
+              <a:ext uri="{FF2B5EF4-FFF2-40B4-BE49-F238E27FC236}">
+                <a16:creationId xmlns:a16="http://schemas.microsoft.com/office/drawing/2014/main" id="{62770629-3F87-363F-D1C7-C9432A6E3A37}"/>
+              </a:ext>
+            </a:extLst>
+          </p:cNvPr>
+          <p:cNvSpPr txBox="1"/>
+          <p:nvPr/>
+        </p:nvSpPr>
+        <p:spPr>
+          <a:xfrm>
+            <a:off x="5011798" y="4557339"/>
+            <a:ext cx="336952" cy="369332"/>
+          </a:xfrm>
+          <a:prstGeom prst="rect">
+            <a:avLst/>
+          </a:prstGeom>
+          <a:noFill/>
+          <a:ln>
+            <a:solidFill>
+              <a:schemeClr val="tx1"/>
+            </a:solidFill>
+          </a:ln>
+        </p:spPr>
+        <p:txBody>
+          <a:bodyPr wrap="none" rtlCol="0">
+            <a:spAutoFit/>
+          </a:bodyPr>
+          <a:lstStyle/>
+          <a:p>
+            <a:r>
+              <a:rPr lang="en-US" altLang="ko-KR" dirty="0"/>
+              <a:t>A</a:t>
+            </a:r>
+            <a:endParaRPr lang="ko-KR" altLang="en-US" dirty="0"/>
           </a:p>
         </p:txBody>
       </p:sp>
     </p:spTree>
     <p:extLst>
       <p:ext uri="{BB962C8B-B14F-4D97-AF65-F5344CB8AC3E}">
-        <p14:creationId xmlns:p14="http://schemas.microsoft.com/office/powerpoint/2010/main" val="3308191693"/>
+        <p14:creationId xmlns:p14="http://schemas.microsoft.com/office/powerpoint/2010/main" val="1027664713"/>
       </p:ext>
     </p:extLst>
   </p:cSld>
@@ -28527,9 +28891,13 @@
             </a:r>
             <a:r>
               <a:rPr lang="ko-KR" altLang="en-US" sz="2000" dirty="0"/>
-              <a:t> 현재 일치하는 접두사 끝</a:t>
-            </a:r>
-            <a:endParaRPr lang="en-US" altLang="ko-KR" sz="2000" dirty="0"/>
+              <a:t> </a:t>
+            </a:r>
+            <a:r>
+              <a:rPr lang="ko-KR" altLang="en-US" sz="1600" dirty="0"/>
+              <a:t>접두사에서 몇 번째 인덱스까지 일치했는지</a:t>
+            </a:r>
+            <a:endParaRPr lang="en-US" altLang="ko-KR" sz="1600" dirty="0"/>
           </a:p>
           <a:p>
             <a:pPr lvl="1"/>
@@ -28548,7 +28916,7 @@
           </a:p>
           <a:p>
             <a:r>
-              <a:rPr lang="en-US" altLang="ko-KR" sz="2000" dirty="0"/>
+              <a:rPr lang="en-US" altLang="ko-KR" sz="2000" dirty="0" err="1"/>
               <a:t>i</a:t>
             </a:r>
             <a:r>
@@ -28557,16 +28925,61 @@
             </a:r>
             <a:r>
               <a:rPr lang="en-US" altLang="ko-KR" sz="2000" dirty="0"/>
-              <a:t>-&gt; 1</a:t>
+              <a:t>-&gt; </a:t>
+            </a:r>
+            <a:r>
+              <a:rPr lang="en-US" altLang="ko-KR" sz="2000" b="1" u="sng" dirty="0"/>
+              <a:t>1</a:t>
             </a:r>
             <a:r>
               <a:rPr lang="ko-KR" altLang="en-US" sz="2000" dirty="0"/>
-              <a:t>번 인덱스부터 끝까지</a:t>
-            </a:r>
-            <a:endParaRPr lang="en-US" altLang="ko-KR" sz="2000" dirty="0"/>
-          </a:p>
-          <a:p>
-            <a:endParaRPr lang="en-US" altLang="ko-KR" sz="2000" dirty="0"/>
+              <a:t>번 인덱스부터 끝까지 </a:t>
+            </a:r>
+            <a:r>
+              <a:rPr lang="en-US" altLang="ko-KR" sz="2000" dirty="0"/>
+              <a:t>(</a:t>
+            </a:r>
+            <a:r>
+              <a:rPr lang="ko-KR" altLang="en-US" sz="2000" dirty="0"/>
+              <a:t>접미사</a:t>
+            </a:r>
+            <a:r>
+              <a:rPr lang="en-US" altLang="ko-KR" sz="2000" dirty="0"/>
+              <a:t>) </a:t>
+            </a:r>
+            <a:r>
+              <a:rPr lang="ko-KR" altLang="en-US" sz="1400" dirty="0"/>
+              <a:t>전진만</a:t>
+            </a:r>
+            <a:endParaRPr lang="en-US" altLang="ko-KR" sz="1400" dirty="0"/>
+          </a:p>
+          <a:p>
+            <a:pPr lvl="1"/>
+            <a:r>
+              <a:rPr lang="ko-KR" altLang="en-US" sz="1800" dirty="0"/>
+              <a:t>예시 기준</a:t>
+            </a:r>
+            <a:r>
+              <a:rPr lang="en-US" altLang="ko-KR" sz="1800" dirty="0"/>
+              <a:t>, </a:t>
+            </a:r>
+            <a:r>
+              <a:rPr lang="en-US" altLang="ko-KR" sz="1800" dirty="0" err="1"/>
+              <a:t>i</a:t>
+            </a:r>
+            <a:r>
+              <a:rPr lang="en-US" altLang="ko-KR" sz="1800" dirty="0"/>
+              <a:t> = 9 </a:t>
+            </a:r>
+            <a:r>
+              <a:rPr lang="ko-KR" altLang="en-US" sz="1800" dirty="0"/>
+              <a:t>까지 간 상황</a:t>
+            </a:r>
+            <a:endParaRPr lang="en-US" altLang="ko-KR" sz="1800" dirty="0"/>
+          </a:p>
+          <a:p>
+            <a:pPr lvl="1"/>
+            <a:endParaRPr lang="en-US" altLang="ko-KR" sz="1800" dirty="0"/>
           </a:p>
           <a:p>
             <a:r>
@@ -28575,61 +28988,46 @@
             </a:r>
             <a:r>
               <a:rPr lang="en-US" altLang="ko-KR" sz="2000" dirty="0"/>
-              <a:t>++j</a:t>
-            </a:r>
-          </a:p>
-          <a:p>
+              <a:t>++j </a:t>
+            </a:r>
             <a:r>
               <a:rPr lang="ko-KR" altLang="en-US" sz="2000" dirty="0"/>
-              <a:t>다르면 지금까지 길이 포기하고 앞으로 이동 </a:t>
+              <a:t>전진</a:t>
+            </a:r>
+            <a:endParaRPr lang="en-US" altLang="ko-KR" sz="2000" dirty="0"/>
+          </a:p>
+          <a:p>
+            <a:r>
+              <a:rPr lang="ko-KR" altLang="en-US" sz="2000" dirty="0"/>
+              <a:t>다르면 </a:t>
             </a:r>
             <a:r>
               <a:rPr lang="en-US" altLang="ko-KR" sz="2000" dirty="0"/>
-              <a:t>F(j-1) </a:t>
+              <a:t>j=4</a:t>
             </a:r>
             <a:r>
               <a:rPr lang="ko-KR" altLang="en-US" sz="2000" dirty="0"/>
-              <a:t>인덱스로</a:t>
-            </a:r>
-            <a:endParaRPr lang="en-US" altLang="ko-KR" sz="2000" dirty="0"/>
-          </a:p>
-          <a:p>
-            <a:pPr lvl="1"/>
-            <a:r>
-              <a:rPr lang="ko-KR" altLang="en-US" sz="1800" dirty="0"/>
-              <a:t>결국 </a:t>
-            </a:r>
-            <a:r>
-              <a:rPr lang="en-US" altLang="ko-KR" sz="1800" dirty="0"/>
-              <a:t>j</a:t>
-            </a:r>
-            <a:r>
-              <a:rPr lang="ko-KR" altLang="en-US" sz="1800" dirty="0"/>
-              <a:t>가 </a:t>
-            </a:r>
-            <a:r>
-              <a:rPr lang="en-US" altLang="ko-KR" sz="1800" dirty="0"/>
-              <a:t>4</a:t>
-            </a:r>
-            <a:r>
-              <a:rPr lang="ko-KR" altLang="en-US" sz="1800" dirty="0"/>
-              <a:t>였으니 </a:t>
-            </a:r>
-            <a:r>
-              <a:rPr lang="en-US" altLang="ko-KR" sz="1800" dirty="0"/>
-              <a:t>4-1</a:t>
-            </a:r>
-            <a:r>
-              <a:rPr lang="ko-KR" altLang="en-US" sz="1800" dirty="0"/>
-              <a:t>인 </a:t>
-            </a:r>
-            <a:r>
-              <a:rPr lang="en-US" altLang="ko-KR" sz="1800" dirty="0"/>
-              <a:t>F(3)</a:t>
-            </a:r>
-            <a:r>
-              <a:rPr lang="ko-KR" altLang="en-US" sz="1800" dirty="0"/>
-              <a:t>을 활용함</a:t>
+              <a:t>에서 </a:t>
+            </a:r>
+            <a:r>
+              <a:rPr lang="en-US" altLang="ko-KR" sz="2000" dirty="0"/>
+              <a:t>F(3) </a:t>
+            </a:r>
+            <a:r>
+              <a:rPr lang="ko-KR" altLang="en-US" sz="2000" dirty="0"/>
+              <a:t>값을 이용 </a:t>
+            </a:r>
+            <a:r>
+              <a:rPr lang="en-US" altLang="ko-KR" sz="2000" dirty="0"/>
+              <a:t>(j</a:t>
+            </a:r>
+            <a:r>
+              <a:rPr lang="ko-KR" altLang="en-US" sz="2000" dirty="0"/>
+              <a:t>만 움직임</a:t>
+            </a:r>
+            <a:r>
+              <a:rPr lang="en-US" altLang="ko-KR" sz="2000" dirty="0"/>
+              <a:t>)</a:t>
             </a:r>
             <a:endParaRPr lang="en-US" altLang="ko-KR" sz="1800" dirty="0"/>
           </a:p>
@@ -29043,7 +29441,7 @@
             </a:pPr>
             <a:r>
               <a:rPr lang="en-US" altLang="ko-KR" dirty="0"/>
-              <a:t> 0</a:t>
+              <a:t> F(1)=0</a:t>
             </a:r>
           </a:p>
         </p:txBody>
@@ -29354,7 +29752,7 @@
             </a:pPr>
             <a:r>
               <a:rPr lang="en-US" altLang="ko-KR" dirty="0"/>
-              <a:t> 0        1</a:t>
+              <a:t> F(1)=0  F(2)=1</a:t>
             </a:r>
           </a:p>
         </p:txBody>
@@ -29747,8 +30145,14 @@
             </a:pPr>
             <a:r>
               <a:rPr lang="en-US" altLang="ko-KR" dirty="0"/>
-              <a:t> 0        1           2</a:t>
-            </a:r>
+              <a:t> F(1)=0  F(2)=1  F(3)=2</a:t>
+            </a:r>
+          </a:p>
+          <a:p>
+            <a:pPr marL="0" indent="0">
+              <a:buNone/>
+            </a:pPr>
+            <a:endParaRPr lang="en-US" altLang="ko-KR" dirty="0"/>
           </a:p>
         </p:txBody>
       </p:sp>
@@ -30522,8 +30926,14 @@
             </a:pPr>
             <a:r>
               <a:rPr lang="en-US" altLang="ko-KR" dirty="0"/>
-              <a:t> 0        1           2            3</a:t>
-            </a:r>
+              <a:t> F(1)=0  F(2)=1  F(3)=2   F(4)=3</a:t>
+            </a:r>
+          </a:p>
+          <a:p>
+            <a:pPr marL="0" indent="0">
+              <a:buNone/>
+            </a:pPr>
+            <a:endParaRPr lang="en-US" altLang="ko-KR" dirty="0"/>
           </a:p>
         </p:txBody>
       </p:sp>
@@ -31243,7 +31653,7 @@
             </a:pPr>
             <a:r>
               <a:rPr lang="en-US" altLang="ko-KR" dirty="0"/>
-              <a:t> 0        1           2            3</a:t>
+              <a:t> F(1)=0  F(2)=1  F(3)=2   F(4)=3</a:t>
             </a:r>
           </a:p>
         </p:txBody>
@@ -32128,7 +32538,7 @@
             </a:pPr>
             <a:r>
               <a:rPr lang="en-US" altLang="ko-KR" dirty="0"/>
-              <a:t> 0        1           2            3</a:t>
+              <a:t> F(1)=0  F(2)=1  F(3)=2   F(4)=3</a:t>
             </a:r>
           </a:p>
         </p:txBody>
@@ -33115,7 +33525,7 @@
             </a:pPr>
             <a:r>
               <a:rPr lang="en-US" altLang="ko-KR" dirty="0"/>
-              <a:t> 0        1           2            3</a:t>
+              <a:t> F(1)=0  F(2)=1  F(3)=2   F(4)=3</a:t>
             </a:r>
           </a:p>
         </p:txBody>
@@ -33955,7 +34365,7 @@
         <p:spPr>
           <a:xfrm>
             <a:off x="7984463" y="2213283"/>
-            <a:ext cx="2138727" cy="369332"/>
+            <a:ext cx="1563248" cy="369332"/>
           </a:xfrm>
           <a:prstGeom prst="rect">
             <a:avLst/>
@@ -33970,19 +34380,11 @@
           <a:p>
             <a:r>
               <a:rPr lang="en-US" altLang="ko-KR" dirty="0"/>
-              <a:t>3</a:t>
-            </a:r>
-            <a:r>
-              <a:rPr lang="ko-KR" altLang="en-US" dirty="0"/>
-              <a:t>글자 </a:t>
-            </a:r>
-            <a:r>
-              <a:rPr lang="en-US" altLang="ko-KR" dirty="0"/>
-              <a:t>= 2 + 1</a:t>
-            </a:r>
-            <a:r>
-              <a:rPr lang="ko-KR" altLang="en-US" dirty="0"/>
-              <a:t>글자</a:t>
+              <a:t>F(2) = 1 </a:t>
+            </a:r>
+            <a:r>
+              <a:rPr lang="ko-KR" altLang="en-US" dirty="0"/>
+              <a:t>이용</a:t>
             </a:r>
             <a:endParaRPr lang="en-US" altLang="ko-KR" dirty="0"/>
           </a:p>
@@ -34130,7 +34532,7 @@
             </a:pPr>
             <a:r>
               <a:rPr lang="en-US" altLang="ko-KR" dirty="0"/>
-              <a:t> 0        1           2            3</a:t>
+              <a:t> F(1)=0  F(2)=1  F(3)=2   F(4)=3</a:t>
             </a:r>
           </a:p>
         </p:txBody>
@@ -34930,7 +35332,7 @@
         <p:spPr>
           <a:xfrm>
             <a:off x="8863550" y="2710410"/>
-            <a:ext cx="553357" cy="369332"/>
+            <a:ext cx="787395" cy="369332"/>
           </a:xfrm>
           <a:prstGeom prst="rect">
             <a:avLst/>
@@ -34950,7 +35352,7 @@
           <a:p>
             <a:r>
               <a:rPr lang="en-US" altLang="ko-KR" dirty="0"/>
-              <a:t>A B</a:t>
+              <a:t>A B A</a:t>
             </a:r>
             <a:endParaRPr lang="ko-KR" altLang="en-US" dirty="0"/>
           </a:p>
@@ -34970,8 +35372,8 @@
         </p:nvSpPr>
         <p:spPr>
           <a:xfrm>
-            <a:off x="9091362" y="3145615"/>
-            <a:ext cx="553357" cy="369332"/>
+            <a:off x="9339559" y="3145615"/>
+            <a:ext cx="787395" cy="369332"/>
           </a:xfrm>
           <a:prstGeom prst="rect">
             <a:avLst/>
@@ -34991,7 +35393,7 @@
           <a:p>
             <a:r>
               <a:rPr lang="en-US" altLang="ko-KR" dirty="0"/>
-              <a:t>A B</a:t>
+              <a:t>A B A</a:t>
             </a:r>
             <a:endParaRPr lang="ko-KR" altLang="en-US" dirty="0"/>
           </a:p>
@@ -35039,10 +35441,10 @@
       </p:sp>
       <p:sp>
         <p:nvSpPr>
-          <p:cNvPr id="35" name="TextBox 34">
-            <a:extLst>
-              <a:ext uri="{FF2B5EF4-FFF2-40B4-BE49-F238E27FC236}">
-                <a16:creationId xmlns:a16="http://schemas.microsoft.com/office/drawing/2014/main" id="{6AACEFF2-A539-49A1-1968-17937E0501B5}"/>
+          <p:cNvPr id="23" name="TextBox 22">
+            <a:extLst>
+              <a:ext uri="{FF2B5EF4-FFF2-40B4-BE49-F238E27FC236}">
+                <a16:creationId xmlns:a16="http://schemas.microsoft.com/office/drawing/2014/main" id="{51A8F746-F8EF-8C4A-C4D1-A8609C0F5273}"/>
               </a:ext>
             </a:extLst>
           </p:cNvPr>
@@ -35052,7 +35454,7 @@
         <p:spPr>
           <a:xfrm>
             <a:off x="7984463" y="2213283"/>
-            <a:ext cx="2138727" cy="369332"/>
+            <a:ext cx="1563248" cy="369332"/>
           </a:xfrm>
           <a:prstGeom prst="rect">
             <a:avLst/>
@@ -35067,103 +35469,13 @@
           <a:p>
             <a:r>
               <a:rPr lang="en-US" altLang="ko-KR" dirty="0"/>
-              <a:t>3</a:t>
-            </a:r>
-            <a:r>
-              <a:rPr lang="ko-KR" altLang="en-US" dirty="0"/>
-              <a:t>글자 </a:t>
-            </a:r>
-            <a:r>
-              <a:rPr lang="en-US" altLang="ko-KR" dirty="0"/>
-              <a:t>= 2 + 1</a:t>
-            </a:r>
-            <a:r>
-              <a:rPr lang="ko-KR" altLang="en-US" dirty="0"/>
-              <a:t>글자</a:t>
+              <a:t>F(2) = 1 </a:t>
+            </a:r>
+            <a:r>
+              <a:rPr lang="ko-KR" altLang="en-US" dirty="0"/>
+              <a:t>이용</a:t>
             </a:r>
             <a:endParaRPr lang="en-US" altLang="ko-KR" dirty="0"/>
-          </a:p>
-        </p:txBody>
-      </p:sp>
-      <p:sp>
-        <p:nvSpPr>
-          <p:cNvPr id="36" name="TextBox 35">
-            <a:extLst>
-              <a:ext uri="{FF2B5EF4-FFF2-40B4-BE49-F238E27FC236}">
-                <a16:creationId xmlns:a16="http://schemas.microsoft.com/office/drawing/2014/main" id="{53DFED0C-BF06-776E-D81B-0992DA2ED4C7}"/>
-              </a:ext>
-            </a:extLst>
-          </p:cNvPr>
-          <p:cNvSpPr txBox="1"/>
-          <p:nvPr/>
-        </p:nvSpPr>
-        <p:spPr>
-          <a:xfrm>
-            <a:off x="9344315" y="2710409"/>
-            <a:ext cx="336952" cy="369332"/>
-          </a:xfrm>
-          <a:prstGeom prst="rect">
-            <a:avLst/>
-          </a:prstGeom>
-          <a:noFill/>
-          <a:ln>
-            <a:solidFill>
-              <a:schemeClr val="tx1"/>
-            </a:solidFill>
-          </a:ln>
-        </p:spPr>
-        <p:txBody>
-          <a:bodyPr wrap="none" rtlCol="0">
-            <a:spAutoFit/>
-          </a:bodyPr>
-          <a:lstStyle/>
-          <a:p>
-            <a:r>
-              <a:rPr lang="en-US" altLang="ko-KR" dirty="0"/>
-              <a:t>A</a:t>
-            </a:r>
-            <a:endParaRPr lang="ko-KR" altLang="en-US" dirty="0"/>
-          </a:p>
-        </p:txBody>
-      </p:sp>
-      <p:sp>
-        <p:nvSpPr>
-          <p:cNvPr id="37" name="TextBox 36">
-            <a:extLst>
-              <a:ext uri="{FF2B5EF4-FFF2-40B4-BE49-F238E27FC236}">
-                <a16:creationId xmlns:a16="http://schemas.microsoft.com/office/drawing/2014/main" id="{C37C3C67-0567-92BF-C5F0-9E3B77E2FA12}"/>
-              </a:ext>
-            </a:extLst>
-          </p:cNvPr>
-          <p:cNvSpPr txBox="1"/>
-          <p:nvPr/>
-        </p:nvSpPr>
-        <p:spPr>
-          <a:xfrm>
-            <a:off x="9572131" y="3145614"/>
-            <a:ext cx="336952" cy="369332"/>
-          </a:xfrm>
-          <a:prstGeom prst="rect">
-            <a:avLst/>
-          </a:prstGeom>
-          <a:noFill/>
-          <a:ln>
-            <a:solidFill>
-              <a:schemeClr val="tx1"/>
-            </a:solidFill>
-          </a:ln>
-        </p:spPr>
-        <p:txBody>
-          <a:bodyPr wrap="none" rtlCol="0">
-            <a:spAutoFit/>
-          </a:bodyPr>
-          <a:lstStyle/>
-          <a:p>
-            <a:r>
-              <a:rPr lang="en-US" altLang="ko-KR" dirty="0"/>
-              <a:t>A</a:t>
-            </a:r>
-            <a:endParaRPr lang="ko-KR" altLang="en-US" dirty="0"/>
           </a:p>
         </p:txBody>
       </p:sp>
@@ -35188,7 +35500,7 @@
         <p:cNvPr id="1" name="">
           <a:extLst>
             <a:ext uri="{FF2B5EF4-FFF2-40B4-BE49-F238E27FC236}">
-              <a16:creationId xmlns:a16="http://schemas.microsoft.com/office/drawing/2014/main" id="{4D78773B-5A77-38D6-AEE9-95CEC320F522}"/>
+              <a16:creationId xmlns:a16="http://schemas.microsoft.com/office/drawing/2014/main" id="{BB7781F0-9EC6-04E6-6524-C91A8AB7D045}"/>
             </a:ext>
           </a:extLst>
         </p:cNvPr>
@@ -35208,7 +35520,7 @@
           <p:cNvPr id="2" name="제목 1">
             <a:extLst>
               <a:ext uri="{FF2B5EF4-FFF2-40B4-BE49-F238E27FC236}">
-                <a16:creationId xmlns:a16="http://schemas.microsoft.com/office/drawing/2014/main" id="{020119F2-23AB-E6AB-952F-2D0F401D89B6}"/>
+                <a16:creationId xmlns:a16="http://schemas.microsoft.com/office/drawing/2014/main" id="{F4142E96-1B54-810F-820B-AE73BC39F81B}"/>
               </a:ext>
             </a:extLst>
           </p:cNvPr>
@@ -35237,7 +35549,7 @@
           <p:cNvPr id="3" name="내용 개체 틀 2">
             <a:extLst>
               <a:ext uri="{FF2B5EF4-FFF2-40B4-BE49-F238E27FC236}">
-                <a16:creationId xmlns:a16="http://schemas.microsoft.com/office/drawing/2014/main" id="{6E861CB7-A46F-6E2D-5C52-784B23000FCC}"/>
+                <a16:creationId xmlns:a16="http://schemas.microsoft.com/office/drawing/2014/main" id="{59EB800A-8E9D-4CEF-A62D-4EC0EC01E708}"/>
               </a:ext>
             </a:extLst>
           </p:cNvPr>
@@ -35309,7 +35621,7 @@
             </a:pPr>
             <a:r>
               <a:rPr lang="en-US" altLang="ko-KR" dirty="0"/>
-              <a:t> 0        1           2            3              0</a:t>
+              <a:t> F(1)=0  F(2)=1  F(3)=2   F(4)=3</a:t>
             </a:r>
           </a:p>
         </p:txBody>
@@ -35319,7 +35631,7 @@
           <p:cNvPr id="4" name="TextBox 3">
             <a:extLst>
               <a:ext uri="{FF2B5EF4-FFF2-40B4-BE49-F238E27FC236}">
-                <a16:creationId xmlns:a16="http://schemas.microsoft.com/office/drawing/2014/main" id="{2BA0A059-9491-A24B-8FF3-734F179E7C1C}"/>
+                <a16:creationId xmlns:a16="http://schemas.microsoft.com/office/drawing/2014/main" id="{221F39FD-02CD-5248-646B-633A4120D695}"/>
               </a:ext>
             </a:extLst>
           </p:cNvPr>
@@ -35360,7 +35672,7 @@
           <p:cNvPr id="5" name="TextBox 4">
             <a:extLst>
               <a:ext uri="{FF2B5EF4-FFF2-40B4-BE49-F238E27FC236}">
-                <a16:creationId xmlns:a16="http://schemas.microsoft.com/office/drawing/2014/main" id="{0750B4E8-3726-673F-9323-77D4C3C2BBD5}"/>
+                <a16:creationId xmlns:a16="http://schemas.microsoft.com/office/drawing/2014/main" id="{38B3031D-15C2-FBE9-3046-36D5B1C736C6}"/>
               </a:ext>
             </a:extLst>
           </p:cNvPr>
@@ -35401,7 +35713,7 @@
           <p:cNvPr id="7" name="TextBox 6">
             <a:extLst>
               <a:ext uri="{FF2B5EF4-FFF2-40B4-BE49-F238E27FC236}">
-                <a16:creationId xmlns:a16="http://schemas.microsoft.com/office/drawing/2014/main" id="{683B3106-C6F0-48B6-D3D3-60CF3D83F82C}"/>
+                <a16:creationId xmlns:a16="http://schemas.microsoft.com/office/drawing/2014/main" id="{5CC599E2-FE40-CE8A-C1D1-812AD2951D8B}"/>
               </a:ext>
             </a:extLst>
           </p:cNvPr>
@@ -35442,7 +35754,7 @@
           <p:cNvPr id="8" name="TextBox 7">
             <a:extLst>
               <a:ext uri="{FF2B5EF4-FFF2-40B4-BE49-F238E27FC236}">
-                <a16:creationId xmlns:a16="http://schemas.microsoft.com/office/drawing/2014/main" id="{922DDDAD-6A96-7EC0-3F59-1FC5E9748A6F}"/>
+                <a16:creationId xmlns:a16="http://schemas.microsoft.com/office/drawing/2014/main" id="{BE8146DE-466F-0640-D75E-1C57B46BEDB6}"/>
               </a:ext>
             </a:extLst>
           </p:cNvPr>
@@ -35483,7 +35795,7 @@
           <p:cNvPr id="9" name="TextBox 8">
             <a:extLst>
               <a:ext uri="{FF2B5EF4-FFF2-40B4-BE49-F238E27FC236}">
-                <a16:creationId xmlns:a16="http://schemas.microsoft.com/office/drawing/2014/main" id="{F4978D54-A50E-5E2E-85AD-29B5D635650C}"/>
+                <a16:creationId xmlns:a16="http://schemas.microsoft.com/office/drawing/2014/main" id="{A4D1EBDE-1259-BDEB-C404-542269F46B79}"/>
               </a:ext>
             </a:extLst>
           </p:cNvPr>
@@ -35524,7 +35836,7 @@
           <p:cNvPr id="10" name="TextBox 9">
             <a:extLst>
               <a:ext uri="{FF2B5EF4-FFF2-40B4-BE49-F238E27FC236}">
-                <a16:creationId xmlns:a16="http://schemas.microsoft.com/office/drawing/2014/main" id="{B63E3D24-873A-C62E-2CC0-335EAF062B3A}"/>
+                <a16:creationId xmlns:a16="http://schemas.microsoft.com/office/drawing/2014/main" id="{3584A9C2-0784-3166-25D1-652BCF65F842}"/>
               </a:ext>
             </a:extLst>
           </p:cNvPr>
@@ -35565,7 +35877,7 @@
           <p:cNvPr id="11" name="TextBox 10">
             <a:extLst>
               <a:ext uri="{FF2B5EF4-FFF2-40B4-BE49-F238E27FC236}">
-                <a16:creationId xmlns:a16="http://schemas.microsoft.com/office/drawing/2014/main" id="{CBE7A8C7-3188-AE8A-6D4D-37B5F80B373B}"/>
+                <a16:creationId xmlns:a16="http://schemas.microsoft.com/office/drawing/2014/main" id="{207E3998-53CE-333F-C223-15BE6FC117E8}"/>
               </a:ext>
             </a:extLst>
           </p:cNvPr>
@@ -35606,7 +35918,7 @@
           <p:cNvPr id="12" name="TextBox 11">
             <a:extLst>
               <a:ext uri="{FF2B5EF4-FFF2-40B4-BE49-F238E27FC236}">
-                <a16:creationId xmlns:a16="http://schemas.microsoft.com/office/drawing/2014/main" id="{32E4AE6A-3D50-2755-A296-4099768FCB77}"/>
+                <a16:creationId xmlns:a16="http://schemas.microsoft.com/office/drawing/2014/main" id="{A07C8EF8-3DC3-A102-D314-A7E2EDD718C5}"/>
               </a:ext>
             </a:extLst>
           </p:cNvPr>
@@ -35647,7 +35959,7 @@
           <p:cNvPr id="13" name="TextBox 12">
             <a:extLst>
               <a:ext uri="{FF2B5EF4-FFF2-40B4-BE49-F238E27FC236}">
-                <a16:creationId xmlns:a16="http://schemas.microsoft.com/office/drawing/2014/main" id="{25BDA086-7A77-3C39-DDA7-CFDF1E4791EB}"/>
+                <a16:creationId xmlns:a16="http://schemas.microsoft.com/office/drawing/2014/main" id="{87DA8A74-4EFA-1754-63EE-6465518369E0}"/>
               </a:ext>
             </a:extLst>
           </p:cNvPr>
@@ -35688,7 +36000,7 @@
           <p:cNvPr id="14" name="TextBox 13">
             <a:extLst>
               <a:ext uri="{FF2B5EF4-FFF2-40B4-BE49-F238E27FC236}">
-                <a16:creationId xmlns:a16="http://schemas.microsoft.com/office/drawing/2014/main" id="{DD3A6D23-3739-D109-2074-0554DC465D39}"/>
+                <a16:creationId xmlns:a16="http://schemas.microsoft.com/office/drawing/2014/main" id="{FAB834DA-6E9B-F4E9-0B30-8FEC0F68FDC1}"/>
               </a:ext>
             </a:extLst>
           </p:cNvPr>
@@ -35729,7 +36041,7 @@
           <p:cNvPr id="15" name="TextBox 14">
             <a:extLst>
               <a:ext uri="{FF2B5EF4-FFF2-40B4-BE49-F238E27FC236}">
-                <a16:creationId xmlns:a16="http://schemas.microsoft.com/office/drawing/2014/main" id="{8D41178C-E20A-50F6-C7D0-23E71A6D6F44}"/>
+                <a16:creationId xmlns:a16="http://schemas.microsoft.com/office/drawing/2014/main" id="{79828C0E-B3F9-5922-E7D6-B764205D3D30}"/>
               </a:ext>
             </a:extLst>
           </p:cNvPr>
@@ -35770,7 +36082,7 @@
           <p:cNvPr id="16" name="TextBox 15">
             <a:extLst>
               <a:ext uri="{FF2B5EF4-FFF2-40B4-BE49-F238E27FC236}">
-                <a16:creationId xmlns:a16="http://schemas.microsoft.com/office/drawing/2014/main" id="{4E880534-B666-4964-C219-F8BF89715B33}"/>
+                <a16:creationId xmlns:a16="http://schemas.microsoft.com/office/drawing/2014/main" id="{99CBFA1F-3C94-B770-8699-7213ED5079FB}"/>
               </a:ext>
             </a:extLst>
           </p:cNvPr>
@@ -35811,7 +36123,7 @@
           <p:cNvPr id="17" name="TextBox 16">
             <a:extLst>
               <a:ext uri="{FF2B5EF4-FFF2-40B4-BE49-F238E27FC236}">
-                <a16:creationId xmlns:a16="http://schemas.microsoft.com/office/drawing/2014/main" id="{7257DF08-DB17-E659-652C-826CA5ADC738}"/>
+                <a16:creationId xmlns:a16="http://schemas.microsoft.com/office/drawing/2014/main" id="{825C6D58-25EA-AED4-68AA-A8E4D5159193}"/>
               </a:ext>
             </a:extLst>
           </p:cNvPr>
@@ -35852,7 +36164,7 @@
           <p:cNvPr id="18" name="TextBox 17">
             <a:extLst>
               <a:ext uri="{FF2B5EF4-FFF2-40B4-BE49-F238E27FC236}">
-                <a16:creationId xmlns:a16="http://schemas.microsoft.com/office/drawing/2014/main" id="{414D978F-5D6A-58DE-3EC6-CE45978CE83F}"/>
+                <a16:creationId xmlns:a16="http://schemas.microsoft.com/office/drawing/2014/main" id="{33904C7A-B747-9BF3-5818-B4E5F5C10F0A}"/>
               </a:ext>
             </a:extLst>
           </p:cNvPr>
@@ -35893,7 +36205,7 @@
           <p:cNvPr id="19" name="TextBox 18">
             <a:extLst>
               <a:ext uri="{FF2B5EF4-FFF2-40B4-BE49-F238E27FC236}">
-                <a16:creationId xmlns:a16="http://schemas.microsoft.com/office/drawing/2014/main" id="{005DF020-F37D-F76A-DC60-21A74D90848C}"/>
+                <a16:creationId xmlns:a16="http://schemas.microsoft.com/office/drawing/2014/main" id="{33C8E395-F8D6-E458-5CD2-713997E3FDF5}"/>
               </a:ext>
             </a:extLst>
           </p:cNvPr>
@@ -35934,7 +36246,7 @@
           <p:cNvPr id="20" name="TextBox 19">
             <a:extLst>
               <a:ext uri="{FF2B5EF4-FFF2-40B4-BE49-F238E27FC236}">
-                <a16:creationId xmlns:a16="http://schemas.microsoft.com/office/drawing/2014/main" id="{497A96A5-D561-9EF7-4FBC-7D26D7F59BDB}"/>
+                <a16:creationId xmlns:a16="http://schemas.microsoft.com/office/drawing/2014/main" id="{8A7ACB33-9C9A-DC57-85EE-6F4F7F745723}"/>
               </a:ext>
             </a:extLst>
           </p:cNvPr>
@@ -35975,7 +36287,7 @@
           <p:cNvPr id="21" name="TextBox 20">
             <a:extLst>
               <a:ext uri="{FF2B5EF4-FFF2-40B4-BE49-F238E27FC236}">
-                <a16:creationId xmlns:a16="http://schemas.microsoft.com/office/drawing/2014/main" id="{48C29790-99E0-4BBB-17AB-E485023B64A8}"/>
+                <a16:creationId xmlns:a16="http://schemas.microsoft.com/office/drawing/2014/main" id="{284458CA-55DC-CAA0-18AF-59F48144FEF7}"/>
               </a:ext>
             </a:extLst>
           </p:cNvPr>
@@ -36016,7 +36328,7 @@
           <p:cNvPr id="22" name="TextBox 21">
             <a:extLst>
               <a:ext uri="{FF2B5EF4-FFF2-40B4-BE49-F238E27FC236}">
-                <a16:creationId xmlns:a16="http://schemas.microsoft.com/office/drawing/2014/main" id="{5D6E8FFF-2F99-BF62-B2D3-320417C8FEB8}"/>
+                <a16:creationId xmlns:a16="http://schemas.microsoft.com/office/drawing/2014/main" id="{A9A687BB-3CF9-FDB6-3AA7-045C88DFD552}"/>
               </a:ext>
             </a:extLst>
           </p:cNvPr>
@@ -36057,7 +36369,7 @@
           <p:cNvPr id="27" name="연결선: 구부러짐 26">
             <a:extLst>
               <a:ext uri="{FF2B5EF4-FFF2-40B4-BE49-F238E27FC236}">
-                <a16:creationId xmlns:a16="http://schemas.microsoft.com/office/drawing/2014/main" id="{52F5C8B5-0268-B5EE-526C-FCDFBCA99AD5}"/>
+                <a16:creationId xmlns:a16="http://schemas.microsoft.com/office/drawing/2014/main" id="{C318693E-E8C9-74B4-D185-0CE6831D2083}"/>
               </a:ext>
             </a:extLst>
           </p:cNvPr>
@@ -36099,7 +36411,7 @@
           <p:cNvPr id="32" name="TextBox 31">
             <a:extLst>
               <a:ext uri="{FF2B5EF4-FFF2-40B4-BE49-F238E27FC236}">
-                <a16:creationId xmlns:a16="http://schemas.microsoft.com/office/drawing/2014/main" id="{01DBE00E-A91D-B804-9B32-0B090696C138}"/>
+                <a16:creationId xmlns:a16="http://schemas.microsoft.com/office/drawing/2014/main" id="{40914EFC-C699-2E4D-C61A-2C2D6B668C2B}"/>
               </a:ext>
             </a:extLst>
           </p:cNvPr>
@@ -36109,7 +36421,7 @@
         <p:spPr>
           <a:xfrm>
             <a:off x="8863550" y="2710410"/>
-            <a:ext cx="553357" cy="369332"/>
+            <a:ext cx="787395" cy="369332"/>
           </a:xfrm>
           <a:prstGeom prst="rect">
             <a:avLst/>
@@ -36129,7 +36441,7 @@
           <a:p>
             <a:r>
               <a:rPr lang="en-US" altLang="ko-KR" dirty="0"/>
-              <a:t>A B</a:t>
+              <a:t>A B A</a:t>
             </a:r>
             <a:endParaRPr lang="ko-KR" altLang="en-US" dirty="0"/>
           </a:p>
@@ -36140,7 +36452,7 @@
           <p:cNvPr id="33" name="TextBox 32">
             <a:extLst>
               <a:ext uri="{FF2B5EF4-FFF2-40B4-BE49-F238E27FC236}">
-                <a16:creationId xmlns:a16="http://schemas.microsoft.com/office/drawing/2014/main" id="{BC6AA431-161B-C7B5-C1A5-ADD255ADE05F}"/>
+                <a16:creationId xmlns:a16="http://schemas.microsoft.com/office/drawing/2014/main" id="{AFEAC528-5518-DACF-2D21-D819514F97A9}"/>
               </a:ext>
             </a:extLst>
           </p:cNvPr>
@@ -36149,8 +36461,8 @@
         </p:nvSpPr>
         <p:spPr>
           <a:xfrm>
-            <a:off x="9091362" y="3145615"/>
-            <a:ext cx="553357" cy="369332"/>
+            <a:off x="9339559" y="3145615"/>
+            <a:ext cx="800219" cy="369332"/>
           </a:xfrm>
           <a:prstGeom prst="rect">
             <a:avLst/>
@@ -36170,7 +36482,19 @@
           <a:p>
             <a:r>
               <a:rPr lang="en-US" altLang="ko-KR" dirty="0"/>
-              <a:t>A B</a:t>
+              <a:t>A </a:t>
+            </a:r>
+            <a:r>
+              <a:rPr lang="en-US" altLang="ko-KR" b="1" dirty="0">
+                <a:solidFill>
+                  <a:srgbClr val="FF0000"/>
+                </a:solidFill>
+              </a:rPr>
+              <a:t>B</a:t>
+            </a:r>
+            <a:r>
+              <a:rPr lang="en-US" altLang="ko-KR" dirty="0"/>
+              <a:t> A</a:t>
             </a:r>
             <a:endParaRPr lang="ko-KR" altLang="en-US" dirty="0"/>
           </a:p>
@@ -36181,7 +36505,7 @@
           <p:cNvPr id="34" name="TextBox 33">
             <a:extLst>
               <a:ext uri="{FF2B5EF4-FFF2-40B4-BE49-F238E27FC236}">
-                <a16:creationId xmlns:a16="http://schemas.microsoft.com/office/drawing/2014/main" id="{F179B4F4-BF0D-7A77-B4DE-CF2C58F234D3}"/>
+                <a16:creationId xmlns:a16="http://schemas.microsoft.com/office/drawing/2014/main" id="{60B772CB-7259-8680-18C1-68B1549D8769}"/>
               </a:ext>
             </a:extLst>
           </p:cNvPr>
@@ -36218,10 +36542,10 @@
       </p:sp>
       <p:sp>
         <p:nvSpPr>
-          <p:cNvPr id="35" name="TextBox 34">
-            <a:extLst>
-              <a:ext uri="{FF2B5EF4-FFF2-40B4-BE49-F238E27FC236}">
-                <a16:creationId xmlns:a16="http://schemas.microsoft.com/office/drawing/2014/main" id="{B3AA6CEE-DD74-9304-9132-984C43F149AE}"/>
+          <p:cNvPr id="36" name="TextBox 35">
+            <a:extLst>
+              <a:ext uri="{FF2B5EF4-FFF2-40B4-BE49-F238E27FC236}">
+                <a16:creationId xmlns:a16="http://schemas.microsoft.com/office/drawing/2014/main" id="{337384D3-5CD3-51D1-BDEA-99D2CB36A499}"/>
               </a:ext>
             </a:extLst>
           </p:cNvPr>
@@ -36230,56 +36554,8 @@
         </p:nvSpPr>
         <p:spPr>
           <a:xfrm>
-            <a:off x="7984463" y="2213283"/>
-            <a:ext cx="2138727" cy="369332"/>
-          </a:xfrm>
-          <a:prstGeom prst="rect">
-            <a:avLst/>
-          </a:prstGeom>
-          <a:noFill/>
-        </p:spPr>
-        <p:txBody>
-          <a:bodyPr wrap="none" rtlCol="0">
-            <a:spAutoFit/>
-          </a:bodyPr>
-          <a:lstStyle/>
-          <a:p>
-            <a:r>
-              <a:rPr lang="en-US" altLang="ko-KR" dirty="0"/>
-              <a:t>3</a:t>
-            </a:r>
-            <a:r>
-              <a:rPr lang="ko-KR" altLang="en-US" dirty="0"/>
-              <a:t>글자 </a:t>
-            </a:r>
-            <a:r>
-              <a:rPr lang="en-US" altLang="ko-KR" dirty="0"/>
-              <a:t>= 2 + 1</a:t>
-            </a:r>
-            <a:r>
-              <a:rPr lang="ko-KR" altLang="en-US" dirty="0"/>
-              <a:t>글자</a:t>
-            </a:r>
-            <a:endParaRPr lang="en-US" altLang="ko-KR" dirty="0"/>
-          </a:p>
-        </p:txBody>
-      </p:sp>
-      <p:sp>
-        <p:nvSpPr>
-          <p:cNvPr id="36" name="TextBox 35">
-            <a:extLst>
-              <a:ext uri="{FF2B5EF4-FFF2-40B4-BE49-F238E27FC236}">
-                <a16:creationId xmlns:a16="http://schemas.microsoft.com/office/drawing/2014/main" id="{18C4BF29-7900-5656-17B0-04E341A09F58}"/>
-              </a:ext>
-            </a:extLst>
-          </p:cNvPr>
-          <p:cNvSpPr txBox="1"/>
-          <p:nvPr/>
-        </p:nvSpPr>
-        <p:spPr>
-          <a:xfrm>
-            <a:off x="9344315" y="2710409"/>
-            <a:ext cx="336952" cy="369332"/>
+            <a:off x="9566385" y="2710409"/>
+            <a:ext cx="332142" cy="369332"/>
           </a:xfrm>
           <a:prstGeom prst="rect">
             <a:avLst/>
@@ -36298,10 +36574,18 @@
           <a:lstStyle/>
           <a:p>
             <a:r>
-              <a:rPr lang="en-US" altLang="ko-KR" dirty="0"/>
-              <a:t>A</a:t>
-            </a:r>
-            <a:endParaRPr lang="ko-KR" altLang="en-US" dirty="0"/>
+              <a:rPr lang="en-US" altLang="ko-KR" b="1" dirty="0">
+                <a:solidFill>
+                  <a:srgbClr val="FF0000"/>
+                </a:solidFill>
+              </a:rPr>
+              <a:t>C</a:t>
+            </a:r>
+            <a:endParaRPr lang="ko-KR" altLang="en-US" b="1" dirty="0">
+              <a:solidFill>
+                <a:srgbClr val="FF0000"/>
+              </a:solidFill>
+            </a:endParaRPr>
           </a:p>
         </p:txBody>
       </p:sp>
@@ -36310,7 +36594,7 @@
           <p:cNvPr id="37" name="TextBox 36">
             <a:extLst>
               <a:ext uri="{FF2B5EF4-FFF2-40B4-BE49-F238E27FC236}">
-                <a16:creationId xmlns:a16="http://schemas.microsoft.com/office/drawing/2014/main" id="{BAA3B48F-73D7-E6CB-3DBD-AE85F7210773}"/>
+                <a16:creationId xmlns:a16="http://schemas.microsoft.com/office/drawing/2014/main" id="{4B448411-E68A-7957-68A5-4B238AEDD1A5}"/>
               </a:ext>
             </a:extLst>
           </p:cNvPr>
@@ -36319,8 +36603,8 @@
         </p:nvSpPr>
         <p:spPr>
           <a:xfrm>
-            <a:off x="9572131" y="3145614"/>
-            <a:ext cx="336952" cy="369332"/>
+            <a:off x="10094651" y="3145614"/>
+            <a:ext cx="319318" cy="369332"/>
           </a:xfrm>
           <a:prstGeom prst="rect">
             <a:avLst/>
@@ -36340,16 +36624,56 @@
           <a:p>
             <a:r>
               <a:rPr lang="en-US" altLang="ko-KR" dirty="0"/>
-              <a:t>A</a:t>
+              <a:t>B</a:t>
             </a:r>
             <a:endParaRPr lang="ko-KR" altLang="en-US" dirty="0"/>
+          </a:p>
+        </p:txBody>
+      </p:sp>
+      <p:sp>
+        <p:nvSpPr>
+          <p:cNvPr id="23" name="TextBox 22">
+            <a:extLst>
+              <a:ext uri="{FF2B5EF4-FFF2-40B4-BE49-F238E27FC236}">
+                <a16:creationId xmlns:a16="http://schemas.microsoft.com/office/drawing/2014/main" id="{DA49F121-EFFF-FD43-9936-CD612A40E9D4}"/>
+              </a:ext>
+            </a:extLst>
+          </p:cNvPr>
+          <p:cNvSpPr txBox="1"/>
+          <p:nvPr/>
+        </p:nvSpPr>
+        <p:spPr>
+          <a:xfrm>
+            <a:off x="7984463" y="2213283"/>
+            <a:ext cx="1563248" cy="369332"/>
+          </a:xfrm>
+          <a:prstGeom prst="rect">
+            <a:avLst/>
+          </a:prstGeom>
+          <a:noFill/>
+        </p:spPr>
+        <p:txBody>
+          <a:bodyPr wrap="none" rtlCol="0">
+            <a:spAutoFit/>
+          </a:bodyPr>
+          <a:lstStyle/>
+          <a:p>
+            <a:r>
+              <a:rPr lang="en-US" altLang="ko-KR" dirty="0"/>
+              <a:t>F(2) = 1 </a:t>
+            </a:r>
+            <a:r>
+              <a:rPr lang="ko-KR" altLang="en-US" dirty="0"/>
+              <a:t>이용</a:t>
+            </a:r>
+            <a:endParaRPr lang="en-US" altLang="ko-KR" dirty="0"/>
           </a:p>
         </p:txBody>
       </p:sp>
     </p:spTree>
     <p:extLst>
       <p:ext uri="{BB962C8B-B14F-4D97-AF65-F5344CB8AC3E}">
-        <p14:creationId xmlns:p14="http://schemas.microsoft.com/office/powerpoint/2010/main" val="835633455"/>
+        <p14:creationId xmlns:p14="http://schemas.microsoft.com/office/powerpoint/2010/main" val="2037370666"/>
       </p:ext>
     </p:extLst>
   </p:cSld>
@@ -36367,7 +36691,7 @@
         <p:cNvPr id="1" name="">
           <a:extLst>
             <a:ext uri="{FF2B5EF4-FFF2-40B4-BE49-F238E27FC236}">
-              <a16:creationId xmlns:a16="http://schemas.microsoft.com/office/drawing/2014/main" id="{2FF25B92-DE07-1DA7-8C85-E642D3DD6FF6}"/>
+              <a16:creationId xmlns:a16="http://schemas.microsoft.com/office/drawing/2014/main" id="{C172DECF-855E-61FC-95D0-D5FFD6B1CD71}"/>
             </a:ext>
           </a:extLst>
         </p:cNvPr>
@@ -36387,7 +36711,7 @@
           <p:cNvPr id="2" name="제목 1">
             <a:extLst>
               <a:ext uri="{FF2B5EF4-FFF2-40B4-BE49-F238E27FC236}">
-                <a16:creationId xmlns:a16="http://schemas.microsoft.com/office/drawing/2014/main" id="{AEE506C1-41C5-88AB-62D6-9B1D5758A6D7}"/>
+                <a16:creationId xmlns:a16="http://schemas.microsoft.com/office/drawing/2014/main" id="{57222DB0-07B7-3C75-31E6-8B412D80979D}"/>
               </a:ext>
             </a:extLst>
           </p:cNvPr>
@@ -36416,7 +36740,7 @@
           <p:cNvPr id="3" name="내용 개체 틀 2">
             <a:extLst>
               <a:ext uri="{FF2B5EF4-FFF2-40B4-BE49-F238E27FC236}">
-                <a16:creationId xmlns:a16="http://schemas.microsoft.com/office/drawing/2014/main" id="{8121AF4D-F924-10C1-9FA3-C6006AA77D8B}"/>
+                <a16:creationId xmlns:a16="http://schemas.microsoft.com/office/drawing/2014/main" id="{DF913048-8DB9-6EF2-CF45-73BA21698D09}"/>
               </a:ext>
             </a:extLst>
           </p:cNvPr>
@@ -36488,7 +36812,7 @@
             </a:pPr>
             <a:r>
               <a:rPr lang="en-US" altLang="ko-KR" dirty="0"/>
-              <a:t> 0        1           2            3              0                    …</a:t>
+              <a:t> F(1)=0  F(2)=1  F(3)=2   F(4)=3         F(5)=0</a:t>
             </a:r>
           </a:p>
         </p:txBody>
@@ -36498,7 +36822,7 @@
           <p:cNvPr id="4" name="TextBox 3">
             <a:extLst>
               <a:ext uri="{FF2B5EF4-FFF2-40B4-BE49-F238E27FC236}">
-                <a16:creationId xmlns:a16="http://schemas.microsoft.com/office/drawing/2014/main" id="{DC17E89D-E4D9-B81C-1C7E-8CB688037CE0}"/>
+                <a16:creationId xmlns:a16="http://schemas.microsoft.com/office/drawing/2014/main" id="{7ADC2E76-CACA-8B52-3BD5-BF01599387FE}"/>
               </a:ext>
             </a:extLst>
           </p:cNvPr>
@@ -36539,7 +36863,7 @@
           <p:cNvPr id="5" name="TextBox 4">
             <a:extLst>
               <a:ext uri="{FF2B5EF4-FFF2-40B4-BE49-F238E27FC236}">
-                <a16:creationId xmlns:a16="http://schemas.microsoft.com/office/drawing/2014/main" id="{3BE0A83A-730F-3F91-5508-84FEDA326B95}"/>
+                <a16:creationId xmlns:a16="http://schemas.microsoft.com/office/drawing/2014/main" id="{5AD26711-F397-A9D1-CB67-943FC7545333}"/>
               </a:ext>
             </a:extLst>
           </p:cNvPr>
@@ -36580,7 +36904,7 @@
           <p:cNvPr id="7" name="TextBox 6">
             <a:extLst>
               <a:ext uri="{FF2B5EF4-FFF2-40B4-BE49-F238E27FC236}">
-                <a16:creationId xmlns:a16="http://schemas.microsoft.com/office/drawing/2014/main" id="{61D98DE7-61B1-0E1A-9052-CE4FA62D0131}"/>
+                <a16:creationId xmlns:a16="http://schemas.microsoft.com/office/drawing/2014/main" id="{574DED6C-BF50-36A0-28AD-C72B0D4D9C9E}"/>
               </a:ext>
             </a:extLst>
           </p:cNvPr>
@@ -36621,7 +36945,7 @@
           <p:cNvPr id="8" name="TextBox 7">
             <a:extLst>
               <a:ext uri="{FF2B5EF4-FFF2-40B4-BE49-F238E27FC236}">
-                <a16:creationId xmlns:a16="http://schemas.microsoft.com/office/drawing/2014/main" id="{B69B56F2-E0A0-E944-7433-5A05EA374123}"/>
+                <a16:creationId xmlns:a16="http://schemas.microsoft.com/office/drawing/2014/main" id="{C3199D84-6BC3-8A3F-01A7-5D544D0A177B}"/>
               </a:ext>
             </a:extLst>
           </p:cNvPr>
@@ -36662,7 +36986,7 @@
           <p:cNvPr id="9" name="TextBox 8">
             <a:extLst>
               <a:ext uri="{FF2B5EF4-FFF2-40B4-BE49-F238E27FC236}">
-                <a16:creationId xmlns:a16="http://schemas.microsoft.com/office/drawing/2014/main" id="{D36F5811-1E1F-2307-79CD-27E204CF8C3A}"/>
+                <a16:creationId xmlns:a16="http://schemas.microsoft.com/office/drawing/2014/main" id="{E5A705EE-A925-B494-0503-768D8366983F}"/>
               </a:ext>
             </a:extLst>
           </p:cNvPr>
@@ -36703,7 +37027,7 @@
           <p:cNvPr id="10" name="TextBox 9">
             <a:extLst>
               <a:ext uri="{FF2B5EF4-FFF2-40B4-BE49-F238E27FC236}">
-                <a16:creationId xmlns:a16="http://schemas.microsoft.com/office/drawing/2014/main" id="{B77AB263-E8A7-2A7E-951E-BD551E5FCA8B}"/>
+                <a16:creationId xmlns:a16="http://schemas.microsoft.com/office/drawing/2014/main" id="{28AC3B18-DF29-B0D5-6355-31B6308D3893}"/>
               </a:ext>
             </a:extLst>
           </p:cNvPr>
@@ -36744,7 +37068,7 @@
           <p:cNvPr id="11" name="TextBox 10">
             <a:extLst>
               <a:ext uri="{FF2B5EF4-FFF2-40B4-BE49-F238E27FC236}">
-                <a16:creationId xmlns:a16="http://schemas.microsoft.com/office/drawing/2014/main" id="{5741E543-0DA3-0B27-98CB-C1C868D8BBDF}"/>
+                <a16:creationId xmlns:a16="http://schemas.microsoft.com/office/drawing/2014/main" id="{45E9D9A3-02C6-AC3E-A2AB-C4BD6CBD694E}"/>
               </a:ext>
             </a:extLst>
           </p:cNvPr>
@@ -36785,7 +37109,7 @@
           <p:cNvPr id="12" name="TextBox 11">
             <a:extLst>
               <a:ext uri="{FF2B5EF4-FFF2-40B4-BE49-F238E27FC236}">
-                <a16:creationId xmlns:a16="http://schemas.microsoft.com/office/drawing/2014/main" id="{BEA38CFD-2337-2EAA-2611-0F1D9277365D}"/>
+                <a16:creationId xmlns:a16="http://schemas.microsoft.com/office/drawing/2014/main" id="{73DDC632-FC1C-8FED-147E-7F706FDABD01}"/>
               </a:ext>
             </a:extLst>
           </p:cNvPr>
@@ -36826,7 +37150,7 @@
           <p:cNvPr id="13" name="TextBox 12">
             <a:extLst>
               <a:ext uri="{FF2B5EF4-FFF2-40B4-BE49-F238E27FC236}">
-                <a16:creationId xmlns:a16="http://schemas.microsoft.com/office/drawing/2014/main" id="{C2803D5D-6E65-DA1D-2693-573CDB00839D}"/>
+                <a16:creationId xmlns:a16="http://schemas.microsoft.com/office/drawing/2014/main" id="{74D62A19-905F-DA61-C745-BD7B03AAEB49}"/>
               </a:ext>
             </a:extLst>
           </p:cNvPr>
@@ -36867,7 +37191,7 @@
           <p:cNvPr id="14" name="TextBox 13">
             <a:extLst>
               <a:ext uri="{FF2B5EF4-FFF2-40B4-BE49-F238E27FC236}">
-                <a16:creationId xmlns:a16="http://schemas.microsoft.com/office/drawing/2014/main" id="{47D8DACA-B994-D8DD-20C8-08C5D2053A77}"/>
+                <a16:creationId xmlns:a16="http://schemas.microsoft.com/office/drawing/2014/main" id="{C19D1097-2493-B516-B481-73DF3F983D1B}"/>
               </a:ext>
             </a:extLst>
           </p:cNvPr>
@@ -36908,7 +37232,7 @@
           <p:cNvPr id="15" name="TextBox 14">
             <a:extLst>
               <a:ext uri="{FF2B5EF4-FFF2-40B4-BE49-F238E27FC236}">
-                <a16:creationId xmlns:a16="http://schemas.microsoft.com/office/drawing/2014/main" id="{762F0394-9A56-EA2A-F24D-DAD4CCF84C84}"/>
+                <a16:creationId xmlns:a16="http://schemas.microsoft.com/office/drawing/2014/main" id="{0A7C6F78-4827-B061-76C9-20789DA64F91}"/>
               </a:ext>
             </a:extLst>
           </p:cNvPr>
@@ -36949,7 +37273,7 @@
           <p:cNvPr id="16" name="TextBox 15">
             <a:extLst>
               <a:ext uri="{FF2B5EF4-FFF2-40B4-BE49-F238E27FC236}">
-                <a16:creationId xmlns:a16="http://schemas.microsoft.com/office/drawing/2014/main" id="{A0E536A6-88DD-5D72-09A1-91C3327B22F9}"/>
+                <a16:creationId xmlns:a16="http://schemas.microsoft.com/office/drawing/2014/main" id="{E100A288-3652-C819-C3F2-9C69F2EA96F2}"/>
               </a:ext>
             </a:extLst>
           </p:cNvPr>
@@ -36990,7 +37314,7 @@
           <p:cNvPr id="17" name="TextBox 16">
             <a:extLst>
               <a:ext uri="{FF2B5EF4-FFF2-40B4-BE49-F238E27FC236}">
-                <a16:creationId xmlns:a16="http://schemas.microsoft.com/office/drawing/2014/main" id="{BF7FD31E-EEDF-94A6-9034-D098D67C339B}"/>
+                <a16:creationId xmlns:a16="http://schemas.microsoft.com/office/drawing/2014/main" id="{01683741-FC92-F384-09B3-931B77375685}"/>
               </a:ext>
             </a:extLst>
           </p:cNvPr>
@@ -37031,7 +37355,7 @@
           <p:cNvPr id="18" name="TextBox 17">
             <a:extLst>
               <a:ext uri="{FF2B5EF4-FFF2-40B4-BE49-F238E27FC236}">
-                <a16:creationId xmlns:a16="http://schemas.microsoft.com/office/drawing/2014/main" id="{73787094-5881-9167-A3B3-F3A46FDF943C}"/>
+                <a16:creationId xmlns:a16="http://schemas.microsoft.com/office/drawing/2014/main" id="{7A802650-50CA-7B8C-DA3A-F22C83372870}"/>
               </a:ext>
             </a:extLst>
           </p:cNvPr>
@@ -37072,7 +37396,7 @@
           <p:cNvPr id="19" name="TextBox 18">
             <a:extLst>
               <a:ext uri="{FF2B5EF4-FFF2-40B4-BE49-F238E27FC236}">
-                <a16:creationId xmlns:a16="http://schemas.microsoft.com/office/drawing/2014/main" id="{63EC95B9-F714-2DB3-7A95-131502723DDB}"/>
+                <a16:creationId xmlns:a16="http://schemas.microsoft.com/office/drawing/2014/main" id="{18F2124E-8B1A-9187-2AA5-1430B8902DA9}"/>
               </a:ext>
             </a:extLst>
           </p:cNvPr>
@@ -37113,7 +37437,7 @@
           <p:cNvPr id="20" name="TextBox 19">
             <a:extLst>
               <a:ext uri="{FF2B5EF4-FFF2-40B4-BE49-F238E27FC236}">
-                <a16:creationId xmlns:a16="http://schemas.microsoft.com/office/drawing/2014/main" id="{1D3F6647-52E1-55B5-9886-CCA718B724C7}"/>
+                <a16:creationId xmlns:a16="http://schemas.microsoft.com/office/drawing/2014/main" id="{F86689F2-9595-CB2D-CC64-0416B0A2E344}"/>
               </a:ext>
             </a:extLst>
           </p:cNvPr>
@@ -37154,7 +37478,7 @@
           <p:cNvPr id="21" name="TextBox 20">
             <a:extLst>
               <a:ext uri="{FF2B5EF4-FFF2-40B4-BE49-F238E27FC236}">
-                <a16:creationId xmlns:a16="http://schemas.microsoft.com/office/drawing/2014/main" id="{1D24FBA7-D7DC-698C-3CE6-2C273110C437}"/>
+                <a16:creationId xmlns:a16="http://schemas.microsoft.com/office/drawing/2014/main" id="{23943577-CFE1-3645-E4A8-176141D0A7D3}"/>
               </a:ext>
             </a:extLst>
           </p:cNvPr>
@@ -37195,7 +37519,7 @@
           <p:cNvPr id="22" name="TextBox 21">
             <a:extLst>
               <a:ext uri="{FF2B5EF4-FFF2-40B4-BE49-F238E27FC236}">
-                <a16:creationId xmlns:a16="http://schemas.microsoft.com/office/drawing/2014/main" id="{0B2C2DED-357D-3A85-F623-4AB94889C071}"/>
+                <a16:creationId xmlns:a16="http://schemas.microsoft.com/office/drawing/2014/main" id="{4F7900A5-55BA-4327-6D5F-E3212792D716}"/>
               </a:ext>
             </a:extLst>
           </p:cNvPr>
@@ -37236,7 +37560,7 @@
           <p:cNvPr id="27" name="연결선: 구부러짐 26">
             <a:extLst>
               <a:ext uri="{FF2B5EF4-FFF2-40B4-BE49-F238E27FC236}">
-                <a16:creationId xmlns:a16="http://schemas.microsoft.com/office/drawing/2014/main" id="{F6DFAB3E-FC6C-3EC3-F143-3A991417A212}"/>
+                <a16:creationId xmlns:a16="http://schemas.microsoft.com/office/drawing/2014/main" id="{B9280A08-7B97-3156-C9BD-30590312E447}"/>
               </a:ext>
             </a:extLst>
           </p:cNvPr>
@@ -37278,7 +37602,7 @@
           <p:cNvPr id="32" name="TextBox 31">
             <a:extLst>
               <a:ext uri="{FF2B5EF4-FFF2-40B4-BE49-F238E27FC236}">
-                <a16:creationId xmlns:a16="http://schemas.microsoft.com/office/drawing/2014/main" id="{7939F3C5-C3BC-9A07-6131-135B36E08253}"/>
+                <a16:creationId xmlns:a16="http://schemas.microsoft.com/office/drawing/2014/main" id="{0E29FB73-03B9-B915-DF8D-C5B44C9419BD}"/>
               </a:ext>
             </a:extLst>
           </p:cNvPr>
@@ -37288,7 +37612,7 @@
         <p:spPr>
           <a:xfrm>
             <a:off x="8863550" y="2710410"/>
-            <a:ext cx="553357" cy="369332"/>
+            <a:ext cx="787395" cy="369332"/>
           </a:xfrm>
           <a:prstGeom prst="rect">
             <a:avLst/>
@@ -37308,7 +37632,7 @@
           <a:p>
             <a:r>
               <a:rPr lang="en-US" altLang="ko-KR" dirty="0"/>
-              <a:t>A B</a:t>
+              <a:t>A B A</a:t>
             </a:r>
             <a:endParaRPr lang="ko-KR" altLang="en-US" dirty="0"/>
           </a:p>
@@ -37319,7 +37643,7 @@
           <p:cNvPr id="33" name="TextBox 32">
             <a:extLst>
               <a:ext uri="{FF2B5EF4-FFF2-40B4-BE49-F238E27FC236}">
-                <a16:creationId xmlns:a16="http://schemas.microsoft.com/office/drawing/2014/main" id="{5AF502B0-E320-7881-7C10-94B3F743D30E}"/>
+                <a16:creationId xmlns:a16="http://schemas.microsoft.com/office/drawing/2014/main" id="{9C69C587-369F-A540-5F88-6CEF1A4026AB}"/>
               </a:ext>
             </a:extLst>
           </p:cNvPr>
@@ -37328,8 +37652,8 @@
         </p:nvSpPr>
         <p:spPr>
           <a:xfrm>
-            <a:off x="9091362" y="3145615"/>
-            <a:ext cx="553357" cy="369332"/>
+            <a:off x="9339559" y="3145615"/>
+            <a:ext cx="800219" cy="369332"/>
           </a:xfrm>
           <a:prstGeom prst="rect">
             <a:avLst/>
@@ -37349,7 +37673,7 @@
           <a:p>
             <a:r>
               <a:rPr lang="en-US" altLang="ko-KR" dirty="0"/>
-              <a:t>A B</a:t>
+              <a:t>A B A</a:t>
             </a:r>
             <a:endParaRPr lang="ko-KR" altLang="en-US" dirty="0"/>
           </a:p>
@@ -37360,7 +37684,7 @@
           <p:cNvPr id="34" name="TextBox 33">
             <a:extLst>
               <a:ext uri="{FF2B5EF4-FFF2-40B4-BE49-F238E27FC236}">
-                <a16:creationId xmlns:a16="http://schemas.microsoft.com/office/drawing/2014/main" id="{15183DFA-F8FB-7985-7ADA-10F65A4C331D}"/>
+                <a16:creationId xmlns:a16="http://schemas.microsoft.com/office/drawing/2014/main" id="{D1A17D18-3599-D97D-9B5C-4BA6F95A78BB}"/>
               </a:ext>
             </a:extLst>
           </p:cNvPr>
@@ -37397,10 +37721,57 @@
       </p:sp>
       <p:sp>
         <p:nvSpPr>
-          <p:cNvPr id="35" name="TextBox 34">
-            <a:extLst>
-              <a:ext uri="{FF2B5EF4-FFF2-40B4-BE49-F238E27FC236}">
-                <a16:creationId xmlns:a16="http://schemas.microsoft.com/office/drawing/2014/main" id="{DF351D3A-F59C-E9A1-40B6-60CFB337F9F9}"/>
+          <p:cNvPr id="6" name="타원 5">
+            <a:extLst>
+              <a:ext uri="{FF2B5EF4-FFF2-40B4-BE49-F238E27FC236}">
+                <a16:creationId xmlns:a16="http://schemas.microsoft.com/office/drawing/2014/main" id="{293B80F9-9A91-937E-00F5-022139AF1FF9}"/>
+              </a:ext>
+            </a:extLst>
+          </p:cNvPr>
+          <p:cNvSpPr/>
+          <p:nvPr/>
+        </p:nvSpPr>
+        <p:spPr>
+          <a:xfrm>
+            <a:off x="9339559" y="2582615"/>
+            <a:ext cx="311386" cy="1195644"/>
+          </a:xfrm>
+          <a:prstGeom prst="ellipse">
+            <a:avLst/>
+          </a:prstGeom>
+          <a:noFill/>
+        </p:spPr>
+        <p:style>
+          <a:lnRef idx="2">
+            <a:schemeClr val="accent1">
+              <a:shade val="15000"/>
+            </a:schemeClr>
+          </a:lnRef>
+          <a:fillRef idx="1">
+            <a:schemeClr val="accent1"/>
+          </a:fillRef>
+          <a:effectRef idx="0">
+            <a:schemeClr val="accent1"/>
+          </a:effectRef>
+          <a:fontRef idx="minor">
+            <a:schemeClr val="lt1"/>
+          </a:fontRef>
+        </p:style>
+        <p:txBody>
+          <a:bodyPr rtlCol="0" anchor="ctr"/>
+          <a:lstStyle/>
+          <a:p>
+            <a:pPr algn="ctr"/>
+            <a:endParaRPr lang="ko-KR" altLang="en-US"/>
+          </a:p>
+        </p:txBody>
+      </p:sp>
+      <p:sp>
+        <p:nvSpPr>
+          <p:cNvPr id="24" name="TextBox 23">
+            <a:extLst>
+              <a:ext uri="{FF2B5EF4-FFF2-40B4-BE49-F238E27FC236}">
+                <a16:creationId xmlns:a16="http://schemas.microsoft.com/office/drawing/2014/main" id="{50761CFB-ABAD-9B23-F209-20CC5CDBB6CF}"/>
               </a:ext>
             </a:extLst>
           </p:cNvPr>
@@ -37409,8 +37780,8 @@
         </p:nvSpPr>
         <p:spPr>
           <a:xfrm>
-            <a:off x="7984463" y="2213283"/>
-            <a:ext cx="2138727" cy="369332"/>
+            <a:off x="8749838" y="3867040"/>
+            <a:ext cx="2634054" cy="646331"/>
           </a:xfrm>
           <a:prstGeom prst="rect">
             <a:avLst/>
@@ -37425,101 +37796,22 @@
           <a:p>
             <a:r>
               <a:rPr lang="en-US" altLang="ko-KR" dirty="0"/>
-              <a:t>3</a:t>
-            </a:r>
-            <a:r>
-              <a:rPr lang="ko-KR" altLang="en-US" dirty="0"/>
-              <a:t>글자 </a:t>
-            </a:r>
-            <a:r>
-              <a:rPr lang="en-US" altLang="ko-KR" dirty="0"/>
-              <a:t>= 2 + 1</a:t>
-            </a:r>
-            <a:r>
-              <a:rPr lang="ko-KR" altLang="en-US" dirty="0"/>
-              <a:t>글자</a:t>
+              <a:t>1</a:t>
+            </a:r>
+            <a:r>
+              <a:rPr lang="ko-KR" altLang="en-US" dirty="0"/>
+              <a:t>글자가 일치하는 건</a:t>
             </a:r>
             <a:endParaRPr lang="en-US" altLang="ko-KR" dirty="0"/>
           </a:p>
-        </p:txBody>
-      </p:sp>
-      <p:sp>
-        <p:nvSpPr>
-          <p:cNvPr id="36" name="TextBox 35">
-            <a:extLst>
-              <a:ext uri="{FF2B5EF4-FFF2-40B4-BE49-F238E27FC236}">
-                <a16:creationId xmlns:a16="http://schemas.microsoft.com/office/drawing/2014/main" id="{E3730F4E-476A-5E5D-3A83-EA35B3EACAD4}"/>
-              </a:ext>
-            </a:extLst>
-          </p:cNvPr>
-          <p:cNvSpPr txBox="1"/>
-          <p:nvPr/>
-        </p:nvSpPr>
-        <p:spPr>
-          <a:xfrm>
-            <a:off x="9344315" y="2710409"/>
-            <a:ext cx="336952" cy="369332"/>
-          </a:xfrm>
-          <a:prstGeom prst="rect">
-            <a:avLst/>
-          </a:prstGeom>
-          <a:noFill/>
-          <a:ln>
-            <a:solidFill>
-              <a:schemeClr val="tx1"/>
-            </a:solidFill>
-          </a:ln>
-        </p:spPr>
-        <p:txBody>
-          <a:bodyPr wrap="none" rtlCol="0">
-            <a:spAutoFit/>
-          </a:bodyPr>
-          <a:lstStyle/>
-          <a:p>
-            <a:r>
-              <a:rPr lang="en-US" altLang="ko-KR" dirty="0"/>
-              <a:t>A</a:t>
-            </a:r>
-            <a:endParaRPr lang="ko-KR" altLang="en-US" dirty="0"/>
-          </a:p>
-        </p:txBody>
-      </p:sp>
-      <p:sp>
-        <p:nvSpPr>
-          <p:cNvPr id="37" name="TextBox 36">
-            <a:extLst>
-              <a:ext uri="{FF2B5EF4-FFF2-40B4-BE49-F238E27FC236}">
-                <a16:creationId xmlns:a16="http://schemas.microsoft.com/office/drawing/2014/main" id="{98C93601-3083-BD62-3DFA-3D74606D94D0}"/>
-              </a:ext>
-            </a:extLst>
-          </p:cNvPr>
-          <p:cNvSpPr txBox="1"/>
-          <p:nvPr/>
-        </p:nvSpPr>
-        <p:spPr>
-          <a:xfrm>
-            <a:off x="9572131" y="3145614"/>
-            <a:ext cx="336952" cy="369332"/>
-          </a:xfrm>
-          <a:prstGeom prst="rect">
-            <a:avLst/>
-          </a:prstGeom>
-          <a:noFill/>
-          <a:ln>
-            <a:solidFill>
-              <a:schemeClr val="tx1"/>
-            </a:solidFill>
-          </a:ln>
-        </p:spPr>
-        <p:txBody>
-          <a:bodyPr wrap="none" rtlCol="0">
-            <a:spAutoFit/>
-          </a:bodyPr>
-          <a:lstStyle/>
-          <a:p>
-            <a:r>
-              <a:rPr lang="en-US" altLang="ko-KR" dirty="0"/>
-              <a:t>A</a:t>
+          <a:p>
+            <a:r>
+              <a:rPr lang="ko-KR" altLang="en-US" dirty="0"/>
+              <a:t>자기 자신이므로 그냥 </a:t>
+            </a:r>
+            <a:r>
+              <a:rPr lang="en-US" altLang="ko-KR" dirty="0"/>
+              <a:t>0</a:t>
             </a:r>
             <a:endParaRPr lang="ko-KR" altLang="en-US" dirty="0"/>
           </a:p>
@@ -37528,7 +37820,7 @@
     </p:spTree>
     <p:extLst>
       <p:ext uri="{BB962C8B-B14F-4D97-AF65-F5344CB8AC3E}">
-        <p14:creationId xmlns:p14="http://schemas.microsoft.com/office/powerpoint/2010/main" val="1751841650"/>
+        <p14:creationId xmlns:p14="http://schemas.microsoft.com/office/powerpoint/2010/main" val="3811410687"/>
       </p:ext>
     </p:extLst>
   </p:cSld>
@@ -37539,6 +37831,1153 @@
 </file>
 
 <file path=ppt/slides/slide67.xml><?xml version="1.0" encoding="utf-8"?>
+<p:sld xmlns:a="http://schemas.openxmlformats.org/drawingml/2006/main" xmlns:r="http://schemas.openxmlformats.org/officeDocument/2006/relationships" xmlns:p="http://schemas.openxmlformats.org/presentationml/2006/main">
+  <p:cSld>
+    <p:spTree>
+      <p:nvGrpSpPr>
+        <p:cNvPr id="1" name="">
+          <a:extLst>
+            <a:ext uri="{FF2B5EF4-FFF2-40B4-BE49-F238E27FC236}">
+              <a16:creationId xmlns:a16="http://schemas.microsoft.com/office/drawing/2014/main" id="{D3EDCE35-AADF-122B-61F7-B7FA6E31220D}"/>
+            </a:ext>
+          </a:extLst>
+        </p:cNvPr>
+        <p:cNvGrpSpPr/>
+        <p:nvPr/>
+      </p:nvGrpSpPr>
+      <p:grpSpPr>
+        <a:xfrm>
+          <a:off x="0" y="0"/>
+          <a:ext cx="0" cy="0"/>
+          <a:chOff x="0" y="0"/>
+          <a:chExt cx="0" cy="0"/>
+        </a:xfrm>
+      </p:grpSpPr>
+      <p:sp>
+        <p:nvSpPr>
+          <p:cNvPr id="2" name="제목 1">
+            <a:extLst>
+              <a:ext uri="{FF2B5EF4-FFF2-40B4-BE49-F238E27FC236}">
+                <a16:creationId xmlns:a16="http://schemas.microsoft.com/office/drawing/2014/main" id="{4CDFD821-197D-8583-461E-4EC86BA48F13}"/>
+              </a:ext>
+            </a:extLst>
+          </p:cNvPr>
+          <p:cNvSpPr>
+            <a:spLocks noGrp="1"/>
+          </p:cNvSpPr>
+          <p:nvPr>
+            <p:ph type="title"/>
+          </p:nvPr>
+        </p:nvSpPr>
+        <p:spPr/>
+        <p:txBody>
+          <a:bodyPr/>
+          <a:lstStyle/>
+          <a:p>
+            <a:r>
+              <a:rPr lang="en-US" altLang="ko-KR" dirty="0"/>
+              <a:t>0x02 KMP</a:t>
+            </a:r>
+            <a:endParaRPr lang="ko-KR" altLang="en-US" dirty="0"/>
+          </a:p>
+        </p:txBody>
+      </p:sp>
+      <p:sp>
+        <p:nvSpPr>
+          <p:cNvPr id="3" name="내용 개체 틀 2">
+            <a:extLst>
+              <a:ext uri="{FF2B5EF4-FFF2-40B4-BE49-F238E27FC236}">
+                <a16:creationId xmlns:a16="http://schemas.microsoft.com/office/drawing/2014/main" id="{722D4609-5964-2974-4B62-50D205FDEF97}"/>
+              </a:ext>
+            </a:extLst>
+          </p:cNvPr>
+          <p:cNvSpPr>
+            <a:spLocks noGrp="1"/>
+          </p:cNvSpPr>
+          <p:nvPr>
+            <p:ph idx="1"/>
+          </p:nvPr>
+        </p:nvSpPr>
+        <p:spPr/>
+        <p:txBody>
+          <a:bodyPr/>
+          <a:lstStyle/>
+          <a:p>
+            <a:r>
+              <a:rPr lang="ko-KR" altLang="en-US" dirty="0"/>
+              <a:t>이제 진짜 </a:t>
+            </a:r>
+            <a:r>
+              <a:rPr lang="en-US" altLang="ko-KR" dirty="0"/>
+              <a:t>KMP</a:t>
+            </a:r>
+            <a:r>
+              <a:rPr lang="ko-KR" altLang="en-US" dirty="0"/>
+              <a:t>를 이해해보자</a:t>
+            </a:r>
+            <a:r>
+              <a:rPr lang="en-US" altLang="ko-KR" dirty="0"/>
+              <a:t>.</a:t>
+            </a:r>
+            <a:r>
+              <a:rPr lang="ko-KR" altLang="en-US" dirty="0"/>
+              <a:t>👊🏻</a:t>
+            </a:r>
+            <a:endParaRPr lang="en-US" altLang="ko-KR" dirty="0"/>
+          </a:p>
+          <a:p>
+            <a:r>
+              <a:rPr lang="en-US" altLang="ko-KR" dirty="0"/>
+              <a:t>A</a:t>
+            </a:r>
+          </a:p>
+          <a:p>
+            <a:r>
+              <a:rPr lang="en-US" altLang="ko-KR" dirty="0"/>
+              <a:t>B</a:t>
+            </a:r>
+          </a:p>
+          <a:p>
+            <a:r>
+              <a:rPr lang="ko-KR" altLang="en-US" dirty="0"/>
+              <a:t>실패함수 복습해보면</a:t>
+            </a:r>
+            <a:endParaRPr lang="en-US" altLang="ko-KR" dirty="0"/>
+          </a:p>
+          <a:p>
+            <a:endParaRPr lang="en-US" altLang="ko-KR" dirty="0"/>
+          </a:p>
+          <a:p>
+            <a:endParaRPr lang="en-US" altLang="ko-KR" dirty="0"/>
+          </a:p>
+          <a:p>
+            <a:endParaRPr lang="en-US" altLang="ko-KR" dirty="0"/>
+          </a:p>
+          <a:p>
+            <a:pPr marL="0" indent="0">
+              <a:buNone/>
+            </a:pPr>
+            <a:r>
+              <a:rPr lang="en-US" altLang="ko-KR" dirty="0"/>
+              <a:t> F(1)=0  F(2)=1  F(3)=2   F(4)=3         F(5)=0       …</a:t>
+            </a:r>
+          </a:p>
+        </p:txBody>
+      </p:sp>
+      <p:sp>
+        <p:nvSpPr>
+          <p:cNvPr id="4" name="TextBox 3">
+            <a:extLst>
+              <a:ext uri="{FF2B5EF4-FFF2-40B4-BE49-F238E27FC236}">
+                <a16:creationId xmlns:a16="http://schemas.microsoft.com/office/drawing/2014/main" id="{D8632D00-15A0-7D7D-F032-C8D8A57FE6CB}"/>
+              </a:ext>
+            </a:extLst>
+          </p:cNvPr>
+          <p:cNvSpPr txBox="1"/>
+          <p:nvPr/>
+        </p:nvSpPr>
+        <p:spPr>
+          <a:xfrm>
+            <a:off x="2912883" y="2404989"/>
+            <a:ext cx="4310795" cy="369332"/>
+          </a:xfrm>
+          <a:prstGeom prst="rect">
+            <a:avLst/>
+          </a:prstGeom>
+          <a:noFill/>
+          <a:ln>
+            <a:solidFill>
+              <a:schemeClr val="tx1"/>
+            </a:solidFill>
+          </a:ln>
+        </p:spPr>
+        <p:txBody>
+          <a:bodyPr wrap="none" rtlCol="0">
+            <a:spAutoFit/>
+          </a:bodyPr>
+          <a:lstStyle/>
+          <a:p>
+            <a:r>
+              <a:rPr lang="en-US" altLang="ko-KR" dirty="0"/>
+              <a:t>A B A B A B A D A B A B A C A B A D</a:t>
+            </a:r>
+            <a:endParaRPr lang="ko-KR" altLang="en-US" dirty="0"/>
+          </a:p>
+        </p:txBody>
+      </p:sp>
+      <p:sp>
+        <p:nvSpPr>
+          <p:cNvPr id="5" name="TextBox 4">
+            <a:extLst>
+              <a:ext uri="{FF2B5EF4-FFF2-40B4-BE49-F238E27FC236}">
+                <a16:creationId xmlns:a16="http://schemas.microsoft.com/office/drawing/2014/main" id="{421D0B79-B289-C20D-1CCD-AC57BC1150F8}"/>
+              </a:ext>
+            </a:extLst>
+          </p:cNvPr>
+          <p:cNvSpPr txBox="1"/>
+          <p:nvPr/>
+        </p:nvSpPr>
+        <p:spPr>
+          <a:xfrm>
+            <a:off x="2912883" y="2909258"/>
+            <a:ext cx="2149948" cy="369332"/>
+          </a:xfrm>
+          <a:prstGeom prst="rect">
+            <a:avLst/>
+          </a:prstGeom>
+          <a:noFill/>
+          <a:ln>
+            <a:solidFill>
+              <a:schemeClr val="tx1"/>
+            </a:solidFill>
+          </a:ln>
+        </p:spPr>
+        <p:txBody>
+          <a:bodyPr wrap="none" rtlCol="0">
+            <a:spAutoFit/>
+          </a:bodyPr>
+          <a:lstStyle/>
+          <a:p>
+            <a:r>
+              <a:rPr lang="en-US" altLang="ko-KR" dirty="0"/>
+              <a:t>A B A B A C A B A</a:t>
+            </a:r>
+            <a:endParaRPr lang="ko-KR" altLang="en-US" dirty="0"/>
+          </a:p>
+        </p:txBody>
+      </p:sp>
+      <p:sp>
+        <p:nvSpPr>
+          <p:cNvPr id="7" name="TextBox 6">
+            <a:extLst>
+              <a:ext uri="{FF2B5EF4-FFF2-40B4-BE49-F238E27FC236}">
+                <a16:creationId xmlns:a16="http://schemas.microsoft.com/office/drawing/2014/main" id="{5839C747-0F7C-14B9-23B4-C28246F98553}"/>
+              </a:ext>
+            </a:extLst>
+          </p:cNvPr>
+          <p:cNvSpPr txBox="1"/>
+          <p:nvPr/>
+        </p:nvSpPr>
+        <p:spPr>
+          <a:xfrm>
+            <a:off x="838200" y="4290976"/>
+            <a:ext cx="553357" cy="369332"/>
+          </a:xfrm>
+          <a:prstGeom prst="rect">
+            <a:avLst/>
+          </a:prstGeom>
+          <a:noFill/>
+          <a:ln>
+            <a:solidFill>
+              <a:schemeClr val="tx1"/>
+            </a:solidFill>
+          </a:ln>
+        </p:spPr>
+        <p:txBody>
+          <a:bodyPr wrap="none" rtlCol="0">
+            <a:spAutoFit/>
+          </a:bodyPr>
+          <a:lstStyle/>
+          <a:p>
+            <a:r>
+              <a:rPr lang="en-US" altLang="ko-KR" dirty="0"/>
+              <a:t>A B</a:t>
+            </a:r>
+            <a:endParaRPr lang="ko-KR" altLang="en-US" dirty="0"/>
+          </a:p>
+        </p:txBody>
+      </p:sp>
+      <p:sp>
+        <p:nvSpPr>
+          <p:cNvPr id="8" name="TextBox 7">
+            <a:extLst>
+              <a:ext uri="{FF2B5EF4-FFF2-40B4-BE49-F238E27FC236}">
+                <a16:creationId xmlns:a16="http://schemas.microsoft.com/office/drawing/2014/main" id="{3C97B675-5166-1F35-F23C-335E5F0E1B58}"/>
+              </a:ext>
+            </a:extLst>
+          </p:cNvPr>
+          <p:cNvSpPr txBox="1"/>
+          <p:nvPr/>
+        </p:nvSpPr>
+        <p:spPr>
+          <a:xfrm>
+            <a:off x="1084869" y="4726181"/>
+            <a:ext cx="553357" cy="369332"/>
+          </a:xfrm>
+          <a:prstGeom prst="rect">
+            <a:avLst/>
+          </a:prstGeom>
+          <a:noFill/>
+          <a:ln>
+            <a:solidFill>
+              <a:schemeClr val="tx1"/>
+            </a:solidFill>
+          </a:ln>
+        </p:spPr>
+        <p:txBody>
+          <a:bodyPr wrap="none" rtlCol="0">
+            <a:spAutoFit/>
+          </a:bodyPr>
+          <a:lstStyle/>
+          <a:p>
+            <a:r>
+              <a:rPr lang="en-US" altLang="ko-KR" dirty="0"/>
+              <a:t>A B</a:t>
+            </a:r>
+            <a:endParaRPr lang="ko-KR" altLang="en-US" dirty="0"/>
+          </a:p>
+        </p:txBody>
+      </p:sp>
+      <p:sp>
+        <p:nvSpPr>
+          <p:cNvPr id="9" name="TextBox 8">
+            <a:extLst>
+              <a:ext uri="{FF2B5EF4-FFF2-40B4-BE49-F238E27FC236}">
+                <a16:creationId xmlns:a16="http://schemas.microsoft.com/office/drawing/2014/main" id="{ED9456B6-7651-614C-58BE-583A1E051FFB}"/>
+              </a:ext>
+            </a:extLst>
+          </p:cNvPr>
+          <p:cNvSpPr txBox="1"/>
+          <p:nvPr/>
+        </p:nvSpPr>
+        <p:spPr>
+          <a:xfrm>
+            <a:off x="1754170" y="4283119"/>
+            <a:ext cx="787395" cy="369332"/>
+          </a:xfrm>
+          <a:prstGeom prst="rect">
+            <a:avLst/>
+          </a:prstGeom>
+          <a:noFill/>
+          <a:ln>
+            <a:solidFill>
+              <a:schemeClr val="tx1"/>
+            </a:solidFill>
+          </a:ln>
+        </p:spPr>
+        <p:txBody>
+          <a:bodyPr wrap="none" rtlCol="0">
+            <a:spAutoFit/>
+          </a:bodyPr>
+          <a:lstStyle/>
+          <a:p>
+            <a:r>
+              <a:rPr lang="en-US" altLang="ko-KR" dirty="0"/>
+              <a:t>A B A</a:t>
+            </a:r>
+            <a:endParaRPr lang="ko-KR" altLang="en-US" dirty="0"/>
+          </a:p>
+        </p:txBody>
+      </p:sp>
+      <p:sp>
+        <p:nvSpPr>
+          <p:cNvPr id="10" name="TextBox 9">
+            <a:extLst>
+              <a:ext uri="{FF2B5EF4-FFF2-40B4-BE49-F238E27FC236}">
+                <a16:creationId xmlns:a16="http://schemas.microsoft.com/office/drawing/2014/main" id="{7B269D72-B2FF-AA55-0AE1-DBABC9421C6B}"/>
+              </a:ext>
+            </a:extLst>
+          </p:cNvPr>
+          <p:cNvSpPr txBox="1"/>
+          <p:nvPr/>
+        </p:nvSpPr>
+        <p:spPr>
+          <a:xfrm>
+            <a:off x="2208229" y="4718324"/>
+            <a:ext cx="787395" cy="369332"/>
+          </a:xfrm>
+          <a:prstGeom prst="rect">
+            <a:avLst/>
+          </a:prstGeom>
+          <a:noFill/>
+          <a:ln>
+            <a:solidFill>
+              <a:schemeClr val="tx1"/>
+            </a:solidFill>
+          </a:ln>
+        </p:spPr>
+        <p:txBody>
+          <a:bodyPr wrap="none" rtlCol="0">
+            <a:spAutoFit/>
+          </a:bodyPr>
+          <a:lstStyle/>
+          <a:p>
+            <a:r>
+              <a:rPr lang="en-US" altLang="ko-KR" dirty="0"/>
+              <a:t>A B A</a:t>
+            </a:r>
+            <a:endParaRPr lang="ko-KR" altLang="en-US" dirty="0"/>
+          </a:p>
+        </p:txBody>
+      </p:sp>
+      <p:sp>
+        <p:nvSpPr>
+          <p:cNvPr id="11" name="TextBox 10">
+            <a:extLst>
+              <a:ext uri="{FF2B5EF4-FFF2-40B4-BE49-F238E27FC236}">
+                <a16:creationId xmlns:a16="http://schemas.microsoft.com/office/drawing/2014/main" id="{4A89AE74-9051-7B72-9EF2-28950E5E5A18}"/>
+              </a:ext>
+            </a:extLst>
+          </p:cNvPr>
+          <p:cNvSpPr txBox="1"/>
+          <p:nvPr/>
+        </p:nvSpPr>
+        <p:spPr>
+          <a:xfrm>
+            <a:off x="3169765" y="4284687"/>
+            <a:ext cx="787395" cy="369332"/>
+          </a:xfrm>
+          <a:prstGeom prst="rect">
+            <a:avLst/>
+          </a:prstGeom>
+          <a:noFill/>
+          <a:ln>
+            <a:solidFill>
+              <a:schemeClr val="tx1"/>
+            </a:solidFill>
+          </a:ln>
+        </p:spPr>
+        <p:txBody>
+          <a:bodyPr wrap="none" rtlCol="0">
+            <a:spAutoFit/>
+          </a:bodyPr>
+          <a:lstStyle/>
+          <a:p>
+            <a:r>
+              <a:rPr lang="en-US" altLang="ko-KR" dirty="0"/>
+              <a:t>A B A</a:t>
+            </a:r>
+            <a:endParaRPr lang="ko-KR" altLang="en-US" dirty="0"/>
+          </a:p>
+        </p:txBody>
+      </p:sp>
+      <p:sp>
+        <p:nvSpPr>
+          <p:cNvPr id="12" name="TextBox 11">
+            <a:extLst>
+              <a:ext uri="{FF2B5EF4-FFF2-40B4-BE49-F238E27FC236}">
+                <a16:creationId xmlns:a16="http://schemas.microsoft.com/office/drawing/2014/main" id="{FB10DACD-1BBC-24A9-2121-2548D9EBCE74}"/>
+              </a:ext>
+            </a:extLst>
+          </p:cNvPr>
+          <p:cNvSpPr txBox="1"/>
+          <p:nvPr/>
+        </p:nvSpPr>
+        <p:spPr>
+          <a:xfrm>
+            <a:off x="3623824" y="4719892"/>
+            <a:ext cx="787395" cy="369332"/>
+          </a:xfrm>
+          <a:prstGeom prst="rect">
+            <a:avLst/>
+          </a:prstGeom>
+          <a:noFill/>
+          <a:ln>
+            <a:solidFill>
+              <a:schemeClr val="tx1"/>
+            </a:solidFill>
+          </a:ln>
+        </p:spPr>
+        <p:txBody>
+          <a:bodyPr wrap="none" rtlCol="0">
+            <a:spAutoFit/>
+          </a:bodyPr>
+          <a:lstStyle/>
+          <a:p>
+            <a:r>
+              <a:rPr lang="en-US" altLang="ko-KR" dirty="0"/>
+              <a:t>A B A</a:t>
+            </a:r>
+            <a:endParaRPr lang="ko-KR" altLang="en-US" dirty="0"/>
+          </a:p>
+        </p:txBody>
+      </p:sp>
+      <p:sp>
+        <p:nvSpPr>
+          <p:cNvPr id="13" name="TextBox 12">
+            <a:extLst>
+              <a:ext uri="{FF2B5EF4-FFF2-40B4-BE49-F238E27FC236}">
+                <a16:creationId xmlns:a16="http://schemas.microsoft.com/office/drawing/2014/main" id="{48B5DBE8-4770-0510-FEB9-A0B47F290F6D}"/>
+              </a:ext>
+            </a:extLst>
+          </p:cNvPr>
+          <p:cNvSpPr txBox="1"/>
+          <p:nvPr/>
+        </p:nvSpPr>
+        <p:spPr>
+          <a:xfrm>
+            <a:off x="3865771" y="4292546"/>
+            <a:ext cx="319318" cy="369332"/>
+          </a:xfrm>
+          <a:prstGeom prst="rect">
+            <a:avLst/>
+          </a:prstGeom>
+          <a:noFill/>
+          <a:ln>
+            <a:solidFill>
+              <a:schemeClr val="tx1"/>
+            </a:solidFill>
+          </a:ln>
+        </p:spPr>
+        <p:txBody>
+          <a:bodyPr wrap="none" rtlCol="0">
+            <a:spAutoFit/>
+          </a:bodyPr>
+          <a:lstStyle/>
+          <a:p>
+            <a:r>
+              <a:rPr lang="en-US" altLang="ko-KR" dirty="0"/>
+              <a:t>B</a:t>
+            </a:r>
+            <a:endParaRPr lang="ko-KR" altLang="en-US" dirty="0"/>
+          </a:p>
+        </p:txBody>
+      </p:sp>
+      <p:sp>
+        <p:nvSpPr>
+          <p:cNvPr id="14" name="TextBox 13">
+            <a:extLst>
+              <a:ext uri="{FF2B5EF4-FFF2-40B4-BE49-F238E27FC236}">
+                <a16:creationId xmlns:a16="http://schemas.microsoft.com/office/drawing/2014/main" id="{F56AD286-C736-45AB-354C-CF9318E8A95E}"/>
+              </a:ext>
+            </a:extLst>
+          </p:cNvPr>
+          <p:cNvSpPr txBox="1"/>
+          <p:nvPr/>
+        </p:nvSpPr>
+        <p:spPr>
+          <a:xfrm>
+            <a:off x="4319830" y="4718324"/>
+            <a:ext cx="319318" cy="369332"/>
+          </a:xfrm>
+          <a:prstGeom prst="rect">
+            <a:avLst/>
+          </a:prstGeom>
+          <a:noFill/>
+          <a:ln>
+            <a:solidFill>
+              <a:schemeClr val="tx1"/>
+            </a:solidFill>
+          </a:ln>
+        </p:spPr>
+        <p:txBody>
+          <a:bodyPr wrap="none" rtlCol="0">
+            <a:spAutoFit/>
+          </a:bodyPr>
+          <a:lstStyle/>
+          <a:p>
+            <a:r>
+              <a:rPr lang="en-US" altLang="ko-KR" dirty="0"/>
+              <a:t>B</a:t>
+            </a:r>
+            <a:endParaRPr lang="ko-KR" altLang="en-US" dirty="0"/>
+          </a:p>
+        </p:txBody>
+      </p:sp>
+      <p:sp>
+        <p:nvSpPr>
+          <p:cNvPr id="15" name="TextBox 14">
+            <a:extLst>
+              <a:ext uri="{FF2B5EF4-FFF2-40B4-BE49-F238E27FC236}">
+                <a16:creationId xmlns:a16="http://schemas.microsoft.com/office/drawing/2014/main" id="{64691439-35E1-5D32-FBAA-0EC56B9762B4}"/>
+              </a:ext>
+            </a:extLst>
+          </p:cNvPr>
+          <p:cNvSpPr txBox="1"/>
+          <p:nvPr/>
+        </p:nvSpPr>
+        <p:spPr>
+          <a:xfrm>
+            <a:off x="4726762" y="4286258"/>
+            <a:ext cx="1003801" cy="369332"/>
+          </a:xfrm>
+          <a:prstGeom prst="rect">
+            <a:avLst/>
+          </a:prstGeom>
+          <a:noFill/>
+          <a:ln>
+            <a:solidFill>
+              <a:schemeClr val="tx1"/>
+            </a:solidFill>
+          </a:ln>
+        </p:spPr>
+        <p:txBody>
+          <a:bodyPr wrap="none" rtlCol="0">
+            <a:spAutoFit/>
+          </a:bodyPr>
+          <a:lstStyle/>
+          <a:p>
+            <a:r>
+              <a:rPr lang="en-US" altLang="ko-KR" dirty="0"/>
+              <a:t>A B A B</a:t>
+            </a:r>
+            <a:endParaRPr lang="ko-KR" altLang="en-US" dirty="0"/>
+          </a:p>
+        </p:txBody>
+      </p:sp>
+      <p:sp>
+        <p:nvSpPr>
+          <p:cNvPr id="16" name="TextBox 15">
+            <a:extLst>
+              <a:ext uri="{FF2B5EF4-FFF2-40B4-BE49-F238E27FC236}">
+                <a16:creationId xmlns:a16="http://schemas.microsoft.com/office/drawing/2014/main" id="{EEDA38B1-01D3-F09E-99A0-7BB5A4836630}"/>
+              </a:ext>
+            </a:extLst>
+          </p:cNvPr>
+          <p:cNvSpPr txBox="1"/>
+          <p:nvPr/>
+        </p:nvSpPr>
+        <p:spPr>
+          <a:xfrm>
+            <a:off x="5180821" y="4721463"/>
+            <a:ext cx="1003801" cy="369332"/>
+          </a:xfrm>
+          <a:prstGeom prst="rect">
+            <a:avLst/>
+          </a:prstGeom>
+          <a:noFill/>
+          <a:ln>
+            <a:solidFill>
+              <a:schemeClr val="tx1"/>
+            </a:solidFill>
+          </a:ln>
+        </p:spPr>
+        <p:txBody>
+          <a:bodyPr wrap="none" rtlCol="0">
+            <a:spAutoFit/>
+          </a:bodyPr>
+          <a:lstStyle/>
+          <a:p>
+            <a:r>
+              <a:rPr lang="en-US" altLang="ko-KR" dirty="0"/>
+              <a:t>A B A B</a:t>
+            </a:r>
+            <a:endParaRPr lang="ko-KR" altLang="en-US" dirty="0"/>
+          </a:p>
+        </p:txBody>
+      </p:sp>
+      <p:sp>
+        <p:nvSpPr>
+          <p:cNvPr id="17" name="TextBox 16">
+            <a:extLst>
+              <a:ext uri="{FF2B5EF4-FFF2-40B4-BE49-F238E27FC236}">
+                <a16:creationId xmlns:a16="http://schemas.microsoft.com/office/drawing/2014/main" id="{0C6334D0-CA46-C5F1-AD97-42ACC4E30229}"/>
+              </a:ext>
+            </a:extLst>
+          </p:cNvPr>
+          <p:cNvSpPr txBox="1"/>
+          <p:nvPr/>
+        </p:nvSpPr>
+        <p:spPr>
+          <a:xfrm>
+            <a:off x="5630150" y="4284688"/>
+            <a:ext cx="336952" cy="369332"/>
+          </a:xfrm>
+          <a:prstGeom prst="rect">
+            <a:avLst/>
+          </a:prstGeom>
+          <a:noFill/>
+          <a:ln>
+            <a:solidFill>
+              <a:schemeClr val="tx1"/>
+            </a:solidFill>
+          </a:ln>
+        </p:spPr>
+        <p:txBody>
+          <a:bodyPr wrap="none" rtlCol="0">
+            <a:spAutoFit/>
+          </a:bodyPr>
+          <a:lstStyle/>
+          <a:p>
+            <a:r>
+              <a:rPr lang="en-US" altLang="ko-KR" dirty="0"/>
+              <a:t>A</a:t>
+            </a:r>
+            <a:endParaRPr lang="ko-KR" altLang="en-US" dirty="0"/>
+          </a:p>
+        </p:txBody>
+      </p:sp>
+      <p:sp>
+        <p:nvSpPr>
+          <p:cNvPr id="18" name="TextBox 17">
+            <a:extLst>
+              <a:ext uri="{FF2B5EF4-FFF2-40B4-BE49-F238E27FC236}">
+                <a16:creationId xmlns:a16="http://schemas.microsoft.com/office/drawing/2014/main" id="{3DC67B3B-B191-E6F8-7676-8F1934E48C2C}"/>
+              </a:ext>
+            </a:extLst>
+          </p:cNvPr>
+          <p:cNvSpPr txBox="1"/>
+          <p:nvPr/>
+        </p:nvSpPr>
+        <p:spPr>
+          <a:xfrm>
+            <a:off x="6084209" y="4719893"/>
+            <a:ext cx="336952" cy="369332"/>
+          </a:xfrm>
+          <a:prstGeom prst="rect">
+            <a:avLst/>
+          </a:prstGeom>
+          <a:noFill/>
+          <a:ln>
+            <a:solidFill>
+              <a:schemeClr val="tx1"/>
+            </a:solidFill>
+          </a:ln>
+        </p:spPr>
+        <p:txBody>
+          <a:bodyPr wrap="none" rtlCol="0">
+            <a:spAutoFit/>
+          </a:bodyPr>
+          <a:lstStyle/>
+          <a:p>
+            <a:r>
+              <a:rPr lang="en-US" altLang="ko-KR" dirty="0"/>
+              <a:t>A</a:t>
+            </a:r>
+            <a:endParaRPr lang="ko-KR" altLang="en-US" dirty="0"/>
+          </a:p>
+        </p:txBody>
+      </p:sp>
+      <p:sp>
+        <p:nvSpPr>
+          <p:cNvPr id="19" name="TextBox 18">
+            <a:extLst>
+              <a:ext uri="{FF2B5EF4-FFF2-40B4-BE49-F238E27FC236}">
+                <a16:creationId xmlns:a16="http://schemas.microsoft.com/office/drawing/2014/main" id="{1AAEB1C5-08AA-417A-EF91-0EA8B429D191}"/>
+              </a:ext>
+            </a:extLst>
+          </p:cNvPr>
+          <p:cNvSpPr txBox="1"/>
+          <p:nvPr/>
+        </p:nvSpPr>
+        <p:spPr>
+          <a:xfrm>
+            <a:off x="6651398" y="4287828"/>
+            <a:ext cx="1237839" cy="369332"/>
+          </a:xfrm>
+          <a:prstGeom prst="rect">
+            <a:avLst/>
+          </a:prstGeom>
+          <a:noFill/>
+          <a:ln>
+            <a:solidFill>
+              <a:schemeClr val="tx1"/>
+            </a:solidFill>
+          </a:ln>
+        </p:spPr>
+        <p:txBody>
+          <a:bodyPr wrap="none" rtlCol="0">
+            <a:spAutoFit/>
+          </a:bodyPr>
+          <a:lstStyle/>
+          <a:p>
+            <a:r>
+              <a:rPr lang="en-US" altLang="ko-KR" dirty="0"/>
+              <a:t>A B A B A</a:t>
+            </a:r>
+            <a:endParaRPr lang="ko-KR" altLang="en-US" dirty="0"/>
+          </a:p>
+        </p:txBody>
+      </p:sp>
+      <p:sp>
+        <p:nvSpPr>
+          <p:cNvPr id="20" name="TextBox 19">
+            <a:extLst>
+              <a:ext uri="{FF2B5EF4-FFF2-40B4-BE49-F238E27FC236}">
+                <a16:creationId xmlns:a16="http://schemas.microsoft.com/office/drawing/2014/main" id="{50EE2CF8-AB0F-E78D-EFE6-73244F51D5B3}"/>
+              </a:ext>
+            </a:extLst>
+          </p:cNvPr>
+          <p:cNvSpPr txBox="1"/>
+          <p:nvPr/>
+        </p:nvSpPr>
+        <p:spPr>
+          <a:xfrm>
+            <a:off x="7105457" y="4723033"/>
+            <a:ext cx="1237839" cy="369332"/>
+          </a:xfrm>
+          <a:prstGeom prst="rect">
+            <a:avLst/>
+          </a:prstGeom>
+          <a:noFill/>
+          <a:ln>
+            <a:solidFill>
+              <a:schemeClr val="tx1"/>
+            </a:solidFill>
+          </a:ln>
+        </p:spPr>
+        <p:txBody>
+          <a:bodyPr wrap="none" rtlCol="0">
+            <a:spAutoFit/>
+          </a:bodyPr>
+          <a:lstStyle/>
+          <a:p>
+            <a:r>
+              <a:rPr lang="en-US" altLang="ko-KR" dirty="0"/>
+              <a:t>A B A B A</a:t>
+            </a:r>
+            <a:endParaRPr lang="ko-KR" altLang="en-US" dirty="0"/>
+          </a:p>
+        </p:txBody>
+      </p:sp>
+      <p:sp>
+        <p:nvSpPr>
+          <p:cNvPr id="21" name="TextBox 20">
+            <a:extLst>
+              <a:ext uri="{FF2B5EF4-FFF2-40B4-BE49-F238E27FC236}">
+                <a16:creationId xmlns:a16="http://schemas.microsoft.com/office/drawing/2014/main" id="{4ED78BE1-5D44-5193-9ED7-4D6C9E5DFCCB}"/>
+              </a:ext>
+            </a:extLst>
+          </p:cNvPr>
+          <p:cNvSpPr txBox="1"/>
+          <p:nvPr/>
+        </p:nvSpPr>
+        <p:spPr>
+          <a:xfrm>
+            <a:off x="7798320" y="4284688"/>
+            <a:ext cx="330540" cy="369332"/>
+          </a:xfrm>
+          <a:prstGeom prst="rect">
+            <a:avLst/>
+          </a:prstGeom>
+          <a:noFill/>
+          <a:ln>
+            <a:solidFill>
+              <a:schemeClr val="tx1"/>
+            </a:solidFill>
+          </a:ln>
+        </p:spPr>
+        <p:txBody>
+          <a:bodyPr wrap="none" rtlCol="0">
+            <a:spAutoFit/>
+          </a:bodyPr>
+          <a:lstStyle/>
+          <a:p>
+            <a:r>
+              <a:rPr lang="en-US" altLang="ko-KR" dirty="0"/>
+              <a:t>C</a:t>
+            </a:r>
+            <a:endParaRPr lang="ko-KR" altLang="en-US" dirty="0"/>
+          </a:p>
+        </p:txBody>
+      </p:sp>
+      <p:sp>
+        <p:nvSpPr>
+          <p:cNvPr id="22" name="TextBox 21">
+            <a:extLst>
+              <a:ext uri="{FF2B5EF4-FFF2-40B4-BE49-F238E27FC236}">
+                <a16:creationId xmlns:a16="http://schemas.microsoft.com/office/drawing/2014/main" id="{BA865083-A239-0A65-6D78-50ECC3F77753}"/>
+              </a:ext>
+            </a:extLst>
+          </p:cNvPr>
+          <p:cNvSpPr txBox="1"/>
+          <p:nvPr/>
+        </p:nvSpPr>
+        <p:spPr>
+          <a:xfrm>
+            <a:off x="8252379" y="4719893"/>
+            <a:ext cx="330540" cy="369332"/>
+          </a:xfrm>
+          <a:prstGeom prst="rect">
+            <a:avLst/>
+          </a:prstGeom>
+          <a:noFill/>
+          <a:ln>
+            <a:solidFill>
+              <a:schemeClr val="tx1"/>
+            </a:solidFill>
+          </a:ln>
+        </p:spPr>
+        <p:txBody>
+          <a:bodyPr wrap="none" rtlCol="0">
+            <a:spAutoFit/>
+          </a:bodyPr>
+          <a:lstStyle/>
+          <a:p>
+            <a:r>
+              <a:rPr lang="en-US" altLang="ko-KR" dirty="0"/>
+              <a:t>C</a:t>
+            </a:r>
+            <a:endParaRPr lang="ko-KR" altLang="en-US" dirty="0"/>
+          </a:p>
+        </p:txBody>
+      </p:sp>
+      <p:cxnSp>
+        <p:nvCxnSpPr>
+          <p:cNvPr id="27" name="연결선: 구부러짐 26">
+            <a:extLst>
+              <a:ext uri="{FF2B5EF4-FFF2-40B4-BE49-F238E27FC236}">
+                <a16:creationId xmlns:a16="http://schemas.microsoft.com/office/drawing/2014/main" id="{E6431DD6-BAB1-E0CD-76DC-D75E2E15C73A}"/>
+              </a:ext>
+            </a:extLst>
+          </p:cNvPr>
+          <p:cNvCxnSpPr>
+            <a:cxnSpLocks/>
+            <a:stCxn id="19" idx="0"/>
+          </p:cNvCxnSpPr>
+          <p:nvPr/>
+        </p:nvCxnSpPr>
+        <p:spPr>
+          <a:xfrm rot="5400000" flipH="1" flipV="1">
+            <a:off x="7299169" y="2880407"/>
+            <a:ext cx="1378570" cy="1436272"/>
+          </a:xfrm>
+          <a:prstGeom prst="curvedConnector2">
+            <a:avLst/>
+          </a:prstGeom>
+          <a:ln>
+            <a:tailEnd type="triangle"/>
+          </a:ln>
+        </p:spPr>
+        <p:style>
+          <a:lnRef idx="2">
+            <a:schemeClr val="accent1"/>
+          </a:lnRef>
+          <a:fillRef idx="0">
+            <a:schemeClr val="accent1"/>
+          </a:fillRef>
+          <a:effectRef idx="1">
+            <a:schemeClr val="accent1"/>
+          </a:effectRef>
+          <a:fontRef idx="minor">
+            <a:schemeClr val="tx1"/>
+          </a:fontRef>
+        </p:style>
+      </p:cxnSp>
+      <p:sp>
+        <p:nvSpPr>
+          <p:cNvPr id="32" name="TextBox 31">
+            <a:extLst>
+              <a:ext uri="{FF2B5EF4-FFF2-40B4-BE49-F238E27FC236}">
+                <a16:creationId xmlns:a16="http://schemas.microsoft.com/office/drawing/2014/main" id="{E815C469-7149-A22A-6223-CE7517772A55}"/>
+              </a:ext>
+            </a:extLst>
+          </p:cNvPr>
+          <p:cNvSpPr txBox="1"/>
+          <p:nvPr/>
+        </p:nvSpPr>
+        <p:spPr>
+          <a:xfrm>
+            <a:off x="8863550" y="2710410"/>
+            <a:ext cx="787395" cy="369332"/>
+          </a:xfrm>
+          <a:prstGeom prst="rect">
+            <a:avLst/>
+          </a:prstGeom>
+          <a:noFill/>
+          <a:ln>
+            <a:solidFill>
+              <a:schemeClr val="tx1"/>
+            </a:solidFill>
+          </a:ln>
+        </p:spPr>
+        <p:txBody>
+          <a:bodyPr wrap="none" rtlCol="0">
+            <a:spAutoFit/>
+          </a:bodyPr>
+          <a:lstStyle/>
+          <a:p>
+            <a:r>
+              <a:rPr lang="en-US" altLang="ko-KR" dirty="0"/>
+              <a:t>A B A</a:t>
+            </a:r>
+            <a:endParaRPr lang="ko-KR" altLang="en-US" dirty="0"/>
+          </a:p>
+        </p:txBody>
+      </p:sp>
+      <p:sp>
+        <p:nvSpPr>
+          <p:cNvPr id="33" name="TextBox 32">
+            <a:extLst>
+              <a:ext uri="{FF2B5EF4-FFF2-40B4-BE49-F238E27FC236}">
+                <a16:creationId xmlns:a16="http://schemas.microsoft.com/office/drawing/2014/main" id="{CBB6E02A-B5C1-C6A3-9821-5A85FE55521B}"/>
+              </a:ext>
+            </a:extLst>
+          </p:cNvPr>
+          <p:cNvSpPr txBox="1"/>
+          <p:nvPr/>
+        </p:nvSpPr>
+        <p:spPr>
+          <a:xfrm>
+            <a:off x="9339559" y="3145615"/>
+            <a:ext cx="800219" cy="369332"/>
+          </a:xfrm>
+          <a:prstGeom prst="rect">
+            <a:avLst/>
+          </a:prstGeom>
+          <a:noFill/>
+          <a:ln>
+            <a:solidFill>
+              <a:schemeClr val="tx1"/>
+            </a:solidFill>
+          </a:ln>
+        </p:spPr>
+        <p:txBody>
+          <a:bodyPr wrap="none" rtlCol="0">
+            <a:spAutoFit/>
+          </a:bodyPr>
+          <a:lstStyle/>
+          <a:p>
+            <a:r>
+              <a:rPr lang="en-US" altLang="ko-KR" dirty="0"/>
+              <a:t>A B A</a:t>
+            </a:r>
+            <a:endParaRPr lang="ko-KR" altLang="en-US" dirty="0"/>
+          </a:p>
+        </p:txBody>
+      </p:sp>
+      <p:sp>
+        <p:nvSpPr>
+          <p:cNvPr id="34" name="TextBox 33">
+            <a:extLst>
+              <a:ext uri="{FF2B5EF4-FFF2-40B4-BE49-F238E27FC236}">
+                <a16:creationId xmlns:a16="http://schemas.microsoft.com/office/drawing/2014/main" id="{9FE31E49-36EC-C92F-4A5E-C64A27F45A81}"/>
+              </a:ext>
+            </a:extLst>
+          </p:cNvPr>
+          <p:cNvSpPr txBox="1"/>
+          <p:nvPr/>
+        </p:nvSpPr>
+        <p:spPr>
+          <a:xfrm>
+            <a:off x="5967102" y="3467373"/>
+            <a:ext cx="2864887" cy="369332"/>
+          </a:xfrm>
+          <a:prstGeom prst="rect">
+            <a:avLst/>
+          </a:prstGeom>
+          <a:noFill/>
+        </p:spPr>
+        <p:txBody>
+          <a:bodyPr wrap="none" rtlCol="0">
+            <a:spAutoFit/>
+          </a:bodyPr>
+          <a:lstStyle/>
+          <a:p>
+            <a:r>
+              <a:rPr lang="en-US" altLang="ko-KR" dirty="0"/>
+              <a:t>3</a:t>
+            </a:r>
+            <a:r>
+              <a:rPr lang="ko-KR" altLang="en-US" dirty="0"/>
+              <a:t>글자가 일치하는 걸 이용</a:t>
+            </a:r>
+            <a:endParaRPr lang="en-US" altLang="ko-KR" dirty="0"/>
+          </a:p>
+        </p:txBody>
+      </p:sp>
+      <p:sp>
+        <p:nvSpPr>
+          <p:cNvPr id="6" name="타원 5">
+            <a:extLst>
+              <a:ext uri="{FF2B5EF4-FFF2-40B4-BE49-F238E27FC236}">
+                <a16:creationId xmlns:a16="http://schemas.microsoft.com/office/drawing/2014/main" id="{E7009CEE-BD7A-624B-B890-27B2485950FB}"/>
+              </a:ext>
+            </a:extLst>
+          </p:cNvPr>
+          <p:cNvSpPr/>
+          <p:nvPr/>
+        </p:nvSpPr>
+        <p:spPr>
+          <a:xfrm>
+            <a:off x="9339559" y="2582615"/>
+            <a:ext cx="311386" cy="1195644"/>
+          </a:xfrm>
+          <a:prstGeom prst="ellipse">
+            <a:avLst/>
+          </a:prstGeom>
+          <a:noFill/>
+        </p:spPr>
+        <p:style>
+          <a:lnRef idx="2">
+            <a:schemeClr val="accent1">
+              <a:shade val="15000"/>
+            </a:schemeClr>
+          </a:lnRef>
+          <a:fillRef idx="1">
+            <a:schemeClr val="accent1"/>
+          </a:fillRef>
+          <a:effectRef idx="0">
+            <a:schemeClr val="accent1"/>
+          </a:effectRef>
+          <a:fontRef idx="minor">
+            <a:schemeClr val="lt1"/>
+          </a:fontRef>
+        </p:style>
+        <p:txBody>
+          <a:bodyPr rtlCol="0" anchor="ctr"/>
+          <a:lstStyle/>
+          <a:p>
+            <a:pPr algn="ctr"/>
+            <a:endParaRPr lang="ko-KR" altLang="en-US"/>
+          </a:p>
+        </p:txBody>
+      </p:sp>
+      <p:sp>
+        <p:nvSpPr>
+          <p:cNvPr id="24" name="TextBox 23">
+            <a:extLst>
+              <a:ext uri="{FF2B5EF4-FFF2-40B4-BE49-F238E27FC236}">
+                <a16:creationId xmlns:a16="http://schemas.microsoft.com/office/drawing/2014/main" id="{4FD7DD86-FA90-0FED-B63E-FB7564AB8B7D}"/>
+              </a:ext>
+            </a:extLst>
+          </p:cNvPr>
+          <p:cNvSpPr txBox="1"/>
+          <p:nvPr/>
+        </p:nvSpPr>
+        <p:spPr>
+          <a:xfrm>
+            <a:off x="8749838" y="3867040"/>
+            <a:ext cx="2634054" cy="646331"/>
+          </a:xfrm>
+          <a:prstGeom prst="rect">
+            <a:avLst/>
+          </a:prstGeom>
+          <a:noFill/>
+        </p:spPr>
+        <p:txBody>
+          <a:bodyPr wrap="none" rtlCol="0">
+            <a:spAutoFit/>
+          </a:bodyPr>
+          <a:lstStyle/>
+          <a:p>
+            <a:r>
+              <a:rPr lang="en-US" altLang="ko-KR" dirty="0"/>
+              <a:t>1</a:t>
+            </a:r>
+            <a:r>
+              <a:rPr lang="ko-KR" altLang="en-US" dirty="0"/>
+              <a:t>글자가 일치하는 건</a:t>
+            </a:r>
+            <a:endParaRPr lang="en-US" altLang="ko-KR" dirty="0"/>
+          </a:p>
+          <a:p>
+            <a:r>
+              <a:rPr lang="ko-KR" altLang="en-US" dirty="0"/>
+              <a:t>자기 자신이므로 그냥 </a:t>
+            </a:r>
+            <a:r>
+              <a:rPr lang="en-US" altLang="ko-KR" dirty="0"/>
+              <a:t>0</a:t>
+            </a:r>
+            <a:endParaRPr lang="ko-KR" altLang="en-US" dirty="0"/>
+          </a:p>
+        </p:txBody>
+      </p:sp>
+    </p:spTree>
+    <p:extLst>
+      <p:ext uri="{BB962C8B-B14F-4D97-AF65-F5344CB8AC3E}">
+        <p14:creationId xmlns:p14="http://schemas.microsoft.com/office/powerpoint/2010/main" val="633793175"/>
+      </p:ext>
+    </p:extLst>
+  </p:cSld>
+  <p:clrMapOvr>
+    <a:masterClrMapping/>
+  </p:clrMapOvr>
+</p:sld>
+</file>
+
+<file path=ppt/slides/slide68.xml><?xml version="1.0" encoding="utf-8"?>
 <p:sld xmlns:a="http://schemas.openxmlformats.org/drawingml/2006/main" xmlns:r="http://schemas.openxmlformats.org/officeDocument/2006/relationships" xmlns:p="http://schemas.openxmlformats.org/presentationml/2006/main">
   <p:cSld>
     <p:spTree>
@@ -37793,7 +39232,7 @@
 </p:sld>
 </file>
 
-<file path=ppt/slides/slide68.xml><?xml version="1.0" encoding="utf-8"?>
+<file path=ppt/slides/slide69.xml><?xml version="1.0" encoding="utf-8"?>
 <p:sld xmlns:a="http://schemas.openxmlformats.org/drawingml/2006/main" xmlns:r="http://schemas.openxmlformats.org/officeDocument/2006/relationships" xmlns:p="http://schemas.openxmlformats.org/presentationml/2006/main">
   <p:cSld>
     <p:spTree>
@@ -38188,426 +39627,6 @@
     <p:extLst>
       <p:ext uri="{BB962C8B-B14F-4D97-AF65-F5344CB8AC3E}">
         <p14:creationId xmlns:p14="http://schemas.microsoft.com/office/powerpoint/2010/main" val="696946578"/>
-      </p:ext>
-    </p:extLst>
-  </p:cSld>
-  <p:clrMapOvr>
-    <a:masterClrMapping/>
-  </p:clrMapOvr>
-</p:sld>
-</file>
-
-<file path=ppt/slides/slide69.xml><?xml version="1.0" encoding="utf-8"?>
-<p:sld xmlns:a="http://schemas.openxmlformats.org/drawingml/2006/main" xmlns:r="http://schemas.openxmlformats.org/officeDocument/2006/relationships" xmlns:p="http://schemas.openxmlformats.org/presentationml/2006/main">
-  <p:cSld>
-    <p:spTree>
-      <p:nvGrpSpPr>
-        <p:cNvPr id="1" name="">
-          <a:extLst>
-            <a:ext uri="{FF2B5EF4-FFF2-40B4-BE49-F238E27FC236}">
-              <a16:creationId xmlns:a16="http://schemas.microsoft.com/office/drawing/2014/main" id="{78AF71EB-6F3C-E408-C10B-5E7E68CE1F30}"/>
-            </a:ext>
-          </a:extLst>
-        </p:cNvPr>
-        <p:cNvGrpSpPr/>
-        <p:nvPr/>
-      </p:nvGrpSpPr>
-      <p:grpSpPr>
-        <a:xfrm>
-          <a:off x="0" y="0"/>
-          <a:ext cx="0" cy="0"/>
-          <a:chOff x="0" y="0"/>
-          <a:chExt cx="0" cy="0"/>
-        </a:xfrm>
-      </p:grpSpPr>
-      <p:sp>
-        <p:nvSpPr>
-          <p:cNvPr id="2" name="제목 1">
-            <a:extLst>
-              <a:ext uri="{FF2B5EF4-FFF2-40B4-BE49-F238E27FC236}">
-                <a16:creationId xmlns:a16="http://schemas.microsoft.com/office/drawing/2014/main" id="{9BA41E21-3C93-9E38-9A4B-E598D3256EF1}"/>
-              </a:ext>
-            </a:extLst>
-          </p:cNvPr>
-          <p:cNvSpPr>
-            <a:spLocks noGrp="1"/>
-          </p:cNvSpPr>
-          <p:nvPr>
-            <p:ph type="title"/>
-          </p:nvPr>
-        </p:nvSpPr>
-        <p:spPr/>
-        <p:txBody>
-          <a:bodyPr/>
-          <a:lstStyle/>
-          <a:p>
-            <a:r>
-              <a:rPr lang="en-US" altLang="ko-KR" dirty="0"/>
-              <a:t>0x02 KMP</a:t>
-            </a:r>
-            <a:endParaRPr lang="ko-KR" altLang="en-US" dirty="0"/>
-          </a:p>
-        </p:txBody>
-      </p:sp>
-      <p:sp>
-        <p:nvSpPr>
-          <p:cNvPr id="3" name="내용 개체 틀 2">
-            <a:extLst>
-              <a:ext uri="{FF2B5EF4-FFF2-40B4-BE49-F238E27FC236}">
-                <a16:creationId xmlns:a16="http://schemas.microsoft.com/office/drawing/2014/main" id="{8F8AC5DF-059F-3C71-4F34-B777DCB470FC}"/>
-              </a:ext>
-            </a:extLst>
-          </p:cNvPr>
-          <p:cNvSpPr>
-            <a:spLocks noGrp="1"/>
-          </p:cNvSpPr>
-          <p:nvPr>
-            <p:ph idx="1"/>
-          </p:nvPr>
-        </p:nvSpPr>
-        <p:spPr/>
-        <p:txBody>
-          <a:bodyPr/>
-          <a:lstStyle/>
-          <a:p>
-            <a:r>
-              <a:rPr lang="ko-KR" altLang="en-US" dirty="0"/>
-              <a:t>이제 진짜 </a:t>
-            </a:r>
-            <a:r>
-              <a:rPr lang="en-US" altLang="ko-KR" dirty="0"/>
-              <a:t>KMP</a:t>
-            </a:r>
-            <a:r>
-              <a:rPr lang="ko-KR" altLang="en-US" dirty="0"/>
-              <a:t>를 이해해보자</a:t>
-            </a:r>
-            <a:r>
-              <a:rPr lang="en-US" altLang="ko-KR" dirty="0"/>
-              <a:t>.</a:t>
-            </a:r>
-            <a:r>
-              <a:rPr lang="ko-KR" altLang="en-US" dirty="0"/>
-              <a:t>👊🏻</a:t>
-            </a:r>
-            <a:endParaRPr lang="en-US" altLang="ko-KR" dirty="0"/>
-          </a:p>
-          <a:p>
-            <a:r>
-              <a:rPr lang="en-US" altLang="ko-KR" dirty="0"/>
-              <a:t>A</a:t>
-            </a:r>
-          </a:p>
-          <a:p>
-            <a:r>
-              <a:rPr lang="en-US" altLang="ko-KR" dirty="0"/>
-              <a:t>B</a:t>
-            </a:r>
-          </a:p>
-          <a:p>
-            <a:r>
-              <a:rPr lang="ko-KR" altLang="en-US" dirty="0"/>
-              <a:t>실패함수</a:t>
-            </a:r>
-            <a:endParaRPr lang="en-US" altLang="ko-KR" dirty="0"/>
-          </a:p>
-          <a:p>
-            <a:endParaRPr lang="en-US" altLang="ko-KR" dirty="0"/>
-          </a:p>
-          <a:p>
-            <a:r>
-              <a:rPr lang="ko-KR" altLang="en-US" dirty="0"/>
-              <a:t>인덱스</a:t>
-            </a:r>
-            <a:endParaRPr lang="en-US" altLang="ko-KR" dirty="0"/>
-          </a:p>
-          <a:p>
-            <a:r>
-              <a:rPr lang="en-US" altLang="ko-KR" dirty="0"/>
-              <a:t>A</a:t>
-            </a:r>
-          </a:p>
-          <a:p>
-            <a:r>
-              <a:rPr lang="en-US" altLang="ko-KR" dirty="0"/>
-              <a:t>B</a:t>
-            </a:r>
-          </a:p>
-          <a:p>
-            <a:endParaRPr lang="en-US" altLang="ko-KR" dirty="0"/>
-          </a:p>
-        </p:txBody>
-      </p:sp>
-      <p:sp>
-        <p:nvSpPr>
-          <p:cNvPr id="4" name="TextBox 3">
-            <a:extLst>
-              <a:ext uri="{FF2B5EF4-FFF2-40B4-BE49-F238E27FC236}">
-                <a16:creationId xmlns:a16="http://schemas.microsoft.com/office/drawing/2014/main" id="{77D4BDC7-849C-392E-A596-A1B2E4BE444F}"/>
-              </a:ext>
-            </a:extLst>
-          </p:cNvPr>
-          <p:cNvSpPr txBox="1"/>
-          <p:nvPr/>
-        </p:nvSpPr>
-        <p:spPr>
-          <a:xfrm>
-            <a:off x="2912883" y="2404989"/>
-            <a:ext cx="4310795" cy="369332"/>
-          </a:xfrm>
-          <a:prstGeom prst="rect">
-            <a:avLst/>
-          </a:prstGeom>
-          <a:noFill/>
-          <a:ln>
-            <a:solidFill>
-              <a:schemeClr val="tx1"/>
-            </a:solidFill>
-          </a:ln>
-        </p:spPr>
-        <p:txBody>
-          <a:bodyPr wrap="none" rtlCol="0">
-            <a:spAutoFit/>
-          </a:bodyPr>
-          <a:lstStyle/>
-          <a:p>
-            <a:r>
-              <a:rPr lang="en-US" altLang="ko-KR" dirty="0"/>
-              <a:t>A B A B A B A D A B A B A C A B A D</a:t>
-            </a:r>
-            <a:endParaRPr lang="ko-KR" altLang="en-US" dirty="0"/>
-          </a:p>
-        </p:txBody>
-      </p:sp>
-      <p:sp>
-        <p:nvSpPr>
-          <p:cNvPr id="5" name="TextBox 4">
-            <a:extLst>
-              <a:ext uri="{FF2B5EF4-FFF2-40B4-BE49-F238E27FC236}">
-                <a16:creationId xmlns:a16="http://schemas.microsoft.com/office/drawing/2014/main" id="{54F6ED83-FD34-8F20-EF7F-FAE89D957E27}"/>
-              </a:ext>
-            </a:extLst>
-          </p:cNvPr>
-          <p:cNvSpPr txBox="1"/>
-          <p:nvPr/>
-        </p:nvSpPr>
-        <p:spPr>
-          <a:xfrm>
-            <a:off x="2912883" y="2909258"/>
-            <a:ext cx="2149948" cy="369332"/>
-          </a:xfrm>
-          <a:prstGeom prst="rect">
-            <a:avLst/>
-          </a:prstGeom>
-          <a:noFill/>
-          <a:ln>
-            <a:solidFill>
-              <a:schemeClr val="tx1"/>
-            </a:solidFill>
-          </a:ln>
-        </p:spPr>
-        <p:txBody>
-          <a:bodyPr wrap="none" rtlCol="0">
-            <a:spAutoFit/>
-          </a:bodyPr>
-          <a:lstStyle/>
-          <a:p>
-            <a:r>
-              <a:rPr lang="en-US" altLang="ko-KR" dirty="0"/>
-              <a:t>A B A B A C A B A</a:t>
-            </a:r>
-            <a:endParaRPr lang="ko-KR" altLang="en-US" dirty="0"/>
-          </a:p>
-        </p:txBody>
-      </p:sp>
-      <p:sp>
-        <p:nvSpPr>
-          <p:cNvPr id="6" name="TextBox 5">
-            <a:extLst>
-              <a:ext uri="{FF2B5EF4-FFF2-40B4-BE49-F238E27FC236}">
-                <a16:creationId xmlns:a16="http://schemas.microsoft.com/office/drawing/2014/main" id="{77DA5487-8A79-8C26-6371-C5EC88A93EE6}"/>
-              </a:ext>
-            </a:extLst>
-          </p:cNvPr>
-          <p:cNvSpPr txBox="1"/>
-          <p:nvPr/>
-        </p:nvSpPr>
-        <p:spPr>
-          <a:xfrm>
-            <a:off x="2914454" y="3429305"/>
-            <a:ext cx="2141933" cy="369332"/>
-          </a:xfrm>
-          <a:prstGeom prst="rect">
-            <a:avLst/>
-          </a:prstGeom>
-          <a:noFill/>
-          <a:ln>
-            <a:solidFill>
-              <a:schemeClr val="tx1"/>
-            </a:solidFill>
-          </a:ln>
-        </p:spPr>
-        <p:txBody>
-          <a:bodyPr wrap="none" rtlCol="0">
-            <a:spAutoFit/>
-          </a:bodyPr>
-          <a:lstStyle/>
-          <a:p>
-            <a:r>
-              <a:rPr lang="en-US" altLang="ko-KR" dirty="0"/>
-              <a:t>0 0  1 2 3  0 1 2 3</a:t>
-            </a:r>
-            <a:endParaRPr lang="ko-KR" altLang="en-US" dirty="0"/>
-          </a:p>
-        </p:txBody>
-      </p:sp>
-      <p:sp>
-        <p:nvSpPr>
-          <p:cNvPr id="7" name="TextBox 6">
-            <a:extLst>
-              <a:ext uri="{FF2B5EF4-FFF2-40B4-BE49-F238E27FC236}">
-                <a16:creationId xmlns:a16="http://schemas.microsoft.com/office/drawing/2014/main" id="{20124E39-0C1C-41E4-E939-4A36F42E2985}"/>
-              </a:ext>
-            </a:extLst>
-          </p:cNvPr>
-          <p:cNvSpPr txBox="1"/>
-          <p:nvPr/>
-        </p:nvSpPr>
-        <p:spPr>
-          <a:xfrm>
-            <a:off x="2912883" y="4858956"/>
-            <a:ext cx="4310795" cy="369332"/>
-          </a:xfrm>
-          <a:prstGeom prst="rect">
-            <a:avLst/>
-          </a:prstGeom>
-          <a:noFill/>
-          <a:ln>
-            <a:solidFill>
-              <a:schemeClr val="tx1"/>
-            </a:solidFill>
-          </a:ln>
-        </p:spPr>
-        <p:txBody>
-          <a:bodyPr wrap="none" rtlCol="0">
-            <a:spAutoFit/>
-          </a:bodyPr>
-          <a:lstStyle/>
-          <a:p>
-            <a:r>
-              <a:rPr lang="en-US" altLang="ko-KR" b="1" dirty="0">
-                <a:solidFill>
-                  <a:srgbClr val="00B050"/>
-                </a:solidFill>
-              </a:rPr>
-              <a:t>A B A B A </a:t>
-            </a:r>
-            <a:r>
-              <a:rPr lang="en-US" altLang="ko-KR" dirty="0"/>
-              <a:t>B A D A B A B A C A B A D</a:t>
-            </a:r>
-            <a:endParaRPr lang="ko-KR" altLang="en-US" dirty="0"/>
-          </a:p>
-        </p:txBody>
-      </p:sp>
-      <p:sp>
-        <p:nvSpPr>
-          <p:cNvPr id="8" name="TextBox 7">
-            <a:extLst>
-              <a:ext uri="{FF2B5EF4-FFF2-40B4-BE49-F238E27FC236}">
-                <a16:creationId xmlns:a16="http://schemas.microsoft.com/office/drawing/2014/main" id="{106DE4A5-C1B3-9B2D-A7FD-BC5F5B8E53EE}"/>
-              </a:ext>
-            </a:extLst>
-          </p:cNvPr>
-          <p:cNvSpPr txBox="1"/>
-          <p:nvPr/>
-        </p:nvSpPr>
-        <p:spPr>
-          <a:xfrm>
-            <a:off x="2920905" y="5381347"/>
-            <a:ext cx="2204450" cy="369332"/>
-          </a:xfrm>
-          <a:prstGeom prst="rect">
-            <a:avLst/>
-          </a:prstGeom>
-          <a:noFill/>
-          <a:ln>
-            <a:solidFill>
-              <a:schemeClr val="tx1"/>
-            </a:solidFill>
-          </a:ln>
-        </p:spPr>
-        <p:txBody>
-          <a:bodyPr wrap="none" rtlCol="0">
-            <a:spAutoFit/>
-          </a:bodyPr>
-          <a:lstStyle/>
-          <a:p>
-            <a:r>
-              <a:rPr lang="en-US" altLang="ko-KR" b="1" dirty="0">
-                <a:solidFill>
-                  <a:srgbClr val="00B050"/>
-                </a:solidFill>
-              </a:rPr>
-              <a:t>A B A B A </a:t>
-            </a:r>
-            <a:r>
-              <a:rPr lang="en-US" altLang="ko-KR" dirty="0"/>
-              <a:t>C A B A</a:t>
-            </a:r>
-            <a:endParaRPr lang="ko-KR" altLang="en-US" dirty="0"/>
-          </a:p>
-        </p:txBody>
-      </p:sp>
-      <p:sp>
-        <p:nvSpPr>
-          <p:cNvPr id="10" name="TextBox 9">
-            <a:extLst>
-              <a:ext uri="{FF2B5EF4-FFF2-40B4-BE49-F238E27FC236}">
-                <a16:creationId xmlns:a16="http://schemas.microsoft.com/office/drawing/2014/main" id="{F5110AAA-C90E-2EFB-1D54-C9D2B83D99EF}"/>
-              </a:ext>
-            </a:extLst>
-          </p:cNvPr>
-          <p:cNvSpPr txBox="1"/>
-          <p:nvPr/>
-        </p:nvSpPr>
-        <p:spPr>
-          <a:xfrm>
-            <a:off x="2920904" y="4462710"/>
-            <a:ext cx="4270721" cy="307777"/>
-          </a:xfrm>
-          <a:prstGeom prst="rect">
-            <a:avLst/>
-          </a:prstGeom>
-          <a:noFill/>
-          <a:ln>
-            <a:solidFill>
-              <a:schemeClr val="tx1"/>
-            </a:solidFill>
-          </a:ln>
-        </p:spPr>
-        <p:txBody>
-          <a:bodyPr wrap="none" rtlCol="0">
-            <a:spAutoFit/>
-          </a:bodyPr>
-          <a:lstStyle/>
-          <a:p>
-            <a:r>
-              <a:rPr lang="en-US" altLang="ko-KR" sz="1400" dirty="0"/>
-              <a:t>0 1   2  3  4  5  6  7  8   9 </a:t>
-            </a:r>
-            <a:r>
-              <a:rPr lang="en-US" altLang="ko-KR" sz="1200" dirty="0"/>
-              <a:t>10 11 12  13 14  15 16 17</a:t>
-            </a:r>
-            <a:endParaRPr lang="ko-KR" altLang="en-US" sz="1400" dirty="0"/>
-          </a:p>
-        </p:txBody>
-      </p:sp>
-    </p:spTree>
-    <p:extLst>
-      <p:ext uri="{BB962C8B-B14F-4D97-AF65-F5344CB8AC3E}">
-        <p14:creationId xmlns:p14="http://schemas.microsoft.com/office/powerpoint/2010/main" val="2144879348"/>
       </p:ext>
     </p:extLst>
   </p:cSld>
@@ -38843,6 +39862,426 @@
         <p:cNvPr id="1" name="">
           <a:extLst>
             <a:ext uri="{FF2B5EF4-FFF2-40B4-BE49-F238E27FC236}">
+              <a16:creationId xmlns:a16="http://schemas.microsoft.com/office/drawing/2014/main" id="{78AF71EB-6F3C-E408-C10B-5E7E68CE1F30}"/>
+            </a:ext>
+          </a:extLst>
+        </p:cNvPr>
+        <p:cNvGrpSpPr/>
+        <p:nvPr/>
+      </p:nvGrpSpPr>
+      <p:grpSpPr>
+        <a:xfrm>
+          <a:off x="0" y="0"/>
+          <a:ext cx="0" cy="0"/>
+          <a:chOff x="0" y="0"/>
+          <a:chExt cx="0" cy="0"/>
+        </a:xfrm>
+      </p:grpSpPr>
+      <p:sp>
+        <p:nvSpPr>
+          <p:cNvPr id="2" name="제목 1">
+            <a:extLst>
+              <a:ext uri="{FF2B5EF4-FFF2-40B4-BE49-F238E27FC236}">
+                <a16:creationId xmlns:a16="http://schemas.microsoft.com/office/drawing/2014/main" id="{9BA41E21-3C93-9E38-9A4B-E598D3256EF1}"/>
+              </a:ext>
+            </a:extLst>
+          </p:cNvPr>
+          <p:cNvSpPr>
+            <a:spLocks noGrp="1"/>
+          </p:cNvSpPr>
+          <p:nvPr>
+            <p:ph type="title"/>
+          </p:nvPr>
+        </p:nvSpPr>
+        <p:spPr/>
+        <p:txBody>
+          <a:bodyPr/>
+          <a:lstStyle/>
+          <a:p>
+            <a:r>
+              <a:rPr lang="en-US" altLang="ko-KR" dirty="0"/>
+              <a:t>0x02 KMP</a:t>
+            </a:r>
+            <a:endParaRPr lang="ko-KR" altLang="en-US" dirty="0"/>
+          </a:p>
+        </p:txBody>
+      </p:sp>
+      <p:sp>
+        <p:nvSpPr>
+          <p:cNvPr id="3" name="내용 개체 틀 2">
+            <a:extLst>
+              <a:ext uri="{FF2B5EF4-FFF2-40B4-BE49-F238E27FC236}">
+                <a16:creationId xmlns:a16="http://schemas.microsoft.com/office/drawing/2014/main" id="{8F8AC5DF-059F-3C71-4F34-B777DCB470FC}"/>
+              </a:ext>
+            </a:extLst>
+          </p:cNvPr>
+          <p:cNvSpPr>
+            <a:spLocks noGrp="1"/>
+          </p:cNvSpPr>
+          <p:nvPr>
+            <p:ph idx="1"/>
+          </p:nvPr>
+        </p:nvSpPr>
+        <p:spPr/>
+        <p:txBody>
+          <a:bodyPr/>
+          <a:lstStyle/>
+          <a:p>
+            <a:r>
+              <a:rPr lang="ko-KR" altLang="en-US" dirty="0"/>
+              <a:t>이제 진짜 </a:t>
+            </a:r>
+            <a:r>
+              <a:rPr lang="en-US" altLang="ko-KR" dirty="0"/>
+              <a:t>KMP</a:t>
+            </a:r>
+            <a:r>
+              <a:rPr lang="ko-KR" altLang="en-US" dirty="0"/>
+              <a:t>를 이해해보자</a:t>
+            </a:r>
+            <a:r>
+              <a:rPr lang="en-US" altLang="ko-KR" dirty="0"/>
+              <a:t>.</a:t>
+            </a:r>
+            <a:r>
+              <a:rPr lang="ko-KR" altLang="en-US" dirty="0"/>
+              <a:t>👊🏻</a:t>
+            </a:r>
+            <a:endParaRPr lang="en-US" altLang="ko-KR" dirty="0"/>
+          </a:p>
+          <a:p>
+            <a:r>
+              <a:rPr lang="en-US" altLang="ko-KR" dirty="0"/>
+              <a:t>A</a:t>
+            </a:r>
+          </a:p>
+          <a:p>
+            <a:r>
+              <a:rPr lang="en-US" altLang="ko-KR" dirty="0"/>
+              <a:t>B</a:t>
+            </a:r>
+          </a:p>
+          <a:p>
+            <a:r>
+              <a:rPr lang="ko-KR" altLang="en-US" dirty="0"/>
+              <a:t>실패함수</a:t>
+            </a:r>
+            <a:endParaRPr lang="en-US" altLang="ko-KR" dirty="0"/>
+          </a:p>
+          <a:p>
+            <a:endParaRPr lang="en-US" altLang="ko-KR" dirty="0"/>
+          </a:p>
+          <a:p>
+            <a:r>
+              <a:rPr lang="ko-KR" altLang="en-US" dirty="0"/>
+              <a:t>인덱스</a:t>
+            </a:r>
+            <a:endParaRPr lang="en-US" altLang="ko-KR" dirty="0"/>
+          </a:p>
+          <a:p>
+            <a:r>
+              <a:rPr lang="en-US" altLang="ko-KR" dirty="0"/>
+              <a:t>A</a:t>
+            </a:r>
+          </a:p>
+          <a:p>
+            <a:r>
+              <a:rPr lang="en-US" altLang="ko-KR" dirty="0"/>
+              <a:t>B</a:t>
+            </a:r>
+          </a:p>
+          <a:p>
+            <a:endParaRPr lang="en-US" altLang="ko-KR" dirty="0"/>
+          </a:p>
+        </p:txBody>
+      </p:sp>
+      <p:sp>
+        <p:nvSpPr>
+          <p:cNvPr id="4" name="TextBox 3">
+            <a:extLst>
+              <a:ext uri="{FF2B5EF4-FFF2-40B4-BE49-F238E27FC236}">
+                <a16:creationId xmlns:a16="http://schemas.microsoft.com/office/drawing/2014/main" id="{77D4BDC7-849C-392E-A596-A1B2E4BE444F}"/>
+              </a:ext>
+            </a:extLst>
+          </p:cNvPr>
+          <p:cNvSpPr txBox="1"/>
+          <p:nvPr/>
+        </p:nvSpPr>
+        <p:spPr>
+          <a:xfrm>
+            <a:off x="2912883" y="2404989"/>
+            <a:ext cx="4310795" cy="369332"/>
+          </a:xfrm>
+          <a:prstGeom prst="rect">
+            <a:avLst/>
+          </a:prstGeom>
+          <a:noFill/>
+          <a:ln>
+            <a:solidFill>
+              <a:schemeClr val="tx1"/>
+            </a:solidFill>
+          </a:ln>
+        </p:spPr>
+        <p:txBody>
+          <a:bodyPr wrap="none" rtlCol="0">
+            <a:spAutoFit/>
+          </a:bodyPr>
+          <a:lstStyle/>
+          <a:p>
+            <a:r>
+              <a:rPr lang="en-US" altLang="ko-KR" dirty="0"/>
+              <a:t>A B A B A B A D A B A B A C A B A D</a:t>
+            </a:r>
+            <a:endParaRPr lang="ko-KR" altLang="en-US" dirty="0"/>
+          </a:p>
+        </p:txBody>
+      </p:sp>
+      <p:sp>
+        <p:nvSpPr>
+          <p:cNvPr id="5" name="TextBox 4">
+            <a:extLst>
+              <a:ext uri="{FF2B5EF4-FFF2-40B4-BE49-F238E27FC236}">
+                <a16:creationId xmlns:a16="http://schemas.microsoft.com/office/drawing/2014/main" id="{54F6ED83-FD34-8F20-EF7F-FAE89D957E27}"/>
+              </a:ext>
+            </a:extLst>
+          </p:cNvPr>
+          <p:cNvSpPr txBox="1"/>
+          <p:nvPr/>
+        </p:nvSpPr>
+        <p:spPr>
+          <a:xfrm>
+            <a:off x="2912883" y="2909258"/>
+            <a:ext cx="2149948" cy="369332"/>
+          </a:xfrm>
+          <a:prstGeom prst="rect">
+            <a:avLst/>
+          </a:prstGeom>
+          <a:noFill/>
+          <a:ln>
+            <a:solidFill>
+              <a:schemeClr val="tx1"/>
+            </a:solidFill>
+          </a:ln>
+        </p:spPr>
+        <p:txBody>
+          <a:bodyPr wrap="none" rtlCol="0">
+            <a:spAutoFit/>
+          </a:bodyPr>
+          <a:lstStyle/>
+          <a:p>
+            <a:r>
+              <a:rPr lang="en-US" altLang="ko-KR" dirty="0"/>
+              <a:t>A B A B A C A B A</a:t>
+            </a:r>
+            <a:endParaRPr lang="ko-KR" altLang="en-US" dirty="0"/>
+          </a:p>
+        </p:txBody>
+      </p:sp>
+      <p:sp>
+        <p:nvSpPr>
+          <p:cNvPr id="6" name="TextBox 5">
+            <a:extLst>
+              <a:ext uri="{FF2B5EF4-FFF2-40B4-BE49-F238E27FC236}">
+                <a16:creationId xmlns:a16="http://schemas.microsoft.com/office/drawing/2014/main" id="{77DA5487-8A79-8C26-6371-C5EC88A93EE6}"/>
+              </a:ext>
+            </a:extLst>
+          </p:cNvPr>
+          <p:cNvSpPr txBox="1"/>
+          <p:nvPr/>
+        </p:nvSpPr>
+        <p:spPr>
+          <a:xfrm>
+            <a:off x="2914454" y="3429305"/>
+            <a:ext cx="2141933" cy="369332"/>
+          </a:xfrm>
+          <a:prstGeom prst="rect">
+            <a:avLst/>
+          </a:prstGeom>
+          <a:noFill/>
+          <a:ln>
+            <a:solidFill>
+              <a:schemeClr val="tx1"/>
+            </a:solidFill>
+          </a:ln>
+        </p:spPr>
+        <p:txBody>
+          <a:bodyPr wrap="none" rtlCol="0">
+            <a:spAutoFit/>
+          </a:bodyPr>
+          <a:lstStyle/>
+          <a:p>
+            <a:r>
+              <a:rPr lang="en-US" altLang="ko-KR" dirty="0"/>
+              <a:t>0 0  1 2 3  0 1 2 3</a:t>
+            </a:r>
+            <a:endParaRPr lang="ko-KR" altLang="en-US" dirty="0"/>
+          </a:p>
+        </p:txBody>
+      </p:sp>
+      <p:sp>
+        <p:nvSpPr>
+          <p:cNvPr id="7" name="TextBox 6">
+            <a:extLst>
+              <a:ext uri="{FF2B5EF4-FFF2-40B4-BE49-F238E27FC236}">
+                <a16:creationId xmlns:a16="http://schemas.microsoft.com/office/drawing/2014/main" id="{20124E39-0C1C-41E4-E939-4A36F42E2985}"/>
+              </a:ext>
+            </a:extLst>
+          </p:cNvPr>
+          <p:cNvSpPr txBox="1"/>
+          <p:nvPr/>
+        </p:nvSpPr>
+        <p:spPr>
+          <a:xfrm>
+            <a:off x="2912883" y="4858956"/>
+            <a:ext cx="4310795" cy="369332"/>
+          </a:xfrm>
+          <a:prstGeom prst="rect">
+            <a:avLst/>
+          </a:prstGeom>
+          <a:noFill/>
+          <a:ln>
+            <a:solidFill>
+              <a:schemeClr val="tx1"/>
+            </a:solidFill>
+          </a:ln>
+        </p:spPr>
+        <p:txBody>
+          <a:bodyPr wrap="none" rtlCol="0">
+            <a:spAutoFit/>
+          </a:bodyPr>
+          <a:lstStyle/>
+          <a:p>
+            <a:r>
+              <a:rPr lang="en-US" altLang="ko-KR" b="1" dirty="0">
+                <a:solidFill>
+                  <a:srgbClr val="00B050"/>
+                </a:solidFill>
+              </a:rPr>
+              <a:t>A B A B A </a:t>
+            </a:r>
+            <a:r>
+              <a:rPr lang="en-US" altLang="ko-KR" dirty="0"/>
+              <a:t>B A D A B A B A C A B A D</a:t>
+            </a:r>
+            <a:endParaRPr lang="ko-KR" altLang="en-US" dirty="0"/>
+          </a:p>
+        </p:txBody>
+      </p:sp>
+      <p:sp>
+        <p:nvSpPr>
+          <p:cNvPr id="8" name="TextBox 7">
+            <a:extLst>
+              <a:ext uri="{FF2B5EF4-FFF2-40B4-BE49-F238E27FC236}">
+                <a16:creationId xmlns:a16="http://schemas.microsoft.com/office/drawing/2014/main" id="{106DE4A5-C1B3-9B2D-A7FD-BC5F5B8E53EE}"/>
+              </a:ext>
+            </a:extLst>
+          </p:cNvPr>
+          <p:cNvSpPr txBox="1"/>
+          <p:nvPr/>
+        </p:nvSpPr>
+        <p:spPr>
+          <a:xfrm>
+            <a:off x="2920905" y="5381347"/>
+            <a:ext cx="2204450" cy="369332"/>
+          </a:xfrm>
+          <a:prstGeom prst="rect">
+            <a:avLst/>
+          </a:prstGeom>
+          <a:noFill/>
+          <a:ln>
+            <a:solidFill>
+              <a:schemeClr val="tx1"/>
+            </a:solidFill>
+          </a:ln>
+        </p:spPr>
+        <p:txBody>
+          <a:bodyPr wrap="none" rtlCol="0">
+            <a:spAutoFit/>
+          </a:bodyPr>
+          <a:lstStyle/>
+          <a:p>
+            <a:r>
+              <a:rPr lang="en-US" altLang="ko-KR" b="1" dirty="0">
+                <a:solidFill>
+                  <a:srgbClr val="00B050"/>
+                </a:solidFill>
+              </a:rPr>
+              <a:t>A B A B A </a:t>
+            </a:r>
+            <a:r>
+              <a:rPr lang="en-US" altLang="ko-KR" dirty="0"/>
+              <a:t>C A B A</a:t>
+            </a:r>
+            <a:endParaRPr lang="ko-KR" altLang="en-US" dirty="0"/>
+          </a:p>
+        </p:txBody>
+      </p:sp>
+      <p:sp>
+        <p:nvSpPr>
+          <p:cNvPr id="10" name="TextBox 9">
+            <a:extLst>
+              <a:ext uri="{FF2B5EF4-FFF2-40B4-BE49-F238E27FC236}">
+                <a16:creationId xmlns:a16="http://schemas.microsoft.com/office/drawing/2014/main" id="{F5110AAA-C90E-2EFB-1D54-C9D2B83D99EF}"/>
+              </a:ext>
+            </a:extLst>
+          </p:cNvPr>
+          <p:cNvSpPr txBox="1"/>
+          <p:nvPr/>
+        </p:nvSpPr>
+        <p:spPr>
+          <a:xfrm>
+            <a:off x="2920904" y="4462710"/>
+            <a:ext cx="4270721" cy="307777"/>
+          </a:xfrm>
+          <a:prstGeom prst="rect">
+            <a:avLst/>
+          </a:prstGeom>
+          <a:noFill/>
+          <a:ln>
+            <a:solidFill>
+              <a:schemeClr val="tx1"/>
+            </a:solidFill>
+          </a:ln>
+        </p:spPr>
+        <p:txBody>
+          <a:bodyPr wrap="none" rtlCol="0">
+            <a:spAutoFit/>
+          </a:bodyPr>
+          <a:lstStyle/>
+          <a:p>
+            <a:r>
+              <a:rPr lang="en-US" altLang="ko-KR" sz="1400" dirty="0"/>
+              <a:t>0 1   2  3  4  5  6  7  8   9 </a:t>
+            </a:r>
+            <a:r>
+              <a:rPr lang="en-US" altLang="ko-KR" sz="1200" dirty="0"/>
+              <a:t>10 11 12  13 14  15 16 17</a:t>
+            </a:r>
+            <a:endParaRPr lang="ko-KR" altLang="en-US" sz="1400" dirty="0"/>
+          </a:p>
+        </p:txBody>
+      </p:sp>
+    </p:spTree>
+    <p:extLst>
+      <p:ext uri="{BB962C8B-B14F-4D97-AF65-F5344CB8AC3E}">
+        <p14:creationId xmlns:p14="http://schemas.microsoft.com/office/powerpoint/2010/main" val="2144879348"/>
+      </p:ext>
+    </p:extLst>
+  </p:cSld>
+  <p:clrMapOvr>
+    <a:masterClrMapping/>
+  </p:clrMapOvr>
+</p:sld>
+</file>
+
+<file path=ppt/slides/slide71.xml><?xml version="1.0" encoding="utf-8"?>
+<p:sld xmlns:a="http://schemas.openxmlformats.org/drawingml/2006/main" xmlns:r="http://schemas.openxmlformats.org/officeDocument/2006/relationships" xmlns:p="http://schemas.openxmlformats.org/presentationml/2006/main">
+  <p:cSld>
+    <p:spTree>
+      <p:nvGrpSpPr>
+        <p:cNvPr id="1" name="">
+          <a:extLst>
+            <a:ext uri="{FF2B5EF4-FFF2-40B4-BE49-F238E27FC236}">
               <a16:creationId xmlns:a16="http://schemas.microsoft.com/office/drawing/2014/main" id="{B5F74BB3-3A1D-E9D0-433F-F1B919F1BC62}"/>
             </a:ext>
           </a:extLst>
@@ -39271,7 +40710,7 @@
 </p:sld>
 </file>
 
-<file path=ppt/slides/slide71.xml><?xml version="1.0" encoding="utf-8"?>
+<file path=ppt/slides/slide72.xml><?xml version="1.0" encoding="utf-8"?>
 <p:sld xmlns:a="http://schemas.openxmlformats.org/drawingml/2006/main" xmlns:r="http://schemas.openxmlformats.org/officeDocument/2006/relationships" xmlns:p="http://schemas.openxmlformats.org/presentationml/2006/main">
   <p:cSld>
     <p:spTree>
@@ -39981,7 +41420,7 @@
 </p:sld>
 </file>
 
-<file path=ppt/slides/slide72.xml><?xml version="1.0" encoding="utf-8"?>
+<file path=ppt/slides/slide73.xml><?xml version="1.0" encoding="utf-8"?>
 <p:sld xmlns:a="http://schemas.openxmlformats.org/drawingml/2006/main" xmlns:r="http://schemas.openxmlformats.org/officeDocument/2006/relationships" xmlns:p="http://schemas.openxmlformats.org/presentationml/2006/main">
   <p:cSld>
     <p:spTree>
@@ -40727,7 +42166,7 @@
 </p:sld>
 </file>
 
-<file path=ppt/slides/slide73.xml><?xml version="1.0" encoding="utf-8"?>
+<file path=ppt/slides/slide74.xml><?xml version="1.0" encoding="utf-8"?>
 <p:sld xmlns:a="http://schemas.openxmlformats.org/drawingml/2006/main" xmlns:r="http://schemas.openxmlformats.org/officeDocument/2006/relationships" xmlns:p="http://schemas.openxmlformats.org/presentationml/2006/main">
   <p:cSld>
     <p:spTree>
@@ -41198,7 +42637,7 @@
 </p:sld>
 </file>
 
-<file path=ppt/slides/slide74.xml><?xml version="1.0" encoding="utf-8"?>
+<file path=ppt/slides/slide75.xml><?xml version="1.0" encoding="utf-8"?>
 <p:sld xmlns:a="http://schemas.openxmlformats.org/drawingml/2006/main" xmlns:r="http://schemas.openxmlformats.org/officeDocument/2006/relationships" xmlns:p="http://schemas.openxmlformats.org/presentationml/2006/main">
   <p:cSld>
     <p:spTree>
@@ -42034,7 +43473,7 @@
 </p:sld>
 </file>
 
-<file path=ppt/slides/slide75.xml><?xml version="1.0" encoding="utf-8"?>
+<file path=ppt/slides/slide76.xml><?xml version="1.0" encoding="utf-8"?>
 <p:sld xmlns:a="http://schemas.openxmlformats.org/drawingml/2006/main" xmlns:r="http://schemas.openxmlformats.org/officeDocument/2006/relationships" xmlns:p="http://schemas.openxmlformats.org/presentationml/2006/main">
   <p:cSld>
     <p:spTree>
@@ -42529,7 +43968,7 @@
 </p:sld>
 </file>
 
-<file path=ppt/slides/slide76.xml><?xml version="1.0" encoding="utf-8"?>
+<file path=ppt/slides/slide77.xml><?xml version="1.0" encoding="utf-8"?>
 <p:sld xmlns:a="http://schemas.openxmlformats.org/drawingml/2006/main" xmlns:r="http://schemas.openxmlformats.org/officeDocument/2006/relationships" xmlns:p="http://schemas.openxmlformats.org/presentationml/2006/main">
   <p:cSld>
     <p:spTree>
@@ -43450,7 +44889,7 @@
 </p:sld>
 </file>
 
-<file path=ppt/slides/slide77.xml><?xml version="1.0" encoding="utf-8"?>
+<file path=ppt/slides/slide78.xml><?xml version="1.0" encoding="utf-8"?>
 <p:sld xmlns:a="http://schemas.openxmlformats.org/drawingml/2006/main" xmlns:r="http://schemas.openxmlformats.org/officeDocument/2006/relationships" xmlns:p="http://schemas.openxmlformats.org/presentationml/2006/main">
   <p:cSld>
     <p:spTree>
@@ -44286,7 +45725,7 @@
 </p:sld>
 </file>
 
-<file path=ppt/slides/slide78.xml><?xml version="1.0" encoding="utf-8"?>
+<file path=ppt/slides/slide79.xml><?xml version="1.0" encoding="utf-8"?>
 <p:sld xmlns:a="http://schemas.openxmlformats.org/drawingml/2006/main" xmlns:r="http://schemas.openxmlformats.org/officeDocument/2006/relationships" xmlns:p="http://schemas.openxmlformats.org/presentationml/2006/main">
   <p:cSld>
     <p:spTree>
@@ -45348,518 +46787,6 @@
     <p:extLst>
       <p:ext uri="{BB962C8B-B14F-4D97-AF65-F5344CB8AC3E}">
         <p14:creationId xmlns:p14="http://schemas.microsoft.com/office/powerpoint/2010/main" val="464939596"/>
-      </p:ext>
-    </p:extLst>
-  </p:cSld>
-  <p:clrMapOvr>
-    <a:masterClrMapping/>
-  </p:clrMapOvr>
-</p:sld>
-</file>
-
-<file path=ppt/slides/slide79.xml><?xml version="1.0" encoding="utf-8"?>
-<p:sld xmlns:a="http://schemas.openxmlformats.org/drawingml/2006/main" xmlns:r="http://schemas.openxmlformats.org/officeDocument/2006/relationships" xmlns:p="http://schemas.openxmlformats.org/presentationml/2006/main">
-  <p:cSld>
-    <p:spTree>
-      <p:nvGrpSpPr>
-        <p:cNvPr id="1" name="">
-          <a:extLst>
-            <a:ext uri="{FF2B5EF4-FFF2-40B4-BE49-F238E27FC236}">
-              <a16:creationId xmlns:a16="http://schemas.microsoft.com/office/drawing/2014/main" id="{77F3280A-E7C3-BD85-41D2-1604FDBD8B62}"/>
-            </a:ext>
-          </a:extLst>
-        </p:cNvPr>
-        <p:cNvGrpSpPr/>
-        <p:nvPr/>
-      </p:nvGrpSpPr>
-      <p:grpSpPr>
-        <a:xfrm>
-          <a:off x="0" y="0"/>
-          <a:ext cx="0" cy="0"/>
-          <a:chOff x="0" y="0"/>
-          <a:chExt cx="0" cy="0"/>
-        </a:xfrm>
-      </p:grpSpPr>
-      <p:sp>
-        <p:nvSpPr>
-          <p:cNvPr id="2" name="제목 1">
-            <a:extLst>
-              <a:ext uri="{FF2B5EF4-FFF2-40B4-BE49-F238E27FC236}">
-                <a16:creationId xmlns:a16="http://schemas.microsoft.com/office/drawing/2014/main" id="{2D259819-FF10-5AD7-FFB5-F84A05D5A76D}"/>
-              </a:ext>
-            </a:extLst>
-          </p:cNvPr>
-          <p:cNvSpPr>
-            <a:spLocks noGrp="1"/>
-          </p:cNvSpPr>
-          <p:nvPr>
-            <p:ph type="title"/>
-          </p:nvPr>
-        </p:nvSpPr>
-        <p:spPr/>
-        <p:txBody>
-          <a:bodyPr/>
-          <a:lstStyle/>
-          <a:p>
-            <a:r>
-              <a:rPr lang="en-US" altLang="ko-KR" dirty="0"/>
-              <a:t>0x02 KMP</a:t>
-            </a:r>
-            <a:endParaRPr lang="ko-KR" altLang="en-US" dirty="0"/>
-          </a:p>
-        </p:txBody>
-      </p:sp>
-      <p:sp>
-        <p:nvSpPr>
-          <p:cNvPr id="3" name="내용 개체 틀 2">
-            <a:extLst>
-              <a:ext uri="{FF2B5EF4-FFF2-40B4-BE49-F238E27FC236}">
-                <a16:creationId xmlns:a16="http://schemas.microsoft.com/office/drawing/2014/main" id="{2E1E4CD5-A101-7E6B-613F-0809623AB4AF}"/>
-              </a:ext>
-            </a:extLst>
-          </p:cNvPr>
-          <p:cNvSpPr>
-            <a:spLocks noGrp="1"/>
-          </p:cNvSpPr>
-          <p:nvPr>
-            <p:ph idx="1"/>
-          </p:nvPr>
-        </p:nvSpPr>
-        <p:spPr>
-          <a:xfrm>
-            <a:off x="838200" y="1825625"/>
-            <a:ext cx="10515600" cy="4825432"/>
-          </a:xfrm>
-        </p:spPr>
-        <p:txBody>
-          <a:bodyPr/>
-          <a:lstStyle/>
-          <a:p>
-            <a:r>
-              <a:rPr lang="ko-KR" altLang="en-US" dirty="0"/>
-              <a:t>이제 진짜 </a:t>
-            </a:r>
-            <a:r>
-              <a:rPr lang="en-US" altLang="ko-KR" dirty="0"/>
-              <a:t>KMP</a:t>
-            </a:r>
-            <a:r>
-              <a:rPr lang="ko-KR" altLang="en-US" dirty="0"/>
-              <a:t>를 이해해보자</a:t>
-            </a:r>
-            <a:r>
-              <a:rPr lang="en-US" altLang="ko-KR" dirty="0"/>
-              <a:t>.</a:t>
-            </a:r>
-            <a:r>
-              <a:rPr lang="ko-KR" altLang="en-US" dirty="0"/>
-              <a:t>👊🏻</a:t>
-            </a:r>
-            <a:endParaRPr lang="en-US" altLang="ko-KR" dirty="0"/>
-          </a:p>
-          <a:p>
-            <a:r>
-              <a:rPr lang="en-US" altLang="ko-KR" dirty="0"/>
-              <a:t>A</a:t>
-            </a:r>
-          </a:p>
-          <a:p>
-            <a:r>
-              <a:rPr lang="en-US" altLang="ko-KR" dirty="0"/>
-              <a:t>B</a:t>
-            </a:r>
-          </a:p>
-          <a:p>
-            <a:r>
-              <a:rPr lang="ko-KR" altLang="en-US" dirty="0"/>
-              <a:t>실패함수</a:t>
-            </a:r>
-            <a:endParaRPr lang="en-US" altLang="ko-KR" dirty="0"/>
-          </a:p>
-          <a:p>
-            <a:endParaRPr lang="en-US" altLang="ko-KR" dirty="0"/>
-          </a:p>
-          <a:p>
-            <a:r>
-              <a:rPr lang="ko-KR" altLang="en-US" dirty="0"/>
-              <a:t>인덱스</a:t>
-            </a:r>
-            <a:endParaRPr lang="en-US" altLang="ko-KR" dirty="0"/>
-          </a:p>
-          <a:p>
-            <a:r>
-              <a:rPr lang="en-US" altLang="ko-KR" dirty="0"/>
-              <a:t>A</a:t>
-            </a:r>
-          </a:p>
-          <a:p>
-            <a:r>
-              <a:rPr lang="en-US" altLang="ko-KR" dirty="0">
-                <a:solidFill>
-                  <a:schemeClr val="bg2">
-                    <a:lumMod val="90000"/>
-                  </a:schemeClr>
-                </a:solidFill>
-              </a:rPr>
-              <a:t>B’’</a:t>
-            </a:r>
-          </a:p>
-          <a:p>
-            <a:r>
-              <a:rPr lang="en-US" altLang="ko-KR" dirty="0"/>
-              <a:t>B’’’</a:t>
-            </a:r>
-          </a:p>
-        </p:txBody>
-      </p:sp>
-      <p:sp>
-        <p:nvSpPr>
-          <p:cNvPr id="4" name="TextBox 3">
-            <a:extLst>
-              <a:ext uri="{FF2B5EF4-FFF2-40B4-BE49-F238E27FC236}">
-                <a16:creationId xmlns:a16="http://schemas.microsoft.com/office/drawing/2014/main" id="{43127F4A-3457-B3B9-5688-5E80F625769A}"/>
-              </a:ext>
-            </a:extLst>
-          </p:cNvPr>
-          <p:cNvSpPr txBox="1"/>
-          <p:nvPr/>
-        </p:nvSpPr>
-        <p:spPr>
-          <a:xfrm>
-            <a:off x="2912883" y="2404989"/>
-            <a:ext cx="4310795" cy="369332"/>
-          </a:xfrm>
-          <a:prstGeom prst="rect">
-            <a:avLst/>
-          </a:prstGeom>
-          <a:noFill/>
-          <a:ln>
-            <a:solidFill>
-              <a:schemeClr val="tx1"/>
-            </a:solidFill>
-          </a:ln>
-        </p:spPr>
-        <p:txBody>
-          <a:bodyPr wrap="none" rtlCol="0">
-            <a:spAutoFit/>
-          </a:bodyPr>
-          <a:lstStyle/>
-          <a:p>
-            <a:r>
-              <a:rPr lang="en-US" altLang="ko-KR" dirty="0"/>
-              <a:t>A B A B A B A D A B A B A C A B A D</a:t>
-            </a:r>
-            <a:endParaRPr lang="ko-KR" altLang="en-US" dirty="0"/>
-          </a:p>
-        </p:txBody>
-      </p:sp>
-      <p:sp>
-        <p:nvSpPr>
-          <p:cNvPr id="5" name="TextBox 4">
-            <a:extLst>
-              <a:ext uri="{FF2B5EF4-FFF2-40B4-BE49-F238E27FC236}">
-                <a16:creationId xmlns:a16="http://schemas.microsoft.com/office/drawing/2014/main" id="{BA4DF727-CB77-CE8E-D5FA-39CBB55B1A94}"/>
-              </a:ext>
-            </a:extLst>
-          </p:cNvPr>
-          <p:cNvSpPr txBox="1"/>
-          <p:nvPr/>
-        </p:nvSpPr>
-        <p:spPr>
-          <a:xfrm>
-            <a:off x="2912883" y="2909258"/>
-            <a:ext cx="2149948" cy="369332"/>
-          </a:xfrm>
-          <a:prstGeom prst="rect">
-            <a:avLst/>
-          </a:prstGeom>
-          <a:noFill/>
-          <a:ln>
-            <a:solidFill>
-              <a:schemeClr val="tx1"/>
-            </a:solidFill>
-          </a:ln>
-        </p:spPr>
-        <p:txBody>
-          <a:bodyPr wrap="none" rtlCol="0">
-            <a:spAutoFit/>
-          </a:bodyPr>
-          <a:lstStyle/>
-          <a:p>
-            <a:r>
-              <a:rPr lang="en-US" altLang="ko-KR" dirty="0"/>
-              <a:t>A B A B A C A B A</a:t>
-            </a:r>
-            <a:endParaRPr lang="ko-KR" altLang="en-US" dirty="0"/>
-          </a:p>
-        </p:txBody>
-      </p:sp>
-      <p:sp>
-        <p:nvSpPr>
-          <p:cNvPr id="6" name="TextBox 5">
-            <a:extLst>
-              <a:ext uri="{FF2B5EF4-FFF2-40B4-BE49-F238E27FC236}">
-                <a16:creationId xmlns:a16="http://schemas.microsoft.com/office/drawing/2014/main" id="{FDEE1664-2F11-EA75-51A5-8EE9683F460A}"/>
-              </a:ext>
-            </a:extLst>
-          </p:cNvPr>
-          <p:cNvSpPr txBox="1"/>
-          <p:nvPr/>
-        </p:nvSpPr>
-        <p:spPr>
-          <a:xfrm>
-            <a:off x="2914454" y="3429305"/>
-            <a:ext cx="2141933" cy="369332"/>
-          </a:xfrm>
-          <a:prstGeom prst="rect">
-            <a:avLst/>
-          </a:prstGeom>
-          <a:noFill/>
-          <a:ln>
-            <a:solidFill>
-              <a:schemeClr val="tx1"/>
-            </a:solidFill>
-          </a:ln>
-        </p:spPr>
-        <p:txBody>
-          <a:bodyPr wrap="none" rtlCol="0">
-            <a:spAutoFit/>
-          </a:bodyPr>
-          <a:lstStyle/>
-          <a:p>
-            <a:r>
-              <a:rPr lang="en-US" altLang="ko-KR" dirty="0"/>
-              <a:t>0 0  1 2 3  0 1 2 3</a:t>
-            </a:r>
-            <a:endParaRPr lang="ko-KR" altLang="en-US" dirty="0"/>
-          </a:p>
-        </p:txBody>
-      </p:sp>
-      <p:sp>
-        <p:nvSpPr>
-          <p:cNvPr id="7" name="TextBox 6">
-            <a:extLst>
-              <a:ext uri="{FF2B5EF4-FFF2-40B4-BE49-F238E27FC236}">
-                <a16:creationId xmlns:a16="http://schemas.microsoft.com/office/drawing/2014/main" id="{ED54178F-877C-129F-0B65-5B105CDFA095}"/>
-              </a:ext>
-            </a:extLst>
-          </p:cNvPr>
-          <p:cNvSpPr txBox="1"/>
-          <p:nvPr/>
-        </p:nvSpPr>
-        <p:spPr>
-          <a:xfrm>
-            <a:off x="2912883" y="4858956"/>
-            <a:ext cx="4310795" cy="369332"/>
-          </a:xfrm>
-          <a:prstGeom prst="rect">
-            <a:avLst/>
-          </a:prstGeom>
-          <a:noFill/>
-          <a:ln>
-            <a:solidFill>
-              <a:schemeClr val="tx1"/>
-            </a:solidFill>
-          </a:ln>
-        </p:spPr>
-        <p:txBody>
-          <a:bodyPr wrap="none" rtlCol="0">
-            <a:spAutoFit/>
-          </a:bodyPr>
-          <a:lstStyle/>
-          <a:p>
-            <a:r>
-              <a:rPr lang="en-US" altLang="ko-KR" dirty="0"/>
-              <a:t>A B A B A B A D A B A B A C A B A D</a:t>
-            </a:r>
-            <a:endParaRPr lang="ko-KR" altLang="en-US" dirty="0"/>
-          </a:p>
-        </p:txBody>
-      </p:sp>
-      <p:sp>
-        <p:nvSpPr>
-          <p:cNvPr id="10" name="TextBox 9">
-            <a:extLst>
-              <a:ext uri="{FF2B5EF4-FFF2-40B4-BE49-F238E27FC236}">
-                <a16:creationId xmlns:a16="http://schemas.microsoft.com/office/drawing/2014/main" id="{B87D12F0-2DFE-F30E-1D17-A56D5D47305C}"/>
-              </a:ext>
-            </a:extLst>
-          </p:cNvPr>
-          <p:cNvSpPr txBox="1"/>
-          <p:nvPr/>
-        </p:nvSpPr>
-        <p:spPr>
-          <a:xfrm>
-            <a:off x="2920904" y="4462710"/>
-            <a:ext cx="4270721" cy="307777"/>
-          </a:xfrm>
-          <a:prstGeom prst="rect">
-            <a:avLst/>
-          </a:prstGeom>
-          <a:noFill/>
-          <a:ln>
-            <a:solidFill>
-              <a:schemeClr val="tx1"/>
-            </a:solidFill>
-          </a:ln>
-        </p:spPr>
-        <p:txBody>
-          <a:bodyPr wrap="none" rtlCol="0">
-            <a:spAutoFit/>
-          </a:bodyPr>
-          <a:lstStyle/>
-          <a:p>
-            <a:r>
-              <a:rPr lang="en-US" altLang="ko-KR" sz="1400" dirty="0"/>
-              <a:t>0 1   2  3  4  5  6  7  8   9 </a:t>
-            </a:r>
-            <a:r>
-              <a:rPr lang="en-US" altLang="ko-KR" sz="1200" dirty="0"/>
-              <a:t>10 11 12  13 14  15 16 17</a:t>
-            </a:r>
-            <a:endParaRPr lang="ko-KR" altLang="en-US" sz="1400" dirty="0"/>
-          </a:p>
-        </p:txBody>
-      </p:sp>
-      <p:sp>
-        <p:nvSpPr>
-          <p:cNvPr id="12" name="TextBox 11">
-            <a:extLst>
-              <a:ext uri="{FF2B5EF4-FFF2-40B4-BE49-F238E27FC236}">
-                <a16:creationId xmlns:a16="http://schemas.microsoft.com/office/drawing/2014/main" id="{77BF23E2-BACE-4037-60B8-C176519788E0}"/>
-              </a:ext>
-            </a:extLst>
-          </p:cNvPr>
-          <p:cNvSpPr txBox="1"/>
-          <p:nvPr/>
-        </p:nvSpPr>
-        <p:spPr>
-          <a:xfrm>
-            <a:off x="4294106" y="5897904"/>
-            <a:ext cx="2204450" cy="369332"/>
-          </a:xfrm>
-          <a:prstGeom prst="rect">
-            <a:avLst/>
-          </a:prstGeom>
-          <a:noFill/>
-          <a:ln>
-            <a:solidFill>
-              <a:schemeClr val="tx1"/>
-            </a:solidFill>
-          </a:ln>
-        </p:spPr>
-        <p:txBody>
-          <a:bodyPr wrap="none" rtlCol="0">
-            <a:spAutoFit/>
-          </a:bodyPr>
-          <a:lstStyle/>
-          <a:p>
-            <a:r>
-              <a:rPr lang="en-US" altLang="ko-KR" dirty="0"/>
-              <a:t>A B A B A C A B A</a:t>
-            </a:r>
-            <a:endParaRPr lang="ko-KR" altLang="en-US" dirty="0"/>
-          </a:p>
-        </p:txBody>
-      </p:sp>
-      <p:sp>
-        <p:nvSpPr>
-          <p:cNvPr id="13" name="TextBox 12">
-            <a:extLst>
-              <a:ext uri="{FF2B5EF4-FFF2-40B4-BE49-F238E27FC236}">
-                <a16:creationId xmlns:a16="http://schemas.microsoft.com/office/drawing/2014/main" id="{AA3A7341-13C7-5A45-DAF2-E477F61BF6B3}"/>
-              </a:ext>
-            </a:extLst>
-          </p:cNvPr>
-          <p:cNvSpPr txBox="1"/>
-          <p:nvPr/>
-        </p:nvSpPr>
-        <p:spPr>
-          <a:xfrm>
-            <a:off x="4294110" y="6326807"/>
-            <a:ext cx="2141933" cy="307777"/>
-          </a:xfrm>
-          <a:prstGeom prst="rect">
-            <a:avLst/>
-          </a:prstGeom>
-          <a:noFill/>
-          <a:ln>
-            <a:solidFill>
-              <a:schemeClr val="tx1"/>
-            </a:solidFill>
-          </a:ln>
-        </p:spPr>
-        <p:txBody>
-          <a:bodyPr wrap="none" rtlCol="0">
-            <a:spAutoFit/>
-          </a:bodyPr>
-          <a:lstStyle/>
-          <a:p>
-            <a:r>
-              <a:rPr lang="en-US" altLang="ko-KR" sz="1400" dirty="0"/>
-              <a:t>0  1  2   3  4  5  6  7  8</a:t>
-            </a:r>
-            <a:endParaRPr lang="ko-KR" altLang="en-US" sz="1400" dirty="0"/>
-          </a:p>
-        </p:txBody>
-      </p:sp>
-      <p:sp>
-        <p:nvSpPr>
-          <p:cNvPr id="8" name="TextBox 7">
-            <a:extLst>
-              <a:ext uri="{FF2B5EF4-FFF2-40B4-BE49-F238E27FC236}">
-                <a16:creationId xmlns:a16="http://schemas.microsoft.com/office/drawing/2014/main" id="{7F95DF34-2321-4E7F-72A4-DB6B0F93748D}"/>
-              </a:ext>
-            </a:extLst>
-          </p:cNvPr>
-          <p:cNvSpPr txBox="1"/>
-          <p:nvPr/>
-        </p:nvSpPr>
-        <p:spPr>
-          <a:xfrm>
-            <a:off x="3849741" y="5395786"/>
-            <a:ext cx="2204450" cy="369332"/>
-          </a:xfrm>
-          <a:prstGeom prst="rect">
-            <a:avLst/>
-          </a:prstGeom>
-          <a:noFill/>
-          <a:ln>
-            <a:solidFill>
-              <a:schemeClr val="tx1"/>
-            </a:solidFill>
-          </a:ln>
-        </p:spPr>
-        <p:txBody>
-          <a:bodyPr wrap="none" rtlCol="0">
-            <a:spAutoFit/>
-          </a:bodyPr>
-          <a:lstStyle/>
-          <a:p>
-            <a:r>
-              <a:rPr lang="en-US" altLang="ko-KR" dirty="0">
-                <a:solidFill>
-                  <a:schemeClr val="bg2">
-                    <a:lumMod val="90000"/>
-                  </a:schemeClr>
-                </a:solidFill>
-              </a:rPr>
-              <a:t>A B A B A C A B A</a:t>
-            </a:r>
-            <a:endParaRPr lang="ko-KR" altLang="en-US" dirty="0">
-              <a:solidFill>
-                <a:schemeClr val="bg2">
-                  <a:lumMod val="90000"/>
-                </a:schemeClr>
-              </a:solidFill>
-            </a:endParaRPr>
-          </a:p>
-        </p:txBody>
-      </p:sp>
-    </p:spTree>
-    <p:extLst>
-      <p:ext uri="{BB962C8B-B14F-4D97-AF65-F5344CB8AC3E}">
-        <p14:creationId xmlns:p14="http://schemas.microsoft.com/office/powerpoint/2010/main" val="2355755407"/>
       </p:ext>
     </p:extLst>
   </p:cSld>
@@ -46095,6 +47022,518 @@
         <p:cNvPr id="1" name="">
           <a:extLst>
             <a:ext uri="{FF2B5EF4-FFF2-40B4-BE49-F238E27FC236}">
+              <a16:creationId xmlns:a16="http://schemas.microsoft.com/office/drawing/2014/main" id="{77F3280A-E7C3-BD85-41D2-1604FDBD8B62}"/>
+            </a:ext>
+          </a:extLst>
+        </p:cNvPr>
+        <p:cNvGrpSpPr/>
+        <p:nvPr/>
+      </p:nvGrpSpPr>
+      <p:grpSpPr>
+        <a:xfrm>
+          <a:off x="0" y="0"/>
+          <a:ext cx="0" cy="0"/>
+          <a:chOff x="0" y="0"/>
+          <a:chExt cx="0" cy="0"/>
+        </a:xfrm>
+      </p:grpSpPr>
+      <p:sp>
+        <p:nvSpPr>
+          <p:cNvPr id="2" name="제목 1">
+            <a:extLst>
+              <a:ext uri="{FF2B5EF4-FFF2-40B4-BE49-F238E27FC236}">
+                <a16:creationId xmlns:a16="http://schemas.microsoft.com/office/drawing/2014/main" id="{2D259819-FF10-5AD7-FFB5-F84A05D5A76D}"/>
+              </a:ext>
+            </a:extLst>
+          </p:cNvPr>
+          <p:cNvSpPr>
+            <a:spLocks noGrp="1"/>
+          </p:cNvSpPr>
+          <p:nvPr>
+            <p:ph type="title"/>
+          </p:nvPr>
+        </p:nvSpPr>
+        <p:spPr/>
+        <p:txBody>
+          <a:bodyPr/>
+          <a:lstStyle/>
+          <a:p>
+            <a:r>
+              <a:rPr lang="en-US" altLang="ko-KR" dirty="0"/>
+              <a:t>0x02 KMP</a:t>
+            </a:r>
+            <a:endParaRPr lang="ko-KR" altLang="en-US" dirty="0"/>
+          </a:p>
+        </p:txBody>
+      </p:sp>
+      <p:sp>
+        <p:nvSpPr>
+          <p:cNvPr id="3" name="내용 개체 틀 2">
+            <a:extLst>
+              <a:ext uri="{FF2B5EF4-FFF2-40B4-BE49-F238E27FC236}">
+                <a16:creationId xmlns:a16="http://schemas.microsoft.com/office/drawing/2014/main" id="{2E1E4CD5-A101-7E6B-613F-0809623AB4AF}"/>
+              </a:ext>
+            </a:extLst>
+          </p:cNvPr>
+          <p:cNvSpPr>
+            <a:spLocks noGrp="1"/>
+          </p:cNvSpPr>
+          <p:nvPr>
+            <p:ph idx="1"/>
+          </p:nvPr>
+        </p:nvSpPr>
+        <p:spPr>
+          <a:xfrm>
+            <a:off x="838200" y="1825625"/>
+            <a:ext cx="10515600" cy="4825432"/>
+          </a:xfrm>
+        </p:spPr>
+        <p:txBody>
+          <a:bodyPr/>
+          <a:lstStyle/>
+          <a:p>
+            <a:r>
+              <a:rPr lang="ko-KR" altLang="en-US" dirty="0"/>
+              <a:t>이제 진짜 </a:t>
+            </a:r>
+            <a:r>
+              <a:rPr lang="en-US" altLang="ko-KR" dirty="0"/>
+              <a:t>KMP</a:t>
+            </a:r>
+            <a:r>
+              <a:rPr lang="ko-KR" altLang="en-US" dirty="0"/>
+              <a:t>를 이해해보자</a:t>
+            </a:r>
+            <a:r>
+              <a:rPr lang="en-US" altLang="ko-KR" dirty="0"/>
+              <a:t>.</a:t>
+            </a:r>
+            <a:r>
+              <a:rPr lang="ko-KR" altLang="en-US" dirty="0"/>
+              <a:t>👊🏻</a:t>
+            </a:r>
+            <a:endParaRPr lang="en-US" altLang="ko-KR" dirty="0"/>
+          </a:p>
+          <a:p>
+            <a:r>
+              <a:rPr lang="en-US" altLang="ko-KR" dirty="0"/>
+              <a:t>A</a:t>
+            </a:r>
+          </a:p>
+          <a:p>
+            <a:r>
+              <a:rPr lang="en-US" altLang="ko-KR" dirty="0"/>
+              <a:t>B</a:t>
+            </a:r>
+          </a:p>
+          <a:p>
+            <a:r>
+              <a:rPr lang="ko-KR" altLang="en-US" dirty="0"/>
+              <a:t>실패함수</a:t>
+            </a:r>
+            <a:endParaRPr lang="en-US" altLang="ko-KR" dirty="0"/>
+          </a:p>
+          <a:p>
+            <a:endParaRPr lang="en-US" altLang="ko-KR" dirty="0"/>
+          </a:p>
+          <a:p>
+            <a:r>
+              <a:rPr lang="ko-KR" altLang="en-US" dirty="0"/>
+              <a:t>인덱스</a:t>
+            </a:r>
+            <a:endParaRPr lang="en-US" altLang="ko-KR" dirty="0"/>
+          </a:p>
+          <a:p>
+            <a:r>
+              <a:rPr lang="en-US" altLang="ko-KR" dirty="0"/>
+              <a:t>A</a:t>
+            </a:r>
+          </a:p>
+          <a:p>
+            <a:r>
+              <a:rPr lang="en-US" altLang="ko-KR" dirty="0">
+                <a:solidFill>
+                  <a:schemeClr val="bg2">
+                    <a:lumMod val="90000"/>
+                  </a:schemeClr>
+                </a:solidFill>
+              </a:rPr>
+              <a:t>B’’</a:t>
+            </a:r>
+          </a:p>
+          <a:p>
+            <a:r>
+              <a:rPr lang="en-US" altLang="ko-KR" dirty="0"/>
+              <a:t>B’’’</a:t>
+            </a:r>
+          </a:p>
+        </p:txBody>
+      </p:sp>
+      <p:sp>
+        <p:nvSpPr>
+          <p:cNvPr id="4" name="TextBox 3">
+            <a:extLst>
+              <a:ext uri="{FF2B5EF4-FFF2-40B4-BE49-F238E27FC236}">
+                <a16:creationId xmlns:a16="http://schemas.microsoft.com/office/drawing/2014/main" id="{43127F4A-3457-B3B9-5688-5E80F625769A}"/>
+              </a:ext>
+            </a:extLst>
+          </p:cNvPr>
+          <p:cNvSpPr txBox="1"/>
+          <p:nvPr/>
+        </p:nvSpPr>
+        <p:spPr>
+          <a:xfrm>
+            <a:off x="2912883" y="2404989"/>
+            <a:ext cx="4310795" cy="369332"/>
+          </a:xfrm>
+          <a:prstGeom prst="rect">
+            <a:avLst/>
+          </a:prstGeom>
+          <a:noFill/>
+          <a:ln>
+            <a:solidFill>
+              <a:schemeClr val="tx1"/>
+            </a:solidFill>
+          </a:ln>
+        </p:spPr>
+        <p:txBody>
+          <a:bodyPr wrap="none" rtlCol="0">
+            <a:spAutoFit/>
+          </a:bodyPr>
+          <a:lstStyle/>
+          <a:p>
+            <a:r>
+              <a:rPr lang="en-US" altLang="ko-KR" dirty="0"/>
+              <a:t>A B A B A B A D A B A B A C A B A D</a:t>
+            </a:r>
+            <a:endParaRPr lang="ko-KR" altLang="en-US" dirty="0"/>
+          </a:p>
+        </p:txBody>
+      </p:sp>
+      <p:sp>
+        <p:nvSpPr>
+          <p:cNvPr id="5" name="TextBox 4">
+            <a:extLst>
+              <a:ext uri="{FF2B5EF4-FFF2-40B4-BE49-F238E27FC236}">
+                <a16:creationId xmlns:a16="http://schemas.microsoft.com/office/drawing/2014/main" id="{BA4DF727-CB77-CE8E-D5FA-39CBB55B1A94}"/>
+              </a:ext>
+            </a:extLst>
+          </p:cNvPr>
+          <p:cNvSpPr txBox="1"/>
+          <p:nvPr/>
+        </p:nvSpPr>
+        <p:spPr>
+          <a:xfrm>
+            <a:off x="2912883" y="2909258"/>
+            <a:ext cx="2149948" cy="369332"/>
+          </a:xfrm>
+          <a:prstGeom prst="rect">
+            <a:avLst/>
+          </a:prstGeom>
+          <a:noFill/>
+          <a:ln>
+            <a:solidFill>
+              <a:schemeClr val="tx1"/>
+            </a:solidFill>
+          </a:ln>
+        </p:spPr>
+        <p:txBody>
+          <a:bodyPr wrap="none" rtlCol="0">
+            <a:spAutoFit/>
+          </a:bodyPr>
+          <a:lstStyle/>
+          <a:p>
+            <a:r>
+              <a:rPr lang="en-US" altLang="ko-KR" dirty="0"/>
+              <a:t>A B A B A C A B A</a:t>
+            </a:r>
+            <a:endParaRPr lang="ko-KR" altLang="en-US" dirty="0"/>
+          </a:p>
+        </p:txBody>
+      </p:sp>
+      <p:sp>
+        <p:nvSpPr>
+          <p:cNvPr id="6" name="TextBox 5">
+            <a:extLst>
+              <a:ext uri="{FF2B5EF4-FFF2-40B4-BE49-F238E27FC236}">
+                <a16:creationId xmlns:a16="http://schemas.microsoft.com/office/drawing/2014/main" id="{FDEE1664-2F11-EA75-51A5-8EE9683F460A}"/>
+              </a:ext>
+            </a:extLst>
+          </p:cNvPr>
+          <p:cNvSpPr txBox="1"/>
+          <p:nvPr/>
+        </p:nvSpPr>
+        <p:spPr>
+          <a:xfrm>
+            <a:off x="2914454" y="3429305"/>
+            <a:ext cx="2141933" cy="369332"/>
+          </a:xfrm>
+          <a:prstGeom prst="rect">
+            <a:avLst/>
+          </a:prstGeom>
+          <a:noFill/>
+          <a:ln>
+            <a:solidFill>
+              <a:schemeClr val="tx1"/>
+            </a:solidFill>
+          </a:ln>
+        </p:spPr>
+        <p:txBody>
+          <a:bodyPr wrap="none" rtlCol="0">
+            <a:spAutoFit/>
+          </a:bodyPr>
+          <a:lstStyle/>
+          <a:p>
+            <a:r>
+              <a:rPr lang="en-US" altLang="ko-KR" dirty="0"/>
+              <a:t>0 0  1 2 3  0 1 2 3</a:t>
+            </a:r>
+            <a:endParaRPr lang="ko-KR" altLang="en-US" dirty="0"/>
+          </a:p>
+        </p:txBody>
+      </p:sp>
+      <p:sp>
+        <p:nvSpPr>
+          <p:cNvPr id="7" name="TextBox 6">
+            <a:extLst>
+              <a:ext uri="{FF2B5EF4-FFF2-40B4-BE49-F238E27FC236}">
+                <a16:creationId xmlns:a16="http://schemas.microsoft.com/office/drawing/2014/main" id="{ED54178F-877C-129F-0B65-5B105CDFA095}"/>
+              </a:ext>
+            </a:extLst>
+          </p:cNvPr>
+          <p:cNvSpPr txBox="1"/>
+          <p:nvPr/>
+        </p:nvSpPr>
+        <p:spPr>
+          <a:xfrm>
+            <a:off x="2912883" y="4858956"/>
+            <a:ext cx="4310795" cy="369332"/>
+          </a:xfrm>
+          <a:prstGeom prst="rect">
+            <a:avLst/>
+          </a:prstGeom>
+          <a:noFill/>
+          <a:ln>
+            <a:solidFill>
+              <a:schemeClr val="tx1"/>
+            </a:solidFill>
+          </a:ln>
+        </p:spPr>
+        <p:txBody>
+          <a:bodyPr wrap="none" rtlCol="0">
+            <a:spAutoFit/>
+          </a:bodyPr>
+          <a:lstStyle/>
+          <a:p>
+            <a:r>
+              <a:rPr lang="en-US" altLang="ko-KR" dirty="0"/>
+              <a:t>A B A B A B A D A B A B A C A B A D</a:t>
+            </a:r>
+            <a:endParaRPr lang="ko-KR" altLang="en-US" dirty="0"/>
+          </a:p>
+        </p:txBody>
+      </p:sp>
+      <p:sp>
+        <p:nvSpPr>
+          <p:cNvPr id="10" name="TextBox 9">
+            <a:extLst>
+              <a:ext uri="{FF2B5EF4-FFF2-40B4-BE49-F238E27FC236}">
+                <a16:creationId xmlns:a16="http://schemas.microsoft.com/office/drawing/2014/main" id="{B87D12F0-2DFE-F30E-1D17-A56D5D47305C}"/>
+              </a:ext>
+            </a:extLst>
+          </p:cNvPr>
+          <p:cNvSpPr txBox="1"/>
+          <p:nvPr/>
+        </p:nvSpPr>
+        <p:spPr>
+          <a:xfrm>
+            <a:off x="2920904" y="4462710"/>
+            <a:ext cx="4270721" cy="307777"/>
+          </a:xfrm>
+          <a:prstGeom prst="rect">
+            <a:avLst/>
+          </a:prstGeom>
+          <a:noFill/>
+          <a:ln>
+            <a:solidFill>
+              <a:schemeClr val="tx1"/>
+            </a:solidFill>
+          </a:ln>
+        </p:spPr>
+        <p:txBody>
+          <a:bodyPr wrap="none" rtlCol="0">
+            <a:spAutoFit/>
+          </a:bodyPr>
+          <a:lstStyle/>
+          <a:p>
+            <a:r>
+              <a:rPr lang="en-US" altLang="ko-KR" sz="1400" dirty="0"/>
+              <a:t>0 1   2  3  4  5  6  7  8   9 </a:t>
+            </a:r>
+            <a:r>
+              <a:rPr lang="en-US" altLang="ko-KR" sz="1200" dirty="0"/>
+              <a:t>10 11 12  13 14  15 16 17</a:t>
+            </a:r>
+            <a:endParaRPr lang="ko-KR" altLang="en-US" sz="1400" dirty="0"/>
+          </a:p>
+        </p:txBody>
+      </p:sp>
+      <p:sp>
+        <p:nvSpPr>
+          <p:cNvPr id="12" name="TextBox 11">
+            <a:extLst>
+              <a:ext uri="{FF2B5EF4-FFF2-40B4-BE49-F238E27FC236}">
+                <a16:creationId xmlns:a16="http://schemas.microsoft.com/office/drawing/2014/main" id="{77BF23E2-BACE-4037-60B8-C176519788E0}"/>
+              </a:ext>
+            </a:extLst>
+          </p:cNvPr>
+          <p:cNvSpPr txBox="1"/>
+          <p:nvPr/>
+        </p:nvSpPr>
+        <p:spPr>
+          <a:xfrm>
+            <a:off x="4294106" y="5897904"/>
+            <a:ext cx="2204450" cy="369332"/>
+          </a:xfrm>
+          <a:prstGeom prst="rect">
+            <a:avLst/>
+          </a:prstGeom>
+          <a:noFill/>
+          <a:ln>
+            <a:solidFill>
+              <a:schemeClr val="tx1"/>
+            </a:solidFill>
+          </a:ln>
+        </p:spPr>
+        <p:txBody>
+          <a:bodyPr wrap="none" rtlCol="0">
+            <a:spAutoFit/>
+          </a:bodyPr>
+          <a:lstStyle/>
+          <a:p>
+            <a:r>
+              <a:rPr lang="en-US" altLang="ko-KR" dirty="0"/>
+              <a:t>A B A B A C A B A</a:t>
+            </a:r>
+            <a:endParaRPr lang="ko-KR" altLang="en-US" dirty="0"/>
+          </a:p>
+        </p:txBody>
+      </p:sp>
+      <p:sp>
+        <p:nvSpPr>
+          <p:cNvPr id="13" name="TextBox 12">
+            <a:extLst>
+              <a:ext uri="{FF2B5EF4-FFF2-40B4-BE49-F238E27FC236}">
+                <a16:creationId xmlns:a16="http://schemas.microsoft.com/office/drawing/2014/main" id="{AA3A7341-13C7-5A45-DAF2-E477F61BF6B3}"/>
+              </a:ext>
+            </a:extLst>
+          </p:cNvPr>
+          <p:cNvSpPr txBox="1"/>
+          <p:nvPr/>
+        </p:nvSpPr>
+        <p:spPr>
+          <a:xfrm>
+            <a:off x="4294110" y="6326807"/>
+            <a:ext cx="2141933" cy="307777"/>
+          </a:xfrm>
+          <a:prstGeom prst="rect">
+            <a:avLst/>
+          </a:prstGeom>
+          <a:noFill/>
+          <a:ln>
+            <a:solidFill>
+              <a:schemeClr val="tx1"/>
+            </a:solidFill>
+          </a:ln>
+        </p:spPr>
+        <p:txBody>
+          <a:bodyPr wrap="none" rtlCol="0">
+            <a:spAutoFit/>
+          </a:bodyPr>
+          <a:lstStyle/>
+          <a:p>
+            <a:r>
+              <a:rPr lang="en-US" altLang="ko-KR" sz="1400" dirty="0"/>
+              <a:t>0  1  2   3  4  5  6  7  8</a:t>
+            </a:r>
+            <a:endParaRPr lang="ko-KR" altLang="en-US" sz="1400" dirty="0"/>
+          </a:p>
+        </p:txBody>
+      </p:sp>
+      <p:sp>
+        <p:nvSpPr>
+          <p:cNvPr id="8" name="TextBox 7">
+            <a:extLst>
+              <a:ext uri="{FF2B5EF4-FFF2-40B4-BE49-F238E27FC236}">
+                <a16:creationId xmlns:a16="http://schemas.microsoft.com/office/drawing/2014/main" id="{7F95DF34-2321-4E7F-72A4-DB6B0F93748D}"/>
+              </a:ext>
+            </a:extLst>
+          </p:cNvPr>
+          <p:cNvSpPr txBox="1"/>
+          <p:nvPr/>
+        </p:nvSpPr>
+        <p:spPr>
+          <a:xfrm>
+            <a:off x="3849741" y="5395786"/>
+            <a:ext cx="2204450" cy="369332"/>
+          </a:xfrm>
+          <a:prstGeom prst="rect">
+            <a:avLst/>
+          </a:prstGeom>
+          <a:noFill/>
+          <a:ln>
+            <a:solidFill>
+              <a:schemeClr val="tx1"/>
+            </a:solidFill>
+          </a:ln>
+        </p:spPr>
+        <p:txBody>
+          <a:bodyPr wrap="none" rtlCol="0">
+            <a:spAutoFit/>
+          </a:bodyPr>
+          <a:lstStyle/>
+          <a:p>
+            <a:r>
+              <a:rPr lang="en-US" altLang="ko-KR" dirty="0">
+                <a:solidFill>
+                  <a:schemeClr val="bg2">
+                    <a:lumMod val="90000"/>
+                  </a:schemeClr>
+                </a:solidFill>
+              </a:rPr>
+              <a:t>A B A B A C A B A</a:t>
+            </a:r>
+            <a:endParaRPr lang="ko-KR" altLang="en-US" dirty="0">
+              <a:solidFill>
+                <a:schemeClr val="bg2">
+                  <a:lumMod val="90000"/>
+                </a:schemeClr>
+              </a:solidFill>
+            </a:endParaRPr>
+          </a:p>
+        </p:txBody>
+      </p:sp>
+    </p:spTree>
+    <p:extLst>
+      <p:ext uri="{BB962C8B-B14F-4D97-AF65-F5344CB8AC3E}">
+        <p14:creationId xmlns:p14="http://schemas.microsoft.com/office/powerpoint/2010/main" val="2355755407"/>
+      </p:ext>
+    </p:extLst>
+  </p:cSld>
+  <p:clrMapOvr>
+    <a:masterClrMapping/>
+  </p:clrMapOvr>
+</p:sld>
+</file>
+
+<file path=ppt/slides/slide81.xml><?xml version="1.0" encoding="utf-8"?>
+<p:sld xmlns:a="http://schemas.openxmlformats.org/drawingml/2006/main" xmlns:r="http://schemas.openxmlformats.org/officeDocument/2006/relationships" xmlns:p="http://schemas.openxmlformats.org/presentationml/2006/main">
+  <p:cSld>
+    <p:spTree>
+      <p:nvGrpSpPr>
+        <p:cNvPr id="1" name="">
+          <a:extLst>
+            <a:ext uri="{FF2B5EF4-FFF2-40B4-BE49-F238E27FC236}">
               <a16:creationId xmlns:a16="http://schemas.microsoft.com/office/drawing/2014/main" id="{4EDFE92D-22C1-9B29-7B06-812E92FDE140}"/>
             </a:ext>
           </a:extLst>
@@ -46923,7 +48362,7 @@
 </p:sld>
 </file>
 
-<file path=ppt/slides/slide81.xml><?xml version="1.0" encoding="utf-8"?>
+<file path=ppt/slides/slide82.xml><?xml version="1.0" encoding="utf-8"?>
 <p:sld xmlns:a="http://schemas.openxmlformats.org/drawingml/2006/main" xmlns:r="http://schemas.openxmlformats.org/officeDocument/2006/relationships" xmlns:p="http://schemas.openxmlformats.org/presentationml/2006/main">
   <p:cSld>
     <p:spTree>
@@ -47783,7 +49222,7 @@
 </p:sld>
 </file>
 
-<file path=ppt/slides/slide82.xml><?xml version="1.0" encoding="utf-8"?>
+<file path=ppt/slides/slide83.xml><?xml version="1.0" encoding="utf-8"?>
 <p:sld xmlns:a="http://schemas.openxmlformats.org/drawingml/2006/main" xmlns:r="http://schemas.openxmlformats.org/officeDocument/2006/relationships" xmlns:p="http://schemas.openxmlformats.org/presentationml/2006/main">
   <p:cSld>
     <p:spTree>
@@ -48678,7 +50117,7 @@
 </p:sld>
 </file>
 
-<file path=ppt/slides/slide83.xml><?xml version="1.0" encoding="utf-8"?>
+<file path=ppt/slides/slide84.xml><?xml version="1.0" encoding="utf-8"?>
 <p:sld xmlns:a="http://schemas.openxmlformats.org/drawingml/2006/main" xmlns:r="http://schemas.openxmlformats.org/officeDocument/2006/relationships" xmlns:p="http://schemas.openxmlformats.org/presentationml/2006/main">
   <p:cSld>
     <p:spTree>
@@ -49522,7 +50961,7 @@
 </p:sld>
 </file>
 
-<file path=ppt/slides/slide84.xml><?xml version="1.0" encoding="utf-8"?>
+<file path=ppt/slides/slide85.xml><?xml version="1.0" encoding="utf-8"?>
 <p:sld xmlns:a="http://schemas.openxmlformats.org/drawingml/2006/main" xmlns:r="http://schemas.openxmlformats.org/officeDocument/2006/relationships" xmlns:p="http://schemas.openxmlformats.org/presentationml/2006/main">
   <p:cSld>
     <p:spTree>
@@ -50345,7 +51784,7 @@
 </p:sld>
 </file>
 
-<file path=ppt/slides/slide85.xml><?xml version="1.0" encoding="utf-8"?>
+<file path=ppt/slides/slide86.xml><?xml version="1.0" encoding="utf-8"?>
 <p:sld xmlns:a="http://schemas.openxmlformats.org/drawingml/2006/main" xmlns:r="http://schemas.openxmlformats.org/officeDocument/2006/relationships" xmlns:p="http://schemas.openxmlformats.org/presentationml/2006/main">
   <p:cSld>
     <p:spTree>
@@ -51078,7 +52517,7 @@
 </p:sld>
 </file>
 
-<file path=ppt/slides/slide86.xml><?xml version="1.0" encoding="utf-8"?>
+<file path=ppt/slides/slide87.xml><?xml version="1.0" encoding="utf-8"?>
 <p:sld xmlns:a="http://schemas.openxmlformats.org/drawingml/2006/main" xmlns:r="http://schemas.openxmlformats.org/officeDocument/2006/relationships" xmlns:p="http://schemas.openxmlformats.org/presentationml/2006/main">
   <p:cSld>
     <p:spTree>
@@ -51511,7 +52950,7 @@
 </p:sld>
 </file>
 
-<file path=ppt/slides/slide87.xml><?xml version="1.0" encoding="utf-8"?>
+<file path=ppt/slides/slide88.xml><?xml version="1.0" encoding="utf-8"?>
 <p:sld xmlns:a="http://schemas.openxmlformats.org/drawingml/2006/main" xmlns:r="http://schemas.openxmlformats.org/officeDocument/2006/relationships" xmlns:p="http://schemas.openxmlformats.org/presentationml/2006/main">
   <p:cSld>
     <p:spTree>
@@ -52158,7 +53597,7 @@
 </p:sld>
 </file>
 
-<file path=ppt/slides/slide88.xml><?xml version="1.0" encoding="utf-8"?>
+<file path=ppt/slides/slide89.xml><?xml version="1.0" encoding="utf-8"?>
 <p:sld xmlns:a="http://schemas.openxmlformats.org/drawingml/2006/main" xmlns:r="http://schemas.openxmlformats.org/officeDocument/2006/relationships" xmlns:p="http://schemas.openxmlformats.org/presentationml/2006/main">
   <p:cSld>
     <p:spTree>
@@ -52235,12 +53674,12 @@
           <a:lstStyle/>
           <a:p>
             <a:r>
-              <a:rPr lang="en-US" altLang="ko-KR" dirty="0">
+              <a:rPr lang="en-US" altLang="ko-KR" sz="1400" dirty="0">
                 <a:hlinkClick r:id="rId2"/>
               </a:rPr>
               <a:t>https://github.com/zeonyani/presentation/tree/main/kmp</a:t>
             </a:r>
-            <a:endParaRPr lang="en-US" altLang="ko-KR" dirty="0"/>
+            <a:endParaRPr lang="en-US" altLang="ko-KR" sz="1400" dirty="0"/>
           </a:p>
           <a:p>
             <a:endParaRPr lang="ko-KR" altLang="en-US" dirty="0"/>
@@ -52249,10 +53688,10 @@
       </p:sp>
       <p:pic>
         <p:nvPicPr>
-          <p:cNvPr id="5" name="그림 4">
-            <a:extLst>
-              <a:ext uri="{FF2B5EF4-FFF2-40B4-BE49-F238E27FC236}">
-                <a16:creationId xmlns:a16="http://schemas.microsoft.com/office/drawing/2014/main" id="{07EF6BAB-C894-76FF-02EC-BEDC17F8179B}"/>
+          <p:cNvPr id="7" name="그림 6">
+            <a:extLst>
+              <a:ext uri="{FF2B5EF4-FFF2-40B4-BE49-F238E27FC236}">
+                <a16:creationId xmlns:a16="http://schemas.microsoft.com/office/drawing/2014/main" id="{8551FA1C-B83E-DCA4-E7FD-9AD10BAE6DD6}"/>
               </a:ext>
             </a:extLst>
           </p:cNvPr>
@@ -52269,262 +53708,332 @@
         </p:blipFill>
         <p:spPr>
           <a:xfrm>
-            <a:off x="2217159" y="2348030"/>
-            <a:ext cx="3734321" cy="4067743"/>
+            <a:off x="1087566" y="2406080"/>
+            <a:ext cx="3734321" cy="4086795"/>
           </a:xfrm>
           <a:prstGeom prst="rect">
             <a:avLst/>
           </a:prstGeom>
         </p:spPr>
       </p:pic>
-      <p:pic>
-        <p:nvPicPr>
-          <p:cNvPr id="7" name="그림 6">
-            <a:extLst>
-              <a:ext uri="{FF2B5EF4-FFF2-40B4-BE49-F238E27FC236}">
-                <a16:creationId xmlns:a16="http://schemas.microsoft.com/office/drawing/2014/main" id="{8551FA1C-B83E-DCA4-E7FD-9AD10BAE6DD6}"/>
-              </a:ext>
-            </a:extLst>
-          </p:cNvPr>
-          <p:cNvPicPr>
-            <a:picLocks noChangeAspect="1"/>
-          </p:cNvPicPr>
+      <p:sp>
+        <p:nvSpPr>
+          <p:cNvPr id="4" name="내용 개체 틀 2">
+            <a:extLst>
+              <a:ext uri="{FF2B5EF4-FFF2-40B4-BE49-F238E27FC236}">
+                <a16:creationId xmlns:a16="http://schemas.microsoft.com/office/drawing/2014/main" id="{38EA54EE-0CD8-EA02-B503-463C0BAB9ED7}"/>
+              </a:ext>
+            </a:extLst>
+          </p:cNvPr>
+          <p:cNvSpPr txBox="1">
+            <a:spLocks/>
+          </p:cNvSpPr>
           <p:nvPr/>
-        </p:nvPicPr>
-        <p:blipFill>
-          <a:blip r:embed="rId4"/>
-          <a:stretch>
-            <a:fillRect/>
-          </a:stretch>
-        </p:blipFill>
-        <p:spPr>
-          <a:xfrm>
-            <a:off x="6038389" y="2338503"/>
-            <a:ext cx="3734321" cy="4086795"/>
+        </p:nvSpPr>
+        <p:spPr>
+          <a:xfrm>
+            <a:off x="6096000" y="1825625"/>
+            <a:ext cx="5181600" cy="4351338"/>
           </a:xfrm>
           <a:prstGeom prst="rect">
             <a:avLst/>
           </a:prstGeom>
         </p:spPr>
-      </p:pic>
+        <p:txBody>
+          <a:bodyPr vert="horz" lIns="91440" tIns="45720" rIns="91440" bIns="45720" rtlCol="0">
+            <a:normAutofit fontScale="92500" lnSpcReduction="10000"/>
+          </a:bodyPr>
+          <a:lstStyle>
+            <a:lvl1pPr marL="228600" indent="-228600" algn="l" defTabSz="914400" rtl="0" eaLnBrk="1" latinLnBrk="1" hangingPunct="1">
+              <a:lnSpc>
+                <a:spcPct val="90000"/>
+              </a:lnSpc>
+              <a:spcBef>
+                <a:spcPts val="1000"/>
+              </a:spcBef>
+              <a:buFont typeface="Arial" panose="020B0604020202020204" pitchFamily="34" charset="0"/>
+              <a:buChar char="•"/>
+              <a:defRPr sz="2800" kern="1200">
+                <a:solidFill>
+                  <a:schemeClr val="tx1"/>
+                </a:solidFill>
+                <a:latin typeface="+mn-lt"/>
+                <a:ea typeface="+mn-ea"/>
+                <a:cs typeface="+mn-cs"/>
+              </a:defRPr>
+            </a:lvl1pPr>
+            <a:lvl2pPr marL="685800" indent="-228600" algn="l" defTabSz="914400" rtl="0" eaLnBrk="1" latinLnBrk="1" hangingPunct="1">
+              <a:lnSpc>
+                <a:spcPct val="90000"/>
+              </a:lnSpc>
+              <a:spcBef>
+                <a:spcPts val="500"/>
+              </a:spcBef>
+              <a:buFont typeface="Arial" panose="020B0604020202020204" pitchFamily="34" charset="0"/>
+              <a:buChar char="•"/>
+              <a:defRPr sz="2400" kern="1200">
+                <a:solidFill>
+                  <a:schemeClr val="tx1"/>
+                </a:solidFill>
+                <a:latin typeface="+mn-lt"/>
+                <a:ea typeface="+mn-ea"/>
+                <a:cs typeface="+mn-cs"/>
+              </a:defRPr>
+            </a:lvl2pPr>
+            <a:lvl3pPr marL="1143000" indent="-228600" algn="l" defTabSz="914400" rtl="0" eaLnBrk="1" latinLnBrk="1" hangingPunct="1">
+              <a:lnSpc>
+                <a:spcPct val="90000"/>
+              </a:lnSpc>
+              <a:spcBef>
+                <a:spcPts val="500"/>
+              </a:spcBef>
+              <a:buFont typeface="Arial" panose="020B0604020202020204" pitchFamily="34" charset="0"/>
+              <a:buChar char="•"/>
+              <a:defRPr sz="2000" kern="1200">
+                <a:solidFill>
+                  <a:schemeClr val="tx1"/>
+                </a:solidFill>
+                <a:latin typeface="+mn-lt"/>
+                <a:ea typeface="+mn-ea"/>
+                <a:cs typeface="+mn-cs"/>
+              </a:defRPr>
+            </a:lvl3pPr>
+            <a:lvl4pPr marL="1600200" indent="-228600" algn="l" defTabSz="914400" rtl="0" eaLnBrk="1" latinLnBrk="1" hangingPunct="1">
+              <a:lnSpc>
+                <a:spcPct val="90000"/>
+              </a:lnSpc>
+              <a:spcBef>
+                <a:spcPts val="500"/>
+              </a:spcBef>
+              <a:buFont typeface="Arial" panose="020B0604020202020204" pitchFamily="34" charset="0"/>
+              <a:buChar char="•"/>
+              <a:defRPr sz="1800" kern="1200">
+                <a:solidFill>
+                  <a:schemeClr val="tx1"/>
+                </a:solidFill>
+                <a:latin typeface="+mn-lt"/>
+                <a:ea typeface="+mn-ea"/>
+                <a:cs typeface="+mn-cs"/>
+              </a:defRPr>
+            </a:lvl4pPr>
+            <a:lvl5pPr marL="2057400" indent="-228600" algn="l" defTabSz="914400" rtl="0" eaLnBrk="1" latinLnBrk="1" hangingPunct="1">
+              <a:lnSpc>
+                <a:spcPct val="90000"/>
+              </a:lnSpc>
+              <a:spcBef>
+                <a:spcPts val="500"/>
+              </a:spcBef>
+              <a:buFont typeface="Arial" panose="020B0604020202020204" pitchFamily="34" charset="0"/>
+              <a:buChar char="•"/>
+              <a:defRPr sz="1800" kern="1200">
+                <a:solidFill>
+                  <a:schemeClr val="tx1"/>
+                </a:solidFill>
+                <a:latin typeface="+mn-lt"/>
+                <a:ea typeface="+mn-ea"/>
+                <a:cs typeface="+mn-cs"/>
+              </a:defRPr>
+            </a:lvl5pPr>
+            <a:lvl6pPr marL="2514600" indent="-228600" algn="l" defTabSz="914400" rtl="0" eaLnBrk="1" latinLnBrk="1" hangingPunct="1">
+              <a:lnSpc>
+                <a:spcPct val="90000"/>
+              </a:lnSpc>
+              <a:spcBef>
+                <a:spcPts val="500"/>
+              </a:spcBef>
+              <a:buFont typeface="Arial" panose="020B0604020202020204" pitchFamily="34" charset="0"/>
+              <a:buChar char="•"/>
+              <a:defRPr sz="1800" kern="1200">
+                <a:solidFill>
+                  <a:schemeClr val="tx1"/>
+                </a:solidFill>
+                <a:latin typeface="+mn-lt"/>
+                <a:ea typeface="+mn-ea"/>
+                <a:cs typeface="+mn-cs"/>
+              </a:defRPr>
+            </a:lvl6pPr>
+            <a:lvl7pPr marL="2971800" indent="-228600" algn="l" defTabSz="914400" rtl="0" eaLnBrk="1" latinLnBrk="1" hangingPunct="1">
+              <a:lnSpc>
+                <a:spcPct val="90000"/>
+              </a:lnSpc>
+              <a:spcBef>
+                <a:spcPts val="500"/>
+              </a:spcBef>
+              <a:buFont typeface="Arial" panose="020B0604020202020204" pitchFamily="34" charset="0"/>
+              <a:buChar char="•"/>
+              <a:defRPr sz="1800" kern="1200">
+                <a:solidFill>
+                  <a:schemeClr val="tx1"/>
+                </a:solidFill>
+                <a:latin typeface="+mn-lt"/>
+                <a:ea typeface="+mn-ea"/>
+                <a:cs typeface="+mn-cs"/>
+              </a:defRPr>
+            </a:lvl7pPr>
+            <a:lvl8pPr marL="3429000" indent="-228600" algn="l" defTabSz="914400" rtl="0" eaLnBrk="1" latinLnBrk="1" hangingPunct="1">
+              <a:lnSpc>
+                <a:spcPct val="90000"/>
+              </a:lnSpc>
+              <a:spcBef>
+                <a:spcPts val="500"/>
+              </a:spcBef>
+              <a:buFont typeface="Arial" panose="020B0604020202020204" pitchFamily="34" charset="0"/>
+              <a:buChar char="•"/>
+              <a:defRPr sz="1800" kern="1200">
+                <a:solidFill>
+                  <a:schemeClr val="tx1"/>
+                </a:solidFill>
+                <a:latin typeface="+mn-lt"/>
+                <a:ea typeface="+mn-ea"/>
+                <a:cs typeface="+mn-cs"/>
+              </a:defRPr>
+            </a:lvl8pPr>
+            <a:lvl9pPr marL="3886200" indent="-228600" algn="l" defTabSz="914400" rtl="0" eaLnBrk="1" latinLnBrk="1" hangingPunct="1">
+              <a:lnSpc>
+                <a:spcPct val="90000"/>
+              </a:lnSpc>
+              <a:spcBef>
+                <a:spcPts val="500"/>
+              </a:spcBef>
+              <a:buFont typeface="Arial" panose="020B0604020202020204" pitchFamily="34" charset="0"/>
+              <a:buChar char="•"/>
+              <a:defRPr sz="1800" kern="1200">
+                <a:solidFill>
+                  <a:schemeClr val="tx1"/>
+                </a:solidFill>
+                <a:latin typeface="+mn-lt"/>
+                <a:ea typeface="+mn-ea"/>
+                <a:cs typeface="+mn-cs"/>
+              </a:defRPr>
+            </a:lvl9pPr>
+          </a:lstStyle>
+          <a:p>
+            <a:r>
+              <a:rPr lang="ko-KR" altLang="en-US" dirty="0"/>
+              <a:t>정합성 확인</a:t>
+            </a:r>
+            <a:r>
+              <a:rPr lang="en-US" altLang="ko-KR" dirty="0"/>
+              <a:t>? 4</a:t>
+            </a:r>
+            <a:r>
+              <a:rPr lang="ko-KR" altLang="en-US" dirty="0"/>
+              <a:t>개의 알고리즘이 같은 값을 내는지 확인</a:t>
+            </a:r>
+            <a:r>
+              <a:rPr lang="en-US" altLang="ko-KR" dirty="0"/>
+              <a:t>(</a:t>
+            </a:r>
+            <a:r>
+              <a:rPr lang="ko-KR" altLang="en-US" dirty="0"/>
+              <a:t>고정</a:t>
+            </a:r>
+            <a:r>
+              <a:rPr lang="en-US" altLang="ko-KR" dirty="0"/>
+              <a:t>)</a:t>
+            </a:r>
+          </a:p>
+          <a:p>
+            <a:r>
+              <a:rPr lang="ko-KR" altLang="en-US" dirty="0"/>
+              <a:t>매칭은 무의미</a:t>
+            </a:r>
+            <a:r>
+              <a:rPr lang="en-US" altLang="ko-KR" dirty="0"/>
+              <a:t>(</a:t>
+            </a:r>
+            <a:r>
+              <a:rPr lang="ko-KR" altLang="en-US" dirty="0"/>
+              <a:t>랜덤 텍스트에 랜덤 패턴을 넣는 상황이라 대부분 </a:t>
+            </a:r>
+            <a:r>
+              <a:rPr lang="en-US" altLang="ko-KR" dirty="0"/>
+              <a:t>0) -&gt; </a:t>
+            </a:r>
+            <a:r>
+              <a:rPr lang="ko-KR" altLang="en-US" dirty="0"/>
+              <a:t>여기에서 포인트는 </a:t>
+            </a:r>
+            <a:r>
+              <a:rPr lang="en-US" altLang="ko-KR" dirty="0"/>
+              <a:t>“</a:t>
+            </a:r>
+            <a:r>
+              <a:rPr lang="ko-KR" altLang="en-US" dirty="0"/>
+              <a:t>걸린 시간</a:t>
+            </a:r>
+            <a:r>
+              <a:rPr lang="en-US" altLang="ko-KR" dirty="0"/>
+              <a:t>“</a:t>
+            </a:r>
+          </a:p>
+          <a:p>
+            <a:r>
+              <a:rPr lang="en-US" altLang="ko-KR" dirty="0"/>
+              <a:t>KMP</a:t>
+            </a:r>
+            <a:r>
+              <a:rPr lang="ko-KR" altLang="en-US" dirty="0"/>
+              <a:t>를 기준</a:t>
+            </a:r>
+            <a:r>
+              <a:rPr lang="en-US" altLang="ko-KR" dirty="0"/>
+              <a:t>(x1.00)</a:t>
+            </a:r>
+            <a:r>
+              <a:rPr lang="ko-KR" altLang="en-US" dirty="0"/>
+              <a:t>으로 삼고 알고리즘의 속도를 비교</a:t>
+            </a:r>
+            <a:endParaRPr lang="en-US" altLang="ko-KR" dirty="0"/>
+          </a:p>
+          <a:p>
+            <a:pPr lvl="1"/>
+            <a:r>
+              <a:rPr lang="en-US" altLang="ko-KR" sz="2800" dirty="0"/>
+              <a:t>e.g. x0.06 </a:t>
+            </a:r>
+            <a:r>
+              <a:rPr lang="ko-KR" altLang="en-US" sz="2800" dirty="0"/>
+              <a:t>이면 </a:t>
+            </a:r>
+            <a:r>
+              <a:rPr lang="en-US" altLang="ko-KR" sz="2800" dirty="0"/>
+              <a:t>KMP</a:t>
+            </a:r>
+            <a:r>
+              <a:rPr lang="ko-KR" altLang="en-US" sz="2800" dirty="0"/>
+              <a:t>보다 </a:t>
+            </a:r>
+            <a:r>
+              <a:rPr lang="en-US" altLang="ko-KR" sz="2800" dirty="0"/>
+              <a:t>16</a:t>
+            </a:r>
+            <a:r>
+              <a:rPr lang="ko-KR" altLang="en-US" sz="2800" dirty="0"/>
+              <a:t>배 빠름</a:t>
+            </a:r>
+            <a:endParaRPr lang="en-US" altLang="ko-KR" sz="2800" dirty="0"/>
+          </a:p>
+          <a:p>
+            <a:r>
+              <a:rPr lang="en-US" altLang="ko-KR" dirty="0" err="1"/>
+              <a:t>strstr</a:t>
+            </a:r>
+            <a:r>
+              <a:rPr lang="ko-KR" altLang="en-US" dirty="0"/>
+              <a:t>이 제일 좋아 보이는데</a:t>
+            </a:r>
+            <a:r>
+              <a:rPr lang="en-US" altLang="ko-KR" dirty="0"/>
+              <a:t>?</a:t>
+            </a:r>
+          </a:p>
+        </p:txBody>
+      </p:sp>
     </p:spTree>
     <p:extLst>
       <p:ext uri="{BB962C8B-B14F-4D97-AF65-F5344CB8AC3E}">
         <p14:creationId xmlns:p14="http://schemas.microsoft.com/office/powerpoint/2010/main" val="793346214"/>
-      </p:ext>
-    </p:extLst>
-  </p:cSld>
-  <p:clrMapOvr>
-    <a:masterClrMapping/>
-  </p:clrMapOvr>
-</p:sld>
-</file>
-
-<file path=ppt/slides/slide89.xml><?xml version="1.0" encoding="utf-8"?>
-<p:sld xmlns:a="http://schemas.openxmlformats.org/drawingml/2006/main" xmlns:r="http://schemas.openxmlformats.org/officeDocument/2006/relationships" xmlns:p="http://schemas.openxmlformats.org/presentationml/2006/main">
-  <p:cSld>
-    <p:spTree>
-      <p:nvGrpSpPr>
-        <p:cNvPr id="1" name="">
-          <a:extLst>
-            <a:ext uri="{FF2B5EF4-FFF2-40B4-BE49-F238E27FC236}">
-              <a16:creationId xmlns:a16="http://schemas.microsoft.com/office/drawing/2014/main" id="{40D80BD7-1CA5-8620-CBCA-5231D0005FA9}"/>
-            </a:ext>
-          </a:extLst>
-        </p:cNvPr>
-        <p:cNvGrpSpPr/>
-        <p:nvPr/>
-      </p:nvGrpSpPr>
-      <p:grpSpPr>
-        <a:xfrm>
-          <a:off x="0" y="0"/>
-          <a:ext cx="0" cy="0"/>
-          <a:chOff x="0" y="0"/>
-          <a:chExt cx="0" cy="0"/>
-        </a:xfrm>
-      </p:grpSpPr>
-      <p:sp>
-        <p:nvSpPr>
-          <p:cNvPr id="2" name="제목 1">
-            <a:extLst>
-              <a:ext uri="{FF2B5EF4-FFF2-40B4-BE49-F238E27FC236}">
-                <a16:creationId xmlns:a16="http://schemas.microsoft.com/office/drawing/2014/main" id="{913326A9-2E3F-6654-39CF-09C4C0A650F9}"/>
-              </a:ext>
-            </a:extLst>
-          </p:cNvPr>
-          <p:cNvSpPr>
-            <a:spLocks noGrp="1"/>
-          </p:cNvSpPr>
-          <p:nvPr>
-            <p:ph type="title"/>
-          </p:nvPr>
-        </p:nvSpPr>
-        <p:spPr/>
-        <p:txBody>
-          <a:bodyPr/>
-          <a:lstStyle/>
-          <a:p>
-            <a:r>
-              <a:rPr lang="en-US" altLang="ko-KR" dirty="0"/>
-              <a:t>0x03 </a:t>
-            </a:r>
-            <a:r>
-              <a:rPr lang="ko-KR" altLang="en-US" dirty="0"/>
-              <a:t>실습</a:t>
-            </a:r>
-          </a:p>
-        </p:txBody>
-      </p:sp>
-      <p:sp>
-        <p:nvSpPr>
-          <p:cNvPr id="3" name="내용 개체 틀 2">
-            <a:extLst>
-              <a:ext uri="{FF2B5EF4-FFF2-40B4-BE49-F238E27FC236}">
-                <a16:creationId xmlns:a16="http://schemas.microsoft.com/office/drawing/2014/main" id="{C488079D-029B-685D-807E-9D3BFC84097D}"/>
-              </a:ext>
-            </a:extLst>
-          </p:cNvPr>
-          <p:cNvSpPr>
-            <a:spLocks noGrp="1"/>
-          </p:cNvSpPr>
-          <p:nvPr>
-            <p:ph idx="1"/>
-          </p:nvPr>
-        </p:nvSpPr>
-        <p:spPr/>
-        <p:txBody>
-          <a:bodyPr/>
-          <a:lstStyle/>
-          <a:p>
-            <a:r>
-              <a:rPr lang="ko-KR" altLang="en-US" dirty="0"/>
-              <a:t>정합성 확인</a:t>
-            </a:r>
-            <a:r>
-              <a:rPr lang="en-US" altLang="ko-KR" dirty="0"/>
-              <a:t>? 4</a:t>
-            </a:r>
-            <a:r>
-              <a:rPr lang="ko-KR" altLang="en-US" dirty="0"/>
-              <a:t>개의 알고리즘이 같은 값을 내는지 확인</a:t>
-            </a:r>
-            <a:r>
-              <a:rPr lang="en-US" altLang="ko-KR" dirty="0"/>
-              <a:t>(</a:t>
-            </a:r>
-            <a:r>
-              <a:rPr lang="ko-KR" altLang="en-US" dirty="0"/>
-              <a:t>고정</a:t>
-            </a:r>
-            <a:r>
-              <a:rPr lang="en-US" altLang="ko-KR" dirty="0"/>
-              <a:t>)</a:t>
-            </a:r>
-          </a:p>
-          <a:p>
-            <a:r>
-              <a:rPr lang="ko-KR" altLang="en-US" dirty="0"/>
-              <a:t>매칭은 무의미</a:t>
-            </a:r>
-            <a:r>
-              <a:rPr lang="en-US" altLang="ko-KR" dirty="0"/>
-              <a:t>(</a:t>
-            </a:r>
-            <a:r>
-              <a:rPr lang="ko-KR" altLang="en-US" dirty="0"/>
-              <a:t>랜덤 텍스트에 랜덤 패턴을 넣는 상황이라 대부분 </a:t>
-            </a:r>
-            <a:r>
-              <a:rPr lang="en-US" altLang="ko-KR" dirty="0"/>
-              <a:t>0) -&gt; </a:t>
-            </a:r>
-            <a:r>
-              <a:rPr lang="ko-KR" altLang="en-US" dirty="0"/>
-              <a:t>여기에서 포인트는 </a:t>
-            </a:r>
-            <a:r>
-              <a:rPr lang="en-US" altLang="ko-KR" dirty="0"/>
-              <a:t>“</a:t>
-            </a:r>
-            <a:r>
-              <a:rPr lang="ko-KR" altLang="en-US" dirty="0"/>
-              <a:t>걸린 시간</a:t>
-            </a:r>
-            <a:r>
-              <a:rPr lang="en-US" altLang="ko-KR" dirty="0"/>
-              <a:t>“</a:t>
-            </a:r>
-          </a:p>
-          <a:p>
-            <a:r>
-              <a:rPr lang="en-US" altLang="ko-KR" dirty="0"/>
-              <a:t>KMP</a:t>
-            </a:r>
-            <a:r>
-              <a:rPr lang="ko-KR" altLang="en-US" dirty="0"/>
-              <a:t>를 기준</a:t>
-            </a:r>
-            <a:r>
-              <a:rPr lang="en-US" altLang="ko-KR" dirty="0"/>
-              <a:t>(x1.00)</a:t>
-            </a:r>
-            <a:r>
-              <a:rPr lang="ko-KR" altLang="en-US" dirty="0"/>
-              <a:t>으로 삼고 알고리즘의 속도를 비교</a:t>
-            </a:r>
-            <a:endParaRPr lang="en-US" altLang="ko-KR" dirty="0"/>
-          </a:p>
-          <a:p>
-            <a:pPr lvl="1"/>
-            <a:r>
-              <a:rPr lang="en-US" altLang="ko-KR" dirty="0"/>
-              <a:t>e.g. x0.06 </a:t>
-            </a:r>
-            <a:r>
-              <a:rPr lang="ko-KR" altLang="en-US" dirty="0"/>
-              <a:t>이면 </a:t>
-            </a:r>
-            <a:r>
-              <a:rPr lang="en-US" altLang="ko-KR" dirty="0"/>
-              <a:t>KMP</a:t>
-            </a:r>
-            <a:r>
-              <a:rPr lang="ko-KR" altLang="en-US" dirty="0"/>
-              <a:t>보다 </a:t>
-            </a:r>
-            <a:r>
-              <a:rPr lang="en-US" altLang="ko-KR" dirty="0"/>
-              <a:t>16</a:t>
-            </a:r>
-            <a:r>
-              <a:rPr lang="ko-KR" altLang="en-US" dirty="0"/>
-              <a:t>배 빠름</a:t>
-            </a:r>
-            <a:endParaRPr lang="en-US" altLang="ko-KR" dirty="0"/>
-          </a:p>
-          <a:p>
-            <a:r>
-              <a:rPr lang="en-US" altLang="ko-KR" dirty="0" err="1"/>
-              <a:t>strstr</a:t>
-            </a:r>
-            <a:r>
-              <a:rPr lang="ko-KR" altLang="en-US" dirty="0"/>
-              <a:t>이 제일 좋아 보이는데</a:t>
-            </a:r>
-            <a:r>
-              <a:rPr lang="en-US" altLang="ko-KR" dirty="0"/>
-              <a:t>?</a:t>
-            </a:r>
-          </a:p>
-          <a:p>
-            <a:endParaRPr lang="en-US" altLang="ko-KR" dirty="0"/>
-          </a:p>
-        </p:txBody>
-      </p:sp>
-    </p:spTree>
-    <p:extLst>
-      <p:ext uri="{BB962C8B-B14F-4D97-AF65-F5344CB8AC3E}">
-        <p14:creationId xmlns:p14="http://schemas.microsoft.com/office/powerpoint/2010/main" val="1167723115"/>
       </p:ext>
     </p:extLst>
   </p:cSld>
